--- a/Project_Review_2_Self_Auditing_Ledger.pptx
+++ b/Project_Review_2_Self_Auditing_Ledger.pptx
@@ -1,6 +1,6 @@
 
 <file path=ppt/presentation.xml><?xml version="1.0" encoding="utf-8"?>
-<p:presentation xmlns:a="http://schemas.openxmlformats.org/drawingml/2006/main" xmlns:r="http://schemas.openxmlformats.org/officeDocument/2006/relationships" xmlns:p="http://schemas.openxmlformats.org/presentationml/2006/main" showSpecialPlsOnTitleSld="0" strictFirstAndLastChars="0" saveSubsetFonts="1" autoCompressPictures="0">
+<p:presentation xmlns:a="http://schemas.openxmlformats.org/drawingml/2006/main" xmlns:r="http://schemas.openxmlformats.org/officeDocument/2006/relationships" xmlns:p="http://schemas.openxmlformats.org/presentationml/2006/main" showSpecialPlsOnTitleSld="0" saveSubsetFonts="1">
   <p:sldMasterIdLst>
     <p:sldMasterId id="2147483648" r:id="rId1"/>
   </p:sldMasterIdLst>
@@ -9,26 +9,26 @@
   </p:notesMasterIdLst>
   <p:sldIdLst>
     <p:sldId id="256" r:id="rId2"/>
-    <p:sldId id="257" r:id="rId3"/>
-    <p:sldId id="258" r:id="rId4"/>
-    <p:sldId id="259" r:id="rId5"/>
-    <p:sldId id="269" r:id="rId6"/>
-    <p:sldId id="261" r:id="rId7"/>
-    <p:sldId id="262" r:id="rId8"/>
-    <p:sldId id="263" r:id="rId9"/>
-    <p:sldId id="264" r:id="rId10"/>
-    <p:sldId id="265" r:id="rId11"/>
-    <p:sldId id="266" r:id="rId12"/>
-    <p:sldId id="267" r:id="rId13"/>
-    <p:sldId id="268" r:id="rId14"/>
+    <p:sldId id="263" r:id="rId3"/>
+    <p:sldId id="257" r:id="rId4"/>
+    <p:sldId id="258" r:id="rId5"/>
+    <p:sldId id="259" r:id="rId6"/>
+    <p:sldId id="260" r:id="rId7"/>
+    <p:sldId id="261" r:id="rId8"/>
+    <p:sldId id="264" r:id="rId9"/>
+    <p:sldId id="265" r:id="rId10"/>
+    <p:sldId id="266" r:id="rId11"/>
+    <p:sldId id="267" r:id="rId12"/>
+    <p:sldId id="268" r:id="rId13"/>
+    <p:sldId id="262" r:id="rId14"/>
   </p:sldIdLst>
   <p:sldSz cx="12192000" cy="6858000"/>
   <p:notesSz cx="6858000" cy="9144000"/>
   <p:defaultTextStyle>
-    <a:defPPr lvl="0">
+    <a:defPPr>
       <a:defRPr lang="en-US"/>
     </a:defPPr>
-    <a:lvl1pPr marL="0" lvl="0" algn="l" defTabSz="914400" rtl="0" eaLnBrk="1" latinLnBrk="0" hangingPunct="1">
+    <a:lvl1pPr marL="0" algn="l" defTabSz="914400" rtl="0" eaLnBrk="1" latinLnBrk="0" hangingPunct="1">
       <a:defRPr sz="1800" kern="1200">
         <a:solidFill>
           <a:schemeClr val="tx1"/>
@@ -38,7 +38,7 @@
         <a:cs typeface="+mn-cs"/>
       </a:defRPr>
     </a:lvl1pPr>
-    <a:lvl2pPr marL="457200" lvl="1" algn="l" defTabSz="914400" rtl="0" eaLnBrk="1" latinLnBrk="0" hangingPunct="1">
+    <a:lvl2pPr marL="457200" algn="l" defTabSz="914400" rtl="0" eaLnBrk="1" latinLnBrk="0" hangingPunct="1">
       <a:defRPr sz="1800" kern="1200">
         <a:solidFill>
           <a:schemeClr val="tx1"/>
@@ -48,7 +48,7 @@
         <a:cs typeface="+mn-cs"/>
       </a:defRPr>
     </a:lvl2pPr>
-    <a:lvl3pPr marL="914400" lvl="2" algn="l" defTabSz="914400" rtl="0" eaLnBrk="1" latinLnBrk="0" hangingPunct="1">
+    <a:lvl3pPr marL="914400" algn="l" defTabSz="914400" rtl="0" eaLnBrk="1" latinLnBrk="0" hangingPunct="1">
       <a:defRPr sz="1800" kern="1200">
         <a:solidFill>
           <a:schemeClr val="tx1"/>
@@ -58,7 +58,7 @@
         <a:cs typeface="+mn-cs"/>
       </a:defRPr>
     </a:lvl3pPr>
-    <a:lvl4pPr marL="1371600" lvl="3" algn="l" defTabSz="914400" rtl="0" eaLnBrk="1" latinLnBrk="0" hangingPunct="1">
+    <a:lvl4pPr marL="1371600" algn="l" defTabSz="914400" rtl="0" eaLnBrk="1" latinLnBrk="0" hangingPunct="1">
       <a:defRPr sz="1800" kern="1200">
         <a:solidFill>
           <a:schemeClr val="tx1"/>
@@ -68,7 +68,7 @@
         <a:cs typeface="+mn-cs"/>
       </a:defRPr>
     </a:lvl4pPr>
-    <a:lvl5pPr marL="1828800" lvl="4" algn="l" defTabSz="914400" rtl="0" eaLnBrk="1" latinLnBrk="0" hangingPunct="1">
+    <a:lvl5pPr marL="1828800" algn="l" defTabSz="914400" rtl="0" eaLnBrk="1" latinLnBrk="0" hangingPunct="1">
       <a:defRPr sz="1800" kern="1200">
         <a:solidFill>
           <a:schemeClr val="tx1"/>
@@ -78,7 +78,7 @@
         <a:cs typeface="+mn-cs"/>
       </a:defRPr>
     </a:lvl5pPr>
-    <a:lvl6pPr marL="2286000" lvl="5" algn="l" defTabSz="914400" rtl="0" eaLnBrk="1" latinLnBrk="0" hangingPunct="1">
+    <a:lvl6pPr marL="2286000" algn="l" defTabSz="914400" rtl="0" eaLnBrk="1" latinLnBrk="0" hangingPunct="1">
       <a:defRPr sz="1800" kern="1200">
         <a:solidFill>
           <a:schemeClr val="tx1"/>
@@ -88,7 +88,7 @@
         <a:cs typeface="+mn-cs"/>
       </a:defRPr>
     </a:lvl6pPr>
-    <a:lvl7pPr marL="2743200" lvl="6" algn="l" defTabSz="914400" rtl="0" eaLnBrk="1" latinLnBrk="0" hangingPunct="1">
+    <a:lvl7pPr marL="2743200" algn="l" defTabSz="914400" rtl="0" eaLnBrk="1" latinLnBrk="0" hangingPunct="1">
       <a:defRPr sz="1800" kern="1200">
         <a:solidFill>
           <a:schemeClr val="tx1"/>
@@ -98,7 +98,7 @@
         <a:cs typeface="+mn-cs"/>
       </a:defRPr>
     </a:lvl7pPr>
-    <a:lvl8pPr marL="3200400" lvl="7" algn="l" defTabSz="914400" rtl="0" eaLnBrk="1" latinLnBrk="0" hangingPunct="1">
+    <a:lvl8pPr marL="3200400" algn="l" defTabSz="914400" rtl="0" eaLnBrk="1" latinLnBrk="0" hangingPunct="1">
       <a:defRPr sz="1800" kern="1200">
         <a:solidFill>
           <a:schemeClr val="tx1"/>
@@ -108,7 +108,7 @@
         <a:cs typeface="+mn-cs"/>
       </a:defRPr>
     </a:lvl8pPr>
-    <a:lvl9pPr marL="3657600" lvl="8" algn="l" defTabSz="914400" rtl="0" eaLnBrk="1" latinLnBrk="0" hangingPunct="1">
+    <a:lvl9pPr marL="3657600" algn="l" defTabSz="914400" rtl="0" eaLnBrk="1" latinLnBrk="0" hangingPunct="1">
       <a:defRPr sz="1800" kern="1200">
         <a:solidFill>
           <a:schemeClr val="tx1"/>
@@ -119,490 +119,12 @@
       </a:defRPr>
     </a:lvl9pPr>
   </p:defaultTextStyle>
+  <p:extLst>
+    <p:ext uri="{EFAFB233-063F-42B5-8137-9DF3F51BA10A}">
+      <p15:sldGuideLst xmlns:p15="http://schemas.microsoft.com/office/powerpoint/2012/main"/>
+    </p:ext>
+  </p:extLst>
 </p:presentation>
-</file>
-
-<file path=ppt/revisionInfo.xml><?xml version="1.0" encoding="utf-8"?>
-<p1510:revInfo xmlns:a="http://schemas.openxmlformats.org/drawingml/2006/main" xmlns:r="http://schemas.openxmlformats.org/officeDocument/2006/relationships" xmlns:p1510="http://schemas.microsoft.com/office/powerpoint/2015/10/main">
-  <p1510:revLst>
-    <p1510:client id="{30A3BC9C-DAC7-4F07-8A0B-8D0FA3FC0F00}" v="11" dt="2026-09-09T05:30:50.110"/>
-  </p1510:revLst>
-</p1510:revInfo>
-</file>
-
-<file path=ppt/changesInfos/changesInfo1.xml><?xml version="1.0" encoding="utf-8"?>
-<pc:chgInfo xmlns:a="http://schemas.openxmlformats.org/drawingml/2006/main" xmlns:r="http://schemas.openxmlformats.org/officeDocument/2006/relationships" xmlns:ac="http://schemas.microsoft.com/office/drawing/2013/main/command" xmlns:pc="http://schemas.microsoft.com/office/powerpoint/2013/main/command">
-  <pc:docChgLst>
-    <pc:chgData name="Aarin Bhatta" userId="b6d9ad1ee625d9c1" providerId="LiveId" clId="{8B7C5281-C583-4B19-9272-2469D3C3B7BF}"/>
-    <pc:docChg chg="undo custSel addSld delSld modSld">
-      <pc:chgData name="Aarin Bhatta" userId="b6d9ad1ee625d9c1" providerId="LiveId" clId="{8B7C5281-C583-4B19-9272-2469D3C3B7BF}" dt="2026-09-09T05:30:58.608" v="93" actId="404"/>
-      <pc:docMkLst>
-        <pc:docMk/>
-      </pc:docMkLst>
-      <pc:sldChg chg="addSp delSp modSp mod">
-        <pc:chgData name="Aarin Bhatta" userId="b6d9ad1ee625d9c1" providerId="LiveId" clId="{8B7C5281-C583-4B19-9272-2469D3C3B7BF}" dt="2026-09-09T05:23:57.748" v="5" actId="14100"/>
-        <pc:sldMkLst>
-          <pc:docMk/>
-          <pc:sldMk cId="1256560622" sldId="257"/>
-        </pc:sldMkLst>
-        <pc:spChg chg="mod">
-          <ac:chgData name="Aarin Bhatta" userId="b6d9ad1ee625d9c1" providerId="LiveId" clId="{8B7C5281-C583-4B19-9272-2469D3C3B7BF}" dt="2026-09-09T05:23:53.715" v="4" actId="5793"/>
-          <ac:spMkLst>
-            <pc:docMk/>
-            <pc:sldMk cId="1256560622" sldId="257"/>
-            <ac:spMk id="3" creationId="{8233367C-DAD6-6E34-D21A-A981C09442F2}"/>
-          </ac:spMkLst>
-        </pc:spChg>
-        <pc:picChg chg="add mod">
-          <ac:chgData name="Aarin Bhatta" userId="b6d9ad1ee625d9c1" providerId="LiveId" clId="{8B7C5281-C583-4B19-9272-2469D3C3B7BF}" dt="2026-09-09T05:23:57.748" v="5" actId="14100"/>
-          <ac:picMkLst>
-            <pc:docMk/>
-            <pc:sldMk cId="1256560622" sldId="257"/>
-            <ac:picMk id="8" creationId="{A3EACD31-CC9F-213B-7E78-579761228EA8}"/>
-          </ac:picMkLst>
-        </pc:picChg>
-        <pc:picChg chg="del mod">
-          <ac:chgData name="Aarin Bhatta" userId="b6d9ad1ee625d9c1" providerId="LiveId" clId="{8B7C5281-C583-4B19-9272-2469D3C3B7BF}" dt="2026-09-09T05:22:50.975" v="1" actId="478"/>
-          <ac:picMkLst>
-            <pc:docMk/>
-            <pc:sldMk cId="1256560622" sldId="257"/>
-            <ac:picMk id="10" creationId="{8CFF88D1-7A15-E122-39FA-9C7DA1DFCDF4}"/>
-          </ac:picMkLst>
-        </pc:picChg>
-      </pc:sldChg>
-      <pc:sldChg chg="modSp mod">
-        <pc:chgData name="Aarin Bhatta" userId="b6d9ad1ee625d9c1" providerId="LiveId" clId="{8B7C5281-C583-4B19-9272-2469D3C3B7BF}" dt="2026-09-09T05:24:10.865" v="10" actId="5793"/>
-        <pc:sldMkLst>
-          <pc:docMk/>
-          <pc:sldMk cId="2543518868" sldId="258"/>
-        </pc:sldMkLst>
-        <pc:spChg chg="mod">
-          <ac:chgData name="Aarin Bhatta" userId="b6d9ad1ee625d9c1" providerId="LiveId" clId="{8B7C5281-C583-4B19-9272-2469D3C3B7BF}" dt="2026-09-09T05:24:10.865" v="10" actId="5793"/>
-          <ac:spMkLst>
-            <pc:docMk/>
-            <pc:sldMk cId="2543518868" sldId="258"/>
-            <ac:spMk id="3" creationId="{4D68A428-04DA-E6A8-7606-5D2FE5F31C52}"/>
-          </ac:spMkLst>
-        </pc:spChg>
-      </pc:sldChg>
-      <pc:sldChg chg="modSp mod">
-        <pc:chgData name="Aarin Bhatta" userId="b6d9ad1ee625d9c1" providerId="LiveId" clId="{8B7C5281-C583-4B19-9272-2469D3C3B7BF}" dt="2026-09-09T05:24:22.729" v="13" actId="5793"/>
-        <pc:sldMkLst>
-          <pc:docMk/>
-          <pc:sldMk cId="3453097932" sldId="259"/>
-        </pc:sldMkLst>
-        <pc:spChg chg="mod">
-          <ac:chgData name="Aarin Bhatta" userId="b6d9ad1ee625d9c1" providerId="LiveId" clId="{8B7C5281-C583-4B19-9272-2469D3C3B7BF}" dt="2026-09-09T05:24:22.729" v="13" actId="5793"/>
-          <ac:spMkLst>
-            <pc:docMk/>
-            <pc:sldMk cId="3453097932" sldId="259"/>
-            <ac:spMk id="3" creationId="{35DDED8F-1EBD-2E10-598E-0CA3F56F05DF}"/>
-          </ac:spMkLst>
-        </pc:spChg>
-      </pc:sldChg>
-      <pc:sldChg chg="delSp del mod">
-        <pc:chgData name="Aarin Bhatta" userId="b6d9ad1ee625d9c1" providerId="LiveId" clId="{8B7C5281-C583-4B19-9272-2469D3C3B7BF}" dt="2026-09-09T05:25:42.668" v="33" actId="2696"/>
-        <pc:sldMkLst>
-          <pc:docMk/>
-          <pc:sldMk cId="857449727" sldId="260"/>
-        </pc:sldMkLst>
-        <pc:picChg chg="del">
-          <ac:chgData name="Aarin Bhatta" userId="b6d9ad1ee625d9c1" providerId="LiveId" clId="{8B7C5281-C583-4B19-9272-2469D3C3B7BF}" dt="2026-09-09T05:24:30.792" v="14" actId="478"/>
-          <ac:picMkLst>
-            <pc:docMk/>
-            <pc:sldMk cId="857449727" sldId="260"/>
-            <ac:picMk id="7" creationId="{2EB6993A-B8FB-1E92-71D4-98155A7EDC1C}"/>
-          </ac:picMkLst>
-        </pc:picChg>
-      </pc:sldChg>
-      <pc:sldChg chg="addSp delSp modSp mod">
-        <pc:chgData name="Aarin Bhatta" userId="b6d9ad1ee625d9c1" providerId="LiveId" clId="{8B7C5281-C583-4B19-9272-2469D3C3B7BF}" dt="2026-09-09T05:26:16.048" v="49" actId="20577"/>
-        <pc:sldMkLst>
-          <pc:docMk/>
-          <pc:sldMk cId="2623102820" sldId="261"/>
-        </pc:sldMkLst>
-        <pc:spChg chg="del">
-          <ac:chgData name="Aarin Bhatta" userId="b6d9ad1ee625d9c1" providerId="LiveId" clId="{8B7C5281-C583-4B19-9272-2469D3C3B7BF}" dt="2026-09-09T05:25:56.149" v="34" actId="478"/>
-          <ac:spMkLst>
-            <pc:docMk/>
-            <pc:sldMk cId="2623102820" sldId="261"/>
-            <ac:spMk id="2" creationId="{A2430A72-466B-CBDE-2F02-635BA91A98AF}"/>
-          </ac:spMkLst>
-        </pc:spChg>
-        <pc:spChg chg="del mod">
-          <ac:chgData name="Aarin Bhatta" userId="b6d9ad1ee625d9c1" providerId="LiveId" clId="{8B7C5281-C583-4B19-9272-2469D3C3B7BF}" dt="2026-09-09T05:25:56.149" v="34" actId="478"/>
-          <ac:spMkLst>
-            <pc:docMk/>
-            <pc:sldMk cId="2623102820" sldId="261"/>
-            <ac:spMk id="3" creationId="{F07F8AC8-6380-9217-CA4C-1FBF1C25C60E}"/>
-          </ac:spMkLst>
-        </pc:spChg>
-        <pc:spChg chg="del">
-          <ac:chgData name="Aarin Bhatta" userId="b6d9ad1ee625d9c1" providerId="LiveId" clId="{8B7C5281-C583-4B19-9272-2469D3C3B7BF}" dt="2026-09-09T05:25:56.149" v="34" actId="478"/>
-          <ac:spMkLst>
-            <pc:docMk/>
-            <pc:sldMk cId="2623102820" sldId="261"/>
-            <ac:spMk id="4" creationId="{2E07AC55-BA5E-4123-39E6-B79860C6C9EE}"/>
-          </ac:spMkLst>
-        </pc:spChg>
-        <pc:spChg chg="del">
-          <ac:chgData name="Aarin Bhatta" userId="b6d9ad1ee625d9c1" providerId="LiveId" clId="{8B7C5281-C583-4B19-9272-2469D3C3B7BF}" dt="2026-09-09T05:25:56.149" v="34" actId="478"/>
-          <ac:spMkLst>
-            <pc:docMk/>
-            <pc:sldMk cId="2623102820" sldId="261"/>
-            <ac:spMk id="5" creationId="{1711DDA3-7A7C-1F61-1795-3A01ED678FAB}"/>
-          </ac:spMkLst>
-        </pc:spChg>
-        <pc:spChg chg="del">
-          <ac:chgData name="Aarin Bhatta" userId="b6d9ad1ee625d9c1" providerId="LiveId" clId="{8B7C5281-C583-4B19-9272-2469D3C3B7BF}" dt="2026-09-09T05:25:56.149" v="34" actId="478"/>
-          <ac:spMkLst>
-            <pc:docMk/>
-            <pc:sldMk cId="2623102820" sldId="261"/>
-            <ac:spMk id="6" creationId="{D94E3226-1DB1-3A4D-CE37-4A2AD48EF1F1}"/>
-          </ac:spMkLst>
-        </pc:spChg>
-        <pc:spChg chg="add del mod">
-          <ac:chgData name="Aarin Bhatta" userId="b6d9ad1ee625d9c1" providerId="LiveId" clId="{8B7C5281-C583-4B19-9272-2469D3C3B7BF}" dt="2026-09-09T05:25:57.422" v="36" actId="478"/>
-          <ac:spMkLst>
-            <pc:docMk/>
-            <pc:sldMk cId="2623102820" sldId="261"/>
-            <ac:spMk id="8" creationId="{3E302B9F-8A04-A21C-9CC9-A92FEA39EE76}"/>
-          </ac:spMkLst>
-        </pc:spChg>
-        <pc:spChg chg="add del mod">
-          <ac:chgData name="Aarin Bhatta" userId="b6d9ad1ee625d9c1" providerId="LiveId" clId="{8B7C5281-C583-4B19-9272-2469D3C3B7BF}" dt="2026-09-09T05:25:57.422" v="36" actId="478"/>
-          <ac:spMkLst>
-            <pc:docMk/>
-            <pc:sldMk cId="2623102820" sldId="261"/>
-            <ac:spMk id="10" creationId="{321201FA-D2EF-3E9D-86E4-7F9B249FFAAA}"/>
-          </ac:spMkLst>
-        </pc:spChg>
-        <pc:spChg chg="add del mod">
-          <ac:chgData name="Aarin Bhatta" userId="b6d9ad1ee625d9c1" providerId="LiveId" clId="{8B7C5281-C583-4B19-9272-2469D3C3B7BF}" dt="2026-09-09T05:25:57.422" v="36" actId="478"/>
-          <ac:spMkLst>
-            <pc:docMk/>
-            <pc:sldMk cId="2623102820" sldId="261"/>
-            <ac:spMk id="11" creationId="{E1F47A22-E0B3-2FCE-CA62-A6D89C02B2AF}"/>
-          </ac:spMkLst>
-        </pc:spChg>
-        <pc:spChg chg="add del mod">
-          <ac:chgData name="Aarin Bhatta" userId="b6d9ad1ee625d9c1" providerId="LiveId" clId="{8B7C5281-C583-4B19-9272-2469D3C3B7BF}" dt="2026-09-09T05:25:57.422" v="36" actId="478"/>
-          <ac:spMkLst>
-            <pc:docMk/>
-            <pc:sldMk cId="2623102820" sldId="261"/>
-            <ac:spMk id="12" creationId="{6DD03899-D888-5B5D-6C78-3023A8A15E52}"/>
-          </ac:spMkLst>
-        </pc:spChg>
-        <pc:spChg chg="add del mod">
-          <ac:chgData name="Aarin Bhatta" userId="b6d9ad1ee625d9c1" providerId="LiveId" clId="{8B7C5281-C583-4B19-9272-2469D3C3B7BF}" dt="2026-09-09T05:25:57.422" v="36" actId="478"/>
-          <ac:spMkLst>
-            <pc:docMk/>
-            <pc:sldMk cId="2623102820" sldId="261"/>
-            <ac:spMk id="13" creationId="{2BA8102A-274A-A36C-D21E-35A1BF7ACF83}"/>
-          </ac:spMkLst>
-        </pc:spChg>
-        <pc:spChg chg="add del mod">
-          <ac:chgData name="Aarin Bhatta" userId="b6d9ad1ee625d9c1" providerId="LiveId" clId="{8B7C5281-C583-4B19-9272-2469D3C3B7BF}" dt="2026-09-09T05:25:57.422" v="36" actId="478"/>
-          <ac:spMkLst>
-            <pc:docMk/>
-            <pc:sldMk cId="2623102820" sldId="261"/>
-            <ac:spMk id="14" creationId="{F0BBCF5F-0921-94E4-2B86-D9F3FC96A43D}"/>
-          </ac:spMkLst>
-        </pc:spChg>
-        <pc:spChg chg="add del mod">
-          <ac:chgData name="Aarin Bhatta" userId="b6d9ad1ee625d9c1" providerId="LiveId" clId="{8B7C5281-C583-4B19-9272-2469D3C3B7BF}" dt="2026-09-09T05:25:57.422" v="36" actId="478"/>
-          <ac:spMkLst>
-            <pc:docMk/>
-            <pc:sldMk cId="2623102820" sldId="261"/>
-            <ac:spMk id="15" creationId="{34E16CF1-938C-6762-01B7-5FB35FE6C829}"/>
-          </ac:spMkLst>
-        </pc:spChg>
-        <pc:spChg chg="add mod">
-          <ac:chgData name="Aarin Bhatta" userId="b6d9ad1ee625d9c1" providerId="LiveId" clId="{8B7C5281-C583-4B19-9272-2469D3C3B7BF}" dt="2026-09-09T05:25:58.072" v="37"/>
-          <ac:spMkLst>
-            <pc:docMk/>
-            <pc:sldMk cId="2623102820" sldId="261"/>
-            <ac:spMk id="16" creationId="{24F9226B-00C8-0F39-4E9F-98727A1E228B}"/>
-          </ac:spMkLst>
-        </pc:spChg>
-        <pc:spChg chg="add mod">
-          <ac:chgData name="Aarin Bhatta" userId="b6d9ad1ee625d9c1" providerId="LiveId" clId="{8B7C5281-C583-4B19-9272-2469D3C3B7BF}" dt="2026-09-09T05:25:58.072" v="37"/>
-          <ac:spMkLst>
-            <pc:docMk/>
-            <pc:sldMk cId="2623102820" sldId="261"/>
-            <ac:spMk id="17" creationId="{0B83C472-3E64-5231-599F-06E474D72043}"/>
-          </ac:spMkLst>
-        </pc:spChg>
-        <pc:spChg chg="add mod">
-          <ac:chgData name="Aarin Bhatta" userId="b6d9ad1ee625d9c1" providerId="LiveId" clId="{8B7C5281-C583-4B19-9272-2469D3C3B7BF}" dt="2026-09-09T05:26:16.048" v="49" actId="20577"/>
-          <ac:spMkLst>
-            <pc:docMk/>
-            <pc:sldMk cId="2623102820" sldId="261"/>
-            <ac:spMk id="18" creationId="{39A3456A-F5F5-4F92-6F84-7377997E4D55}"/>
-          </ac:spMkLst>
-        </pc:spChg>
-        <pc:spChg chg="add mod">
-          <ac:chgData name="Aarin Bhatta" userId="b6d9ad1ee625d9c1" providerId="LiveId" clId="{8B7C5281-C583-4B19-9272-2469D3C3B7BF}" dt="2026-09-09T05:25:58.072" v="37"/>
-          <ac:spMkLst>
-            <pc:docMk/>
-            <pc:sldMk cId="2623102820" sldId="261"/>
-            <ac:spMk id="19" creationId="{9EF1397A-DA8B-30EF-626E-58B56055DA6A}"/>
-          </ac:spMkLst>
-        </pc:spChg>
-        <pc:spChg chg="add mod">
-          <ac:chgData name="Aarin Bhatta" userId="b6d9ad1ee625d9c1" providerId="LiveId" clId="{8B7C5281-C583-4B19-9272-2469D3C3B7BF}" dt="2026-09-09T05:25:58.072" v="37"/>
-          <ac:spMkLst>
-            <pc:docMk/>
-            <pc:sldMk cId="2623102820" sldId="261"/>
-            <ac:spMk id="20" creationId="{11F0607F-1C7E-E9D1-5757-986F3CEFFB73}"/>
-          </ac:spMkLst>
-        </pc:spChg>
-      </pc:sldChg>
-      <pc:sldChg chg="modSp mod">
-        <pc:chgData name="Aarin Bhatta" userId="b6d9ad1ee625d9c1" providerId="LiveId" clId="{8B7C5281-C583-4B19-9272-2469D3C3B7BF}" dt="2026-09-09T05:27:09.463" v="60" actId="1076"/>
-        <pc:sldMkLst>
-          <pc:docMk/>
-          <pc:sldMk cId="2335962491" sldId="262"/>
-        </pc:sldMkLst>
-        <pc:spChg chg="mod">
-          <ac:chgData name="Aarin Bhatta" userId="b6d9ad1ee625d9c1" providerId="LiveId" clId="{8B7C5281-C583-4B19-9272-2469D3C3B7BF}" dt="2026-09-09T05:26:41.229" v="53" actId="27636"/>
-          <ac:spMkLst>
-            <pc:docMk/>
-            <pc:sldMk cId="2335962491" sldId="262"/>
-            <ac:spMk id="3" creationId="{6283ADE1-559A-2DC2-A801-6A915E106C60}"/>
-          </ac:spMkLst>
-        </pc:spChg>
-        <pc:spChg chg="mod">
-          <ac:chgData name="Aarin Bhatta" userId="b6d9ad1ee625d9c1" providerId="LiveId" clId="{8B7C5281-C583-4B19-9272-2469D3C3B7BF}" dt="2026-09-09T05:27:06.056" v="58" actId="1076"/>
-          <ac:spMkLst>
-            <pc:docMk/>
-            <pc:sldMk cId="2335962491" sldId="262"/>
-            <ac:spMk id="7" creationId="{82632EBB-2D05-8D00-7F98-43CBAFAF06ED}"/>
-          </ac:spMkLst>
-        </pc:spChg>
-        <pc:spChg chg="mod">
-          <ac:chgData name="Aarin Bhatta" userId="b6d9ad1ee625d9c1" providerId="LiveId" clId="{8B7C5281-C583-4B19-9272-2469D3C3B7BF}" dt="2026-09-09T05:26:49.452" v="54" actId="1076"/>
-          <ac:spMkLst>
-            <pc:docMk/>
-            <pc:sldMk cId="2335962491" sldId="262"/>
-            <ac:spMk id="10" creationId="{00000000-0000-0000-0000-000000000000}"/>
-          </ac:spMkLst>
-        </pc:spChg>
-        <pc:picChg chg="mod">
-          <ac:chgData name="Aarin Bhatta" userId="b6d9ad1ee625d9c1" providerId="LiveId" clId="{8B7C5281-C583-4B19-9272-2469D3C3B7BF}" dt="2026-09-09T05:27:09.463" v="60" actId="1076"/>
-          <ac:picMkLst>
-            <pc:docMk/>
-            <pc:sldMk cId="2335962491" sldId="262"/>
-            <ac:picMk id="9" creationId="{D1491C9C-07B3-89C3-5FA0-72C9F44F30AC}"/>
-          </ac:picMkLst>
-        </pc:picChg>
-      </pc:sldChg>
-      <pc:sldChg chg="modSp mod">
-        <pc:chgData name="Aarin Bhatta" userId="b6d9ad1ee625d9c1" providerId="LiveId" clId="{8B7C5281-C583-4B19-9272-2469D3C3B7BF}" dt="2026-09-09T05:30:58.608" v="93" actId="404"/>
-        <pc:sldMkLst>
-          <pc:docMk/>
-          <pc:sldMk cId="3191299214" sldId="264"/>
-        </pc:sldMkLst>
-        <pc:spChg chg="mod">
-          <ac:chgData name="Aarin Bhatta" userId="b6d9ad1ee625d9c1" providerId="LiveId" clId="{8B7C5281-C583-4B19-9272-2469D3C3B7BF}" dt="2026-09-09T05:30:58.608" v="93" actId="404"/>
-          <ac:spMkLst>
-            <pc:docMk/>
-            <pc:sldMk cId="3191299214" sldId="264"/>
-            <ac:spMk id="3" creationId="{EEF324FF-B70A-2FC0-8FD0-C802E31DDBD0}"/>
-          </ac:spMkLst>
-        </pc:spChg>
-      </pc:sldChg>
-      <pc:sldChg chg="modSp mod">
-        <pc:chgData name="Aarin Bhatta" userId="b6d9ad1ee625d9c1" providerId="LiveId" clId="{8B7C5281-C583-4B19-9272-2469D3C3B7BF}" dt="2026-09-09T05:28:03.048" v="72" actId="5793"/>
-        <pc:sldMkLst>
-          <pc:docMk/>
-          <pc:sldMk cId="3799870327" sldId="265"/>
-        </pc:sldMkLst>
-        <pc:spChg chg="mod">
-          <ac:chgData name="Aarin Bhatta" userId="b6d9ad1ee625d9c1" providerId="LiveId" clId="{8B7C5281-C583-4B19-9272-2469D3C3B7BF}" dt="2026-09-09T05:28:03.048" v="72" actId="5793"/>
-          <ac:spMkLst>
-            <pc:docMk/>
-            <pc:sldMk cId="3799870327" sldId="265"/>
-            <ac:spMk id="3" creationId="{A93F2560-A5FE-A724-8F39-E7E901E8FADC}"/>
-          </ac:spMkLst>
-        </pc:spChg>
-      </pc:sldChg>
-      <pc:sldChg chg="modSp mod">
-        <pc:chgData name="Aarin Bhatta" userId="b6d9ad1ee625d9c1" providerId="LiveId" clId="{8B7C5281-C583-4B19-9272-2469D3C3B7BF}" dt="2026-09-09T05:27:40.248" v="67" actId="5793"/>
-        <pc:sldMkLst>
-          <pc:docMk/>
-          <pc:sldMk cId="1317498737" sldId="267"/>
-        </pc:sldMkLst>
-        <pc:spChg chg="mod">
-          <ac:chgData name="Aarin Bhatta" userId="b6d9ad1ee625d9c1" providerId="LiveId" clId="{8B7C5281-C583-4B19-9272-2469D3C3B7BF}" dt="2026-09-09T05:27:40.248" v="67" actId="5793"/>
-          <ac:spMkLst>
-            <pc:docMk/>
-            <pc:sldMk cId="1317498737" sldId="267"/>
-            <ac:spMk id="3" creationId="{004F33DD-84F0-A7F9-A1DC-A4DEA1A7D846}"/>
-          </ac:spMkLst>
-        </pc:spChg>
-      </pc:sldChg>
-      <pc:sldChg chg="modSp mod">
-        <pc:chgData name="Aarin Bhatta" userId="b6d9ad1ee625d9c1" providerId="LiveId" clId="{8B7C5281-C583-4B19-9272-2469D3C3B7BF}" dt="2026-09-09T05:27:31.669" v="63" actId="1076"/>
-        <pc:sldMkLst>
-          <pc:docMk/>
-          <pc:sldMk cId="3510526248" sldId="268"/>
-        </pc:sldMkLst>
-        <pc:spChg chg="mod">
-          <ac:chgData name="Aarin Bhatta" userId="b6d9ad1ee625d9c1" providerId="LiveId" clId="{8B7C5281-C583-4B19-9272-2469D3C3B7BF}" dt="2026-09-09T05:27:31.669" v="63" actId="1076"/>
-          <ac:spMkLst>
-            <pc:docMk/>
-            <pc:sldMk cId="3510526248" sldId="268"/>
-            <ac:spMk id="2" creationId="{CC4F09CD-956A-B8B3-1183-9C28C80DDB9A}"/>
-          </ac:spMkLst>
-        </pc:spChg>
-      </pc:sldChg>
-      <pc:sldChg chg="addSp delSp modSp new mod">
-        <pc:chgData name="Aarin Bhatta" userId="b6d9ad1ee625d9c1" providerId="LiveId" clId="{8B7C5281-C583-4B19-9272-2469D3C3B7BF}" dt="2026-09-09T05:26:09.912" v="45" actId="20577"/>
-        <pc:sldMkLst>
-          <pc:docMk/>
-          <pc:sldMk cId="394871567" sldId="269"/>
-        </pc:sldMkLst>
-        <pc:spChg chg="del">
-          <ac:chgData name="Aarin Bhatta" userId="b6d9ad1ee625d9c1" providerId="LiveId" clId="{8B7C5281-C583-4B19-9272-2469D3C3B7BF}" dt="2026-09-09T05:25:37.448" v="31" actId="478"/>
-          <ac:spMkLst>
-            <pc:docMk/>
-            <pc:sldMk cId="394871567" sldId="269"/>
-            <ac:spMk id="2" creationId="{7C8B77AD-09AC-5D2B-F8F7-64B74F7A2FE8}"/>
-          </ac:spMkLst>
-        </pc:spChg>
-        <pc:spChg chg="del">
-          <ac:chgData name="Aarin Bhatta" userId="b6d9ad1ee625d9c1" providerId="LiveId" clId="{8B7C5281-C583-4B19-9272-2469D3C3B7BF}" dt="2026-09-09T05:25:37.448" v="31" actId="478"/>
-          <ac:spMkLst>
-            <pc:docMk/>
-            <pc:sldMk cId="394871567" sldId="269"/>
-            <ac:spMk id="3" creationId="{AA83E8AA-08DF-85EF-9BB3-E1701DB0D74C}"/>
-          </ac:spMkLst>
-        </pc:spChg>
-        <pc:spChg chg="del">
-          <ac:chgData name="Aarin Bhatta" userId="b6d9ad1ee625d9c1" providerId="LiveId" clId="{8B7C5281-C583-4B19-9272-2469D3C3B7BF}" dt="2026-09-09T05:25:37.448" v="31" actId="478"/>
-          <ac:spMkLst>
-            <pc:docMk/>
-            <pc:sldMk cId="394871567" sldId="269"/>
-            <ac:spMk id="4" creationId="{7CA64DDF-CA3E-91EF-D0EC-8A4483518174}"/>
-          </ac:spMkLst>
-        </pc:spChg>
-        <pc:spChg chg="del">
-          <ac:chgData name="Aarin Bhatta" userId="b6d9ad1ee625d9c1" providerId="LiveId" clId="{8B7C5281-C583-4B19-9272-2469D3C3B7BF}" dt="2026-09-09T05:25:37.448" v="31" actId="478"/>
-          <ac:spMkLst>
-            <pc:docMk/>
-            <pc:sldMk cId="394871567" sldId="269"/>
-            <ac:spMk id="5" creationId="{93FC68DE-BA73-E026-269D-08ED689FE38E}"/>
-          </ac:spMkLst>
-        </pc:spChg>
-        <pc:spChg chg="del">
-          <ac:chgData name="Aarin Bhatta" userId="b6d9ad1ee625d9c1" providerId="LiveId" clId="{8B7C5281-C583-4B19-9272-2469D3C3B7BF}" dt="2026-09-09T05:25:37.448" v="31" actId="478"/>
-          <ac:spMkLst>
-            <pc:docMk/>
-            <pc:sldMk cId="394871567" sldId="269"/>
-            <ac:spMk id="6" creationId="{9C3C1BDB-3B6C-E7BE-8FEC-A7EE415CA17F}"/>
-          </ac:spMkLst>
-        </pc:spChg>
-        <pc:spChg chg="add mod">
-          <ac:chgData name="Aarin Bhatta" userId="b6d9ad1ee625d9c1" providerId="LiveId" clId="{8B7C5281-C583-4B19-9272-2469D3C3B7BF}" dt="2026-09-09T05:25:36.256" v="30"/>
-          <ac:spMkLst>
-            <pc:docMk/>
-            <pc:sldMk cId="394871567" sldId="269"/>
-            <ac:spMk id="7" creationId="{6FC801E4-38E5-147F-B13B-53A964C1ACDC}"/>
-          </ac:spMkLst>
-        </pc:spChg>
-        <pc:spChg chg="add mod">
-          <ac:chgData name="Aarin Bhatta" userId="b6d9ad1ee625d9c1" providerId="LiveId" clId="{8B7C5281-C583-4B19-9272-2469D3C3B7BF}" dt="2026-09-09T05:25:36.256" v="30"/>
-          <ac:spMkLst>
-            <pc:docMk/>
-            <pc:sldMk cId="394871567" sldId="269"/>
-            <ac:spMk id="8" creationId="{6F002017-7B4C-1BFA-C207-24A5CC9C4975}"/>
-          </ac:spMkLst>
-        </pc:spChg>
-        <pc:spChg chg="add mod">
-          <ac:chgData name="Aarin Bhatta" userId="b6d9ad1ee625d9c1" providerId="LiveId" clId="{8B7C5281-C583-4B19-9272-2469D3C3B7BF}" dt="2026-09-09T05:25:36.256" v="30"/>
-          <ac:spMkLst>
-            <pc:docMk/>
-            <pc:sldMk cId="394871567" sldId="269"/>
-            <ac:spMk id="9" creationId="{92C7FA62-9A61-852D-219E-3376B27E985C}"/>
-          </ac:spMkLst>
-        </pc:spChg>
-        <pc:spChg chg="add mod">
-          <ac:chgData name="Aarin Bhatta" userId="b6d9ad1ee625d9c1" providerId="LiveId" clId="{8B7C5281-C583-4B19-9272-2469D3C3B7BF}" dt="2026-09-09T05:25:36.256" v="30"/>
-          <ac:spMkLst>
-            <pc:docMk/>
-            <pc:sldMk cId="394871567" sldId="269"/>
-            <ac:spMk id="10" creationId="{7058A156-9D7F-78BE-D976-E9C7EE02C78B}"/>
-          </ac:spMkLst>
-        </pc:spChg>
-        <pc:spChg chg="add mod">
-          <ac:chgData name="Aarin Bhatta" userId="b6d9ad1ee625d9c1" providerId="LiveId" clId="{8B7C5281-C583-4B19-9272-2469D3C3B7BF}" dt="2026-09-09T05:25:35.448" v="29"/>
-          <ac:spMkLst>
-            <pc:docMk/>
-            <pc:sldMk cId="394871567" sldId="269"/>
-            <ac:spMk id="11" creationId="{45F10AB8-B70D-C92C-CAE6-13BDD7850BAF}"/>
-          </ac:spMkLst>
-        </pc:spChg>
-        <pc:spChg chg="add mod">
-          <ac:chgData name="Aarin Bhatta" userId="b6d9ad1ee625d9c1" providerId="LiveId" clId="{8B7C5281-C583-4B19-9272-2469D3C3B7BF}" dt="2026-09-09T05:25:37.732" v="32"/>
-          <ac:spMkLst>
-            <pc:docMk/>
-            <pc:sldMk cId="394871567" sldId="269"/>
-            <ac:spMk id="13" creationId="{DE69F95D-A924-1F14-D3AD-09AE2FEF03D8}"/>
-          </ac:spMkLst>
-        </pc:spChg>
-        <pc:spChg chg="add mod">
-          <ac:chgData name="Aarin Bhatta" userId="b6d9ad1ee625d9c1" providerId="LiveId" clId="{8B7C5281-C583-4B19-9272-2469D3C3B7BF}" dt="2026-09-09T05:26:09.912" v="45" actId="20577"/>
-          <ac:spMkLst>
-            <pc:docMk/>
-            <pc:sldMk cId="394871567" sldId="269"/>
-            <ac:spMk id="14" creationId="{8A9E2967-6757-5D0B-5B74-5EB490189621}"/>
-          </ac:spMkLst>
-        </pc:spChg>
-        <pc:spChg chg="add mod">
-          <ac:chgData name="Aarin Bhatta" userId="b6d9ad1ee625d9c1" providerId="LiveId" clId="{8B7C5281-C583-4B19-9272-2469D3C3B7BF}" dt="2026-09-09T05:25:37.732" v="32"/>
-          <ac:spMkLst>
-            <pc:docMk/>
-            <pc:sldMk cId="394871567" sldId="269"/>
-            <ac:spMk id="15" creationId="{FE030478-C46D-2CA0-670C-AE8E7D10E384}"/>
-          </ac:spMkLst>
-        </pc:spChg>
-        <pc:spChg chg="add mod">
-          <ac:chgData name="Aarin Bhatta" userId="b6d9ad1ee625d9c1" providerId="LiveId" clId="{8B7C5281-C583-4B19-9272-2469D3C3B7BF}" dt="2026-09-09T05:25:37.732" v="32"/>
-          <ac:spMkLst>
-            <pc:docMk/>
-            <pc:sldMk cId="394871567" sldId="269"/>
-            <ac:spMk id="16" creationId="{E1A024F9-41E1-D6B0-8D64-9596434D0B9F}"/>
-          </ac:spMkLst>
-        </pc:spChg>
-        <pc:spChg chg="add mod">
-          <ac:chgData name="Aarin Bhatta" userId="b6d9ad1ee625d9c1" providerId="LiveId" clId="{8B7C5281-C583-4B19-9272-2469D3C3B7BF}" dt="2026-09-09T05:25:37.732" v="32"/>
-          <ac:spMkLst>
-            <pc:docMk/>
-            <pc:sldMk cId="394871567" sldId="269"/>
-            <ac:spMk id="17" creationId="{4BDAEEFD-21BC-D442-9824-580B568D6432}"/>
-          </ac:spMkLst>
-        </pc:spChg>
-        <pc:graphicFrameChg chg="add mod">
-          <ac:chgData name="Aarin Bhatta" userId="b6d9ad1ee625d9c1" providerId="LiveId" clId="{8B7C5281-C583-4B19-9272-2469D3C3B7BF}" dt="2026-09-09T05:25:35.448" v="29"/>
-          <ac:graphicFrameMkLst>
-            <pc:docMk/>
-            <pc:sldMk cId="394871567" sldId="269"/>
-            <ac:graphicFrameMk id="12" creationId="{FEA8BC0B-93F8-A519-BEC3-025A67EAA5AD}"/>
-          </ac:graphicFrameMkLst>
-        </pc:graphicFrameChg>
-        <pc:graphicFrameChg chg="add mod">
-          <ac:chgData name="Aarin Bhatta" userId="b6d9ad1ee625d9c1" providerId="LiveId" clId="{8B7C5281-C583-4B19-9272-2469D3C3B7BF}" dt="2026-09-09T05:25:37.732" v="32"/>
-          <ac:graphicFrameMkLst>
-            <pc:docMk/>
-            <pc:sldMk cId="394871567" sldId="269"/>
-            <ac:graphicFrameMk id="18" creationId="{B5D7168E-E4AC-A662-92B8-7FE1525804DE}"/>
-          </ac:graphicFrameMkLst>
-        </pc:graphicFrameChg>
-      </pc:sldChg>
-    </pc:docChg>
-  </pc:docChgLst>
-</pc:chgInfo>
 </file>
 
 <file path=ppt/notesMasters/notesMaster1.xml><?xml version="1.0" encoding="utf-8"?>
@@ -687,7 +209,7 @@
           <a:p>
             <a:fld id="{C058E2E1-8886-43B2-B986-F2B06DAA2FAC}" type="datetimeFigureOut">
               <a:rPr lang="en-IN" smtClean="0"/>
-              <a:t>09-09-2026</a:t>
+              <a:t>22-08-2026</a:t>
             </a:fld>
             <a:endParaRPr lang="en-IN"/>
           </a:p>
@@ -1104,7 +626,7 @@
           <a:p>
             <a:fld id="{8F3E78AE-7F97-4550-9DD8-BF69171FDC30}" type="datetime1">
               <a:rPr lang="en-IN" smtClean="0"/>
-              <a:t>09-09-2026</a:t>
+              <a:t>22-08-2026</a:t>
             </a:fld>
             <a:endParaRPr lang="en-IN"/>
           </a:p>
@@ -1307,7 +829,7 @@
           <a:p>
             <a:fld id="{5576931C-EA1A-43DD-B3B3-66F5BA587712}" type="datetime1">
               <a:rPr lang="en-IN" smtClean="0"/>
-              <a:t>09-09-2026</a:t>
+              <a:t>22-08-2026</a:t>
             </a:fld>
             <a:endParaRPr lang="en-IN"/>
           </a:p>
@@ -1520,7 +1042,7 @@
           <a:p>
             <a:fld id="{82C9B0E1-7C95-4C20-B9C6-BA51F388E878}" type="datetime1">
               <a:rPr lang="en-IN" smtClean="0"/>
-              <a:t>09-09-2026</a:t>
+              <a:t>22-08-2026</a:t>
             </a:fld>
             <a:endParaRPr lang="en-IN"/>
           </a:p>
@@ -1723,7 +1245,7 @@
           <a:p>
             <a:fld id="{FEA886FF-1BA7-4533-94E6-869CE1E2970B}" type="datetime1">
               <a:rPr lang="en-IN" smtClean="0"/>
-              <a:t>09-09-2026</a:t>
+              <a:t>22-08-2026</a:t>
             </a:fld>
             <a:endParaRPr lang="en-IN"/>
           </a:p>
@@ -2002,7 +1524,7 @@
           <a:p>
             <a:fld id="{93E22BD8-A2C4-424B-809A-C64DDCC305D9}" type="datetime1">
               <a:rPr lang="en-IN" smtClean="0"/>
-              <a:t>09-09-2026</a:t>
+              <a:t>22-08-2026</a:t>
             </a:fld>
             <a:endParaRPr lang="en-IN"/>
           </a:p>
@@ -2273,7 +1795,7 @@
           <a:p>
             <a:fld id="{B620F4BC-B3A4-46AF-9AEC-8478EF1369D5}" type="datetime1">
               <a:rPr lang="en-IN" smtClean="0"/>
-              <a:t>09-09-2026</a:t>
+              <a:t>22-08-2026</a:t>
             </a:fld>
             <a:endParaRPr lang="en-IN"/>
           </a:p>
@@ -2691,7 +2213,7 @@
           <a:p>
             <a:fld id="{4C9A2993-B405-4F4D-B968-A01C27211659}" type="datetime1">
               <a:rPr lang="en-IN" smtClean="0"/>
-              <a:t>09-09-2026</a:t>
+              <a:t>22-08-2026</a:t>
             </a:fld>
             <a:endParaRPr lang="en-IN"/>
           </a:p>
@@ -2836,7 +2358,7 @@
           <a:p>
             <a:fld id="{79378C8C-5FBB-4DD7-A06D-BE263480794B}" type="datetime1">
               <a:rPr lang="en-IN" smtClean="0"/>
-              <a:t>09-09-2026</a:t>
+              <a:t>22-08-2026</a:t>
             </a:fld>
             <a:endParaRPr lang="en-IN"/>
           </a:p>
@@ -2952,7 +2474,7 @@
           <a:p>
             <a:fld id="{31FD2985-06EC-459B-80C8-F6F4362A1C03}" type="datetime1">
               <a:rPr lang="en-IN" smtClean="0"/>
-              <a:t>09-09-2026</a:t>
+              <a:t>22-08-2026</a:t>
             </a:fld>
             <a:endParaRPr lang="en-IN"/>
           </a:p>
@@ -3268,7 +2790,7 @@
           <a:p>
             <a:fld id="{71D7E9DA-13C6-48A4-9305-B592482DE8CE}" type="datetime1">
               <a:rPr lang="en-IN" smtClean="0"/>
-              <a:t>09-09-2026</a:t>
+              <a:t>22-08-2026</a:t>
             </a:fld>
             <a:endParaRPr lang="en-IN"/>
           </a:p>
@@ -3560,7 +3082,7 @@
           <a:p>
             <a:fld id="{F45E7C4B-C575-4DCF-9B63-045662930500}" type="datetime1">
               <a:rPr lang="en-IN" smtClean="0"/>
-              <a:t>09-09-2026</a:t>
+              <a:t>22-08-2026</a:t>
             </a:fld>
             <a:endParaRPr lang="en-IN"/>
           </a:p>
@@ -3806,7 +3328,7 @@
           <a:p>
             <a:fld id="{43827C3E-786B-4150-9177-1C28966A2ADC}" type="datetime1">
               <a:rPr lang="en-IN" smtClean="0"/>
-              <a:t>09-09-2026</a:t>
+              <a:t>22-08-2026</a:t>
             </a:fld>
             <a:endParaRPr lang="en-IN"/>
           </a:p>
@@ -4290,31 +3812,34 @@
           <a:lstStyle/>
           <a:p>
             <a:pPr algn="ctr">
-              <a:defRPr sz="1800" b="1">
-                <a:solidFill>
-                  <a:srgbClr val="365F91"/>
-                </a:solidFill>
-                <a:latin typeface="Times New Roman"/>
-              </a:defRPr>
+              <a:spcAft>
+                <a:spcPts val="600"/>
+              </a:spcAft>
             </a:pPr>
             <a:r>
-              <a:t>B.Tech Computer Science and Engineering</a:t>
-            </a:r>
-            <a:br/>
-            <a:r>
-              <a:t>Course Code: BCSE497J – Project-I (Review 2)</a:t>
-            </a:r>
-          </a:p>
-          <a:p>
-            <a:pPr algn="ctr">
-              <a:defRPr sz="2600" b="1">
-                <a:solidFill>
-                  <a:srgbClr val="1E3A6E"/>
-                </a:solidFill>
-                <a:latin typeface="Times New Roman"/>
-              </a:defRPr>
+              <a:rPr sz="1700">
+                <a:solidFill>
+                  <a:srgbClr val="505050"/>
+                </a:solidFill>
+                <a:latin typeface="Times New Roman"/>
+              </a:rPr>
+              <a:t>B.Tech Computer Science and Engineering
+Course Code: BCSE497J – Project-I (Review 2)</a:t>
+            </a:r>
+          </a:p>
+          <a:p>
+            <a:pPr>
+              <a:spcBef>
+                <a:spcPts val="400"/>
+              </a:spcBef>
             </a:pPr>
             <a:r>
+              <a:rPr sz="2100" b="1">
+                <a:solidFill>
+                  <a:srgbClr val="003366"/>
+                </a:solidFill>
+                <a:latin typeface="Times New Roman"/>
+              </a:rPr>
               <a:t>The Self-Auditing Ledger: Fraud Detection in ERP Systems Using Temporal Graph Topology</a:t>
             </a:r>
           </a:p>
@@ -4354,14 +3879,14 @@
               <a:spcBef>
                 <a:spcPts val="200"/>
               </a:spcBef>
-              <a:defRPr sz="1800" b="1">
-                <a:solidFill>
-                  <a:srgbClr val="000000"/>
-                </a:solidFill>
-                <a:latin typeface="Times New Roman"/>
-              </a:defRPr>
             </a:pPr>
             <a:r>
+              <a:rPr sz="1400" b="1">
+                <a:solidFill>
+                  <a:srgbClr val="003366"/>
+                </a:solidFill>
+                <a:latin typeface="Times New Roman"/>
+              </a:rPr>
               <a:t>Team members:</a:t>
             </a:r>
             <a:endParaRPr sz="1800" dirty="0">
@@ -4371,83 +3896,88 @@
           </a:p>
           <a:p>
             <a:pPr>
-              <a:defRPr sz="1600">
-                <a:solidFill>
-                  <a:srgbClr val="323232"/>
-                </a:solidFill>
-                <a:latin typeface="Times New Roman"/>
-              </a:defRPr>
+              <a:spcBef>
+                <a:spcPts val="200"/>
+              </a:spcBef>
+              <a:spcAft>
+                <a:spcPts val="200"/>
+              </a:spcAft>
             </a:pPr>
             <a:r>
+              <a:rPr sz="1300">
+                <a:solidFill>
+                  <a:srgbClr val="1E1E1E"/>
+                </a:solidFill>
+                <a:latin typeface="Times New Roman"/>
+              </a:rPr>
               <a:t>• Aarin Bhatta  (23BCE2329)</a:t>
             </a:r>
           </a:p>
           <a:p>
             <a:pPr>
-              <a:defRPr sz="1600">
-                <a:solidFill>
-                  <a:srgbClr val="323232"/>
-                </a:solidFill>
-                <a:latin typeface="Times New Roman"/>
-              </a:defRPr>
+              <a:spcBef>
+                <a:spcPts val="200"/>
+              </a:spcBef>
+              <a:spcAft>
+                <a:spcPts val="200"/>
+              </a:spcAft>
             </a:pPr>
             <a:r>
+              <a:rPr sz="1300">
+                <a:solidFill>
+                  <a:srgbClr val="1E1E1E"/>
+                </a:solidFill>
+                <a:latin typeface="Times New Roman"/>
+              </a:rPr>
               <a:t>• Himanshu Ray  (23BCE2335)</a:t>
             </a:r>
           </a:p>
           <a:p>
             <a:pPr>
-              <a:defRPr sz="1600">
-                <a:solidFill>
-                  <a:srgbClr val="323232"/>
-                </a:solidFill>
-                <a:latin typeface="Times New Roman"/>
-              </a:defRPr>
+              <a:spcBef>
+                <a:spcPts val="200"/>
+              </a:spcBef>
+              <a:spcAft>
+                <a:spcPts val="200"/>
+              </a:spcAft>
             </a:pPr>
             <a:r>
+              <a:rPr sz="1300">
+                <a:solidFill>
+                  <a:srgbClr val="1E1E1E"/>
+                </a:solidFill>
+                <a:latin typeface="Times New Roman"/>
+              </a:rPr>
               <a:t>• Mohammed Akif  (23BCE2349)</a:t>
             </a:r>
           </a:p>
           <a:p>
-            <a:endParaRPr/>
-          </a:p>
-          <a:p>
             <a:pPr>
-              <a:defRPr sz="1800" b="1">
-                <a:solidFill>
-                  <a:srgbClr val="000000"/>
-                </a:solidFill>
-                <a:latin typeface="Times New Roman"/>
-              </a:defRPr>
+              <a:spcBef>
+                <a:spcPts val="800"/>
+              </a:spcBef>
             </a:pPr>
             <a:r>
+              <a:rPr sz="1400" b="1">
+                <a:solidFill>
+                  <a:srgbClr val="003366"/>
+                </a:solidFill>
+                <a:latin typeface="Times New Roman"/>
+              </a:rPr>
               <a:t>Faculty guide:</a:t>
             </a:r>
           </a:p>
           <a:p>
-            <a:pPr>
-              <a:defRPr sz="1600" b="1">
-                <a:solidFill>
-                  <a:srgbClr val="365F91"/>
-                </a:solidFill>
-                <a:latin typeface="Times New Roman"/>
-              </a:defRPr>
-            </a:pPr>
-            <a:r>
-              <a:t>Prof. Dhivya C.R.</a:t>
-            </a:r>
-          </a:p>
-          <a:p>
-            <a:pPr>
-              <a:defRPr sz="1400">
-                <a:solidFill>
-                  <a:srgbClr val="323232"/>
-                </a:solidFill>
-                <a:latin typeface="Times New Roman"/>
-              </a:defRPr>
-            </a:pPr>
-            <a:r>
-              <a:t>Department of Computational Intelligence, SCOPE</a:t>
+            <a:r>
+              <a:rPr sz="1200">
+                <a:solidFill>
+                  <a:srgbClr val="1E1E1E"/>
+                </a:solidFill>
+                <a:latin typeface="Times New Roman"/>
+              </a:rPr>
+              <a:t>Prof. Dhivya C.R.
+Department of Computational Intelligence, SCOPE
+Vellore Institute of Technology, Vellore</a:t>
             </a:r>
           </a:p>
         </p:txBody>
@@ -4504,215 +4034,183 @@
             <p:ph idx="1"/>
           </p:nvPr>
         </p:nvSpPr>
-        <p:spPr/>
+        <p:spPr>
+          <a:xfrm>
+            <a:off x="0" y="1450000"/>
+            <a:ext cx="0" cy="4750000"/>
+          </a:xfrm>
+        </p:spPr>
         <p:txBody>
           <a:bodyPr>
             <a:normAutofit/>
           </a:bodyPr>
           <a:lstStyle/>
           <a:p>
-            <a:pPr marL="0" indent="0">
+            <a:pPr>
+              <a:spcBef>
+                <a:spcPts val="400"/>
+              </a:spcBef>
               <a:spcAft>
-                <a:spcPts val="1000"/>
+                <a:spcPts val="400"/>
               </a:spcAft>
-              <a:buNone/>
-              <a:defRPr sz="1450">
-                <a:solidFill>
-                  <a:srgbClr val="000000"/>
-                </a:solidFill>
-                <a:latin typeface="Times New Roman"/>
-              </a:defRPr>
             </a:pPr>
             <a:r>
-              <a:rPr dirty="0"/>
-              <a:t>• Module 1: ETL &amp; Graph Representation (</a:t>
-            </a:r>
-            <a:r>
-              <a:rPr dirty="0" err="1"/>
-              <a:t>src</a:t>
-            </a:r>
-            <a:r>
-              <a:rPr dirty="0"/>
-              <a:t>/</a:t>
-            </a:r>
-            <a:r>
-              <a:rPr dirty="0" err="1"/>
-              <a:t>etl</a:t>
-            </a:r>
-            <a:r>
-              <a:rPr dirty="0"/>
-              <a:t>/, </a:t>
-            </a:r>
-            <a:r>
-              <a:rPr dirty="0" err="1"/>
-              <a:t>src</a:t>
-            </a:r>
-            <a:r>
-              <a:rPr dirty="0"/>
-              <a:t>/graph/)</a:t>
-            </a:r>
-            <a:br>
-              <a:rPr dirty="0"/>
-            </a:br>
-            <a:r>
-              <a:rPr dirty="0"/>
-              <a:t>   Ingests multi-source ERP logs, unifies entity namespaces across source/target accounts, builds directed multi-graphs, and synchronizes with Neo4j graph stores.</a:t>
-            </a:r>
-          </a:p>
-          <a:p>
-            <a:pPr marL="0" indent="0">
+              <a:rPr sz="1150" b="1">
+                <a:solidFill>
+                  <a:srgbClr val="003366"/>
+                </a:solidFill>
+                <a:latin typeface="Times New Roman"/>
+              </a:rPr>
+              <a:t>• Module 1: ETL &amp; Graph Representation (src/etl/, src/graph/) — </a:t>
+            </a:r>
+            <a:r>
+              <a:rPr sz="1100">
+                <a:solidFill>
+                  <a:srgbClr val="1E1E1E"/>
+                </a:solidFill>
+                <a:latin typeface="Times New Roman"/>
+              </a:rPr>
+              <a:t>Ingests multi-source ERP logs, unifies entity namespaces across source/target accounts, builds directed multi-graphs, and synchronizes with Neo4j graph stores.</a:t>
+            </a:r>
+          </a:p>
+          <a:p>
+            <a:pPr>
+              <a:spcBef>
+                <a:spcPts val="400"/>
+              </a:spcBef>
               <a:spcAft>
-                <a:spcPts val="1000"/>
+                <a:spcPts val="400"/>
               </a:spcAft>
-              <a:buNone/>
-              <a:defRPr sz="1450">
-                <a:solidFill>
-                  <a:srgbClr val="000000"/>
-                </a:solidFill>
-                <a:latin typeface="Times New Roman"/>
-              </a:defRPr>
             </a:pPr>
             <a:r>
-              <a:rPr dirty="0"/>
-              <a:t>• Module 2: Streaming Zero-Lookahead Topology Engine (</a:t>
-            </a:r>
-            <a:r>
-              <a:rPr dirty="0" err="1"/>
-              <a:t>src</a:t>
-            </a:r>
-            <a:r>
-              <a:rPr dirty="0"/>
-              <a:t>/topology/)</a:t>
-            </a:r>
-            <a:br>
-              <a:rPr dirty="0"/>
-            </a:br>
-            <a:r>
-              <a:rPr dirty="0"/>
-              <a:t>   Sliding-window graph engine maintaining past-only state, computing streaming in/out-degree velocity, fan-in ratios, and memory-based lapping detectors.</a:t>
-            </a:r>
-          </a:p>
-          <a:p>
-            <a:pPr marL="0" indent="0">
+              <a:rPr sz="1150" b="1">
+                <a:solidFill>
+                  <a:srgbClr val="003366"/>
+                </a:solidFill>
+                <a:latin typeface="Times New Roman"/>
+              </a:rPr>
+              <a:t>• Module 2: Streaming Zero-Lookahead Topology Engine (src/topology/) — </a:t>
+            </a:r>
+            <a:r>
+              <a:rPr sz="1100">
+                <a:solidFill>
+                  <a:srgbClr val="1E1E1E"/>
+                </a:solidFill>
+                <a:latin typeface="Times New Roman"/>
+              </a:rPr>
+              <a:t>Sliding-window graph engine maintaining past-only state, computing streaming in/out-degree velocity, fan-in ratios, and memory-based lapping detectors.</a:t>
+            </a:r>
+          </a:p>
+          <a:p>
+            <a:pPr>
+              <a:spcBef>
+                <a:spcPts val="400"/>
+              </a:spcBef>
               <a:spcAft>
-                <a:spcPts val="1000"/>
+                <a:spcPts val="400"/>
               </a:spcAft>
-              <a:buNone/>
-              <a:defRPr sz="1450">
-                <a:solidFill>
-                  <a:srgbClr val="000000"/>
-                </a:solidFill>
-                <a:latin typeface="Times New Roman"/>
-              </a:defRPr>
             </a:pPr>
             <a:r>
-              <a:rPr dirty="0"/>
-              <a:t>• Module 3: Hybrid Classifier &amp; Temporal Representation (</a:t>
-            </a:r>
-            <a:r>
-              <a:rPr dirty="0" err="1"/>
-              <a:t>src</a:t>
-            </a:r>
-            <a:r>
-              <a:rPr dirty="0"/>
-              <a:t>/modeling/)</a:t>
-            </a:r>
-            <a:br>
-              <a:rPr dirty="0"/>
-            </a:br>
-            <a:r>
-              <a:rPr dirty="0"/>
-              <a:t>   Cost-sensitive </a:t>
-            </a:r>
-            <a:r>
-              <a:rPr dirty="0" err="1"/>
-              <a:t>XGBoost</a:t>
-            </a:r>
-            <a:r>
-              <a:rPr dirty="0"/>
-              <a:t> model, </a:t>
-            </a:r>
-            <a:r>
-              <a:rPr dirty="0" err="1"/>
-              <a:t>Optuna</a:t>
-            </a:r>
-            <a:r>
-              <a:rPr dirty="0"/>
-              <a:t> Bayesian HPO, and continuous-time TGN embedding modules for joint tabular-graph learning.</a:t>
-            </a:r>
-          </a:p>
-          <a:p>
-            <a:pPr marL="0" indent="0">
+              <a:rPr sz="1150" b="1">
+                <a:solidFill>
+                  <a:srgbClr val="003366"/>
+                </a:solidFill>
+                <a:latin typeface="Times New Roman"/>
+              </a:rPr>
+              <a:t>• Module 3: Hybrid Classifier &amp; Temporal Representation (src/modeling/, src/modeling/tgn.py) — </a:t>
+            </a:r>
+            <a:r>
+              <a:rPr sz="1100">
+                <a:solidFill>
+                  <a:srgbClr val="1E1E1E"/>
+                </a:solidFill>
+                <a:latin typeface="Times New Roman"/>
+              </a:rPr>
+              <a:t>Cost-sensitive XGBoost with alpha-free focal loss, Optuna Bayesian HPO, and continuous-time TGN embedding modules for joint tabular-graph learning.</a:t>
+            </a:r>
+          </a:p>
+          <a:p>
+            <a:pPr>
+              <a:spcBef>
+                <a:spcPts val="400"/>
+              </a:spcBef>
               <a:spcAft>
-                <a:spcPts val="1000"/>
+                <a:spcPts val="400"/>
               </a:spcAft>
-              <a:buNone/>
-              <a:defRPr sz="1450">
-                <a:solidFill>
-                  <a:srgbClr val="000000"/>
-                </a:solidFill>
-                <a:latin typeface="Times New Roman"/>
-              </a:defRPr>
             </a:pPr>
             <a:r>
-              <a:rPr dirty="0"/>
-              <a:t>• Module 4: Calibrated Synthetic ERP Simulator (</a:t>
-            </a:r>
-            <a:r>
-              <a:rPr dirty="0" err="1"/>
-              <a:t>src</a:t>
-            </a:r>
-            <a:r>
-              <a:rPr dirty="0"/>
-              <a:t>/synth/)</a:t>
-            </a:r>
-            <a:br>
-              <a:rPr dirty="0"/>
-            </a:br>
-            <a:r>
-              <a:rPr dirty="0"/>
-              <a:t>   Agent-based economic engine generating realistic enterprise business cycles and injecting behavior-driven fraud typologies for benchmarking.</a:t>
-            </a:r>
-          </a:p>
-          <a:p>
-            <a:pPr marL="0" indent="0">
+              <a:rPr sz="1150" b="1">
+                <a:solidFill>
+                  <a:srgbClr val="003366"/>
+                </a:solidFill>
+                <a:latin typeface="Times New Roman"/>
+              </a:rPr>
+              <a:t>• Module 4: Calibrated Synthetic ERP Simulator (src/synth/) — </a:t>
+            </a:r>
+            <a:r>
+              <a:rPr sz="1100">
+                <a:solidFill>
+                  <a:srgbClr val="1E1E1E"/>
+                </a:solidFill>
+                <a:latin typeface="Times New Roman"/>
+              </a:rPr>
+              <a:t>Agent-based economic engine generating realistic enterprise business cycles and injecting behavior-driven fraud typologies for benchmarking.</a:t>
+            </a:r>
+          </a:p>
+          <a:p>
+            <a:pPr>
+              <a:spcBef>
+                <a:spcPts val="400"/>
+              </a:spcBef>
               <a:spcAft>
-                <a:spcPts val="1000"/>
+                <a:spcPts val="400"/>
               </a:spcAft>
-              <a:buNone/>
-              <a:defRPr sz="1450">
-                <a:solidFill>
-                  <a:srgbClr val="000000"/>
-                </a:solidFill>
-                <a:latin typeface="Times New Roman"/>
-              </a:defRPr>
             </a:pPr>
             <a:r>
-              <a:rPr dirty="0"/>
-              <a:t>• Module 5: Forensic Explainability &amp; Neo4j Visual Audit Dashboard (</a:t>
-            </a:r>
-            <a:r>
-              <a:rPr dirty="0" err="1"/>
-              <a:t>src</a:t>
-            </a:r>
-            <a:r>
-              <a:rPr dirty="0"/>
-              <a:t>/graph/queries.py, demo/)</a:t>
-            </a:r>
-            <a:br>
-              <a:rPr dirty="0"/>
-            </a:br>
-            <a:r>
-              <a:rPr dirty="0"/>
-              <a:t>   Dual-engine alert dispatcher coupling </a:t>
-            </a:r>
-            <a:r>
-              <a:rPr dirty="0" err="1"/>
-              <a:t>TreeSHAP</a:t>
-            </a:r>
-            <a:r>
-              <a:rPr dirty="0"/>
-              <a:t> attributions with interactive SVG/D3 and Neo4j visual path replay.</a:t>
+              <a:rPr sz="1150" b="1">
+                <a:solidFill>
+                  <a:srgbClr val="003366"/>
+                </a:solidFill>
+                <a:latin typeface="Times New Roman"/>
+              </a:rPr>
+              <a:t>• Module 5: Forensic Explainability &amp; Neo4j Visual Audit Dashboard (src/explainability/, demo/) — </a:t>
+            </a:r>
+            <a:r>
+              <a:rPr sz="1100">
+                <a:solidFill>
+                  <a:srgbClr val="1E1E1E"/>
+                </a:solidFill>
+                <a:latin typeface="Times New Roman"/>
+              </a:rPr>
+              <a:t>Dual-engine alert dispatcher coupling TreeSHAP attributions with interactive SVG/D3 and Neo4j visual path replay.</a:t>
+            </a:r>
+          </a:p>
+          <a:p>
+            <a:pPr>
+              <a:spcBef>
+                <a:spcPts val="400"/>
+              </a:spcBef>
+              <a:spcAft>
+                <a:spcPts val="400"/>
+              </a:spcAft>
+            </a:pPr>
+            <a:r>
+              <a:rPr sz="1150" b="1">
+                <a:solidFill>
+                  <a:srgbClr val="003366"/>
+                </a:solidFill>
+                <a:latin typeface="Times New Roman"/>
+              </a:rPr>
+              <a:t>• Module 6: Federated Consortium Engine (src/federated/) — </a:t>
+            </a:r>
+            <a:r>
+              <a:rPr sz="1100">
+                <a:solidFill>
+                  <a:srgbClr val="1E1E1E"/>
+                </a:solidFill>
+                <a:latin typeface="Times New Roman"/>
+              </a:rPr>
+              <a:t>Multi-client simulation under non-IID Dirichlet distribution with FedProx reliability-weighted score-level consensus.</a:t>
             </a:r>
           </a:p>
         </p:txBody>
@@ -4791,17 +4289,19 @@
           <a:bodyPr/>
           <a:lstStyle/>
           <a:p>
-            <a:pPr>
-              <a:defRPr sz="1200">
-                <a:solidFill>
-                  <a:srgbClr val="323232"/>
-                </a:solidFill>
-                <a:latin typeface="Times New Roman"/>
-              </a:defRPr>
-            </a:pPr>
-            <a:r>
+            <a:r>
+              <a:rPr sz="1000">
+                <a:solidFill>
+                  <a:srgbClr val="505050"/>
+                </a:solidFill>
+                <a:latin typeface="Times New Roman"/>
+              </a:rPr>
               <a:t>09-09-2026</a:t>
             </a:r>
+            <a:endParaRPr lang="en-IN">
+              <a:latin typeface="Times New Roman" panose="02020603050405020304" pitchFamily="18" charset="0"/>
+              <a:cs typeface="Times New Roman" panose="02020603050405020304" pitchFamily="18" charset="0"/>
+            </a:endParaRPr>
           </a:p>
         </p:txBody>
       </p:sp>
@@ -4826,15 +4326,11 @@
           <a:bodyPr/>
           <a:lstStyle/>
           <a:p>
-            <a:pPr>
-              <a:defRPr sz="1200">
-                <a:solidFill>
-                  <a:srgbClr val="323232"/>
-                </a:solidFill>
-                <a:latin typeface="Times New Roman"/>
-              </a:defRPr>
-            </a:pPr>
-            <a:r>
+            <a:r>
+              <a:rPr lang="en-IN" dirty="0">
+                <a:latin typeface="Times New Roman" panose="02020603050405020304" pitchFamily="18" charset="0"/>
+                <a:cs typeface="Times New Roman" panose="02020603050405020304" pitchFamily="18" charset="0"/>
+              </a:rPr>
               <a:t>SCOPE</a:t>
             </a:r>
           </a:p>
@@ -4861,17 +4357,17 @@
           <a:bodyPr/>
           <a:lstStyle/>
           <a:p>
-            <a:pPr>
-              <a:defRPr sz="1200">
-                <a:solidFill>
-                  <a:srgbClr val="323232"/>
-                </a:solidFill>
-                <a:latin typeface="Times New Roman"/>
-              </a:defRPr>
-            </a:pPr>
-            <a:r>
+            <a:fld id="{65201FD4-9D8D-4491-815B-63C7BF4F0034}" type="slidenum">
+              <a:rPr lang="en-IN" smtClean="0">
+                <a:latin typeface="Times New Roman" panose="02020603050405020304" pitchFamily="18" charset="0"/>
+                <a:cs typeface="Times New Roman" panose="02020603050405020304" pitchFamily="18" charset="0"/>
+              </a:rPr>
               <a:t>10</a:t>
-            </a:r>
+            </a:fld>
+            <a:endParaRPr lang="en-IN" dirty="0">
+              <a:latin typeface="Times New Roman" panose="02020603050405020304" pitchFamily="18" charset="0"/>
+              <a:cs typeface="Times New Roman" panose="02020603050405020304" pitchFamily="18" charset="0"/>
+            </a:endParaRPr>
           </a:p>
         </p:txBody>
       </p:sp>
@@ -4985,17 +4481,19 @@
           <a:bodyPr/>
           <a:lstStyle/>
           <a:p>
-            <a:pPr>
-              <a:defRPr sz="1200">
-                <a:solidFill>
-                  <a:srgbClr val="323232"/>
-                </a:solidFill>
-                <a:latin typeface="Times New Roman"/>
-              </a:defRPr>
-            </a:pPr>
-            <a:r>
+            <a:r>
+              <a:rPr sz="1000">
+                <a:solidFill>
+                  <a:srgbClr val="505050"/>
+                </a:solidFill>
+                <a:latin typeface="Times New Roman"/>
+              </a:rPr>
               <a:t>09-09-2026</a:t>
             </a:r>
+            <a:endParaRPr lang="en-IN">
+              <a:latin typeface="Times New Roman" panose="02020603050405020304" pitchFamily="18" charset="0"/>
+              <a:cs typeface="Times New Roman" panose="02020603050405020304" pitchFamily="18" charset="0"/>
+            </a:endParaRPr>
           </a:p>
         </p:txBody>
       </p:sp>
@@ -5020,15 +4518,11 @@
           <a:bodyPr/>
           <a:lstStyle/>
           <a:p>
-            <a:pPr>
-              <a:defRPr sz="1200">
-                <a:solidFill>
-                  <a:srgbClr val="323232"/>
-                </a:solidFill>
-                <a:latin typeface="Times New Roman"/>
-              </a:defRPr>
-            </a:pPr>
-            <a:r>
+            <a:r>
+              <a:rPr lang="en-IN" dirty="0">
+                <a:latin typeface="Times New Roman" panose="02020603050405020304" pitchFamily="18" charset="0"/>
+                <a:cs typeface="Times New Roman" panose="02020603050405020304" pitchFamily="18" charset="0"/>
+              </a:rPr>
               <a:t>SCOPE</a:t>
             </a:r>
           </a:p>
@@ -5055,17 +4549,17 @@
           <a:bodyPr/>
           <a:lstStyle/>
           <a:p>
-            <a:pPr>
-              <a:defRPr sz="1200">
-                <a:solidFill>
-                  <a:srgbClr val="323232"/>
-                </a:solidFill>
-                <a:latin typeface="Times New Roman"/>
-              </a:defRPr>
-            </a:pPr>
-            <a:r>
+            <a:fld id="{65201FD4-9D8D-4491-815B-63C7BF4F0034}" type="slidenum">
+              <a:rPr lang="en-IN" smtClean="0">
+                <a:latin typeface="Times New Roman" panose="02020603050405020304" pitchFamily="18" charset="0"/>
+                <a:cs typeface="Times New Roman" panose="02020603050405020304" pitchFamily="18" charset="0"/>
+              </a:rPr>
               <a:t>11</a:t>
-            </a:r>
+            </a:fld>
+            <a:endParaRPr lang="en-IN" dirty="0">
+              <a:latin typeface="Times New Roman" panose="02020603050405020304" pitchFamily="18" charset="0"/>
+              <a:cs typeface="Times New Roman" panose="02020603050405020304" pitchFamily="18" charset="0"/>
+            </a:endParaRPr>
           </a:p>
         </p:txBody>
       </p:sp>
@@ -5079,7 +4573,7 @@
         </p:nvGraphicFramePr>
         <p:xfrm>
           <a:off x="548640" y="1371600"/>
-          <a:ext cx="11064240" cy="2011680"/>
+          <a:ext cx="11064240" cy="2350000"/>
         </p:xfrm>
         <a:graphic>
           <a:graphicData uri="http://schemas.openxmlformats.org/drawingml/2006/table">
@@ -5088,64 +4582,33 @@
                 <a:tableStyleId>{5C22544A-7EE6-4342-B048-85BDC9FD1C3A}</a:tableStyleId>
               </a:tblPr>
               <a:tblGrid>
-                <a:gridCol w="1645920">
-                  <a:extLst>
-                    <a:ext uri="{9D8B030D-6E8A-4147-A177-3AD203B41FA5}">
-                      <a16:colId xmlns:a16="http://schemas.microsoft.com/office/drawing/2014/main" val="20000"/>
-                    </a:ext>
-                  </a:extLst>
-                </a:gridCol>
-                <a:gridCol w="1828800">
-                  <a:extLst>
-                    <a:ext uri="{9D8B030D-6E8A-4147-A177-3AD203B41FA5}">
-                      <a16:colId xmlns:a16="http://schemas.microsoft.com/office/drawing/2014/main" val="20001"/>
-                    </a:ext>
-                  </a:extLst>
-                </a:gridCol>
-                <a:gridCol w="2011680">
-                  <a:extLst>
-                    <a:ext uri="{9D8B030D-6E8A-4147-A177-3AD203B41FA5}">
-                      <a16:colId xmlns:a16="http://schemas.microsoft.com/office/drawing/2014/main" val="20002"/>
-                    </a:ext>
-                  </a:extLst>
-                </a:gridCol>
-                <a:gridCol w="1645920">
-                  <a:extLst>
-                    <a:ext uri="{9D8B030D-6E8A-4147-A177-3AD203B41FA5}">
-                      <a16:colId xmlns:a16="http://schemas.microsoft.com/office/drawing/2014/main" val="20003"/>
-                    </a:ext>
-                  </a:extLst>
-                </a:gridCol>
-                <a:gridCol w="3931920">
-                  <a:extLst>
-                    <a:ext uri="{9D8B030D-6E8A-4147-A177-3AD203B41FA5}">
-                      <a16:colId xmlns:a16="http://schemas.microsoft.com/office/drawing/2014/main" val="20004"/>
-                    </a:ext>
-                  </a:extLst>
-                </a:gridCol>
+                <a:gridCol w="2700000"/>
+                <a:gridCol w="1700000"/>
+                <a:gridCol w="1900000"/>
+                <a:gridCol w="1300000"/>
+                <a:gridCol w="3464240"/>
               </a:tblGrid>
-              <a:tr h="502920">
+              <a:tr h="391666">
                 <a:tc>
                   <a:txBody>
                     <a:bodyPr/>
                     <a:lstStyle/>
                     <a:p>
-                      <a:pPr algn="ctr">
-                        <a:defRPr sz="1200" b="1">
+                      <a:pPr algn="l"/>
+                      <a:r>
+                        <a:rPr sz="1050" b="1">
                           <a:solidFill>
                             <a:srgbClr val="FFFFFF"/>
                           </a:solidFill>
                           <a:latin typeface="Times New Roman"/>
-                        </a:defRPr>
-                      </a:pPr>
-                      <a:r>
+                        </a:rPr>
                         <a:t>Benchmark Dataset</a:t>
                       </a:r>
                     </a:p>
                   </a:txBody>
-                  <a:tcPr marL="73152" marR="73152" marT="54864" marB="54864">
+                  <a:tcPr anchor="ctr">
                     <a:solidFill>
-                      <a:srgbClr val="365F91"/>
+                      <a:srgbClr val="003366"/>
                     </a:solidFill>
                   </a:tcPr>
                 </a:tc>
@@ -5154,22 +4617,21 @@
                     <a:bodyPr/>
                     <a:lstStyle/>
                     <a:p>
-                      <a:pPr algn="ctr">
-                        <a:defRPr sz="1200" b="1">
+                      <a:pPr algn="ctr"/>
+                      <a:r>
+                        <a:rPr sz="1050" b="1">
                           <a:solidFill>
                             <a:srgbClr val="FFFFFF"/>
                           </a:solidFill>
                           <a:latin typeface="Times New Roman"/>
-                        </a:defRPr>
-                      </a:pPr>
-                      <a:r>
+                        </a:rPr>
                         <a:t>Tabular Baseline</a:t>
                       </a:r>
                     </a:p>
                   </a:txBody>
-                  <a:tcPr marL="73152" marR="73152" marT="54864" marB="54864">
+                  <a:tcPr anchor="ctr">
                     <a:solidFill>
-                      <a:srgbClr val="365F91"/>
+                      <a:srgbClr val="003366"/>
                     </a:solidFill>
                   </a:tcPr>
                 </a:tc>
@@ -5178,22 +4640,21 @@
                     <a:bodyPr/>
                     <a:lstStyle/>
                     <a:p>
-                      <a:pPr algn="ctr">
-                        <a:defRPr sz="1200" b="1">
+                      <a:pPr algn="ctr"/>
+                      <a:r>
+                        <a:rPr sz="1050" b="1">
                           <a:solidFill>
                             <a:srgbClr val="FFFFFF"/>
                           </a:solidFill>
                           <a:latin typeface="Times New Roman"/>
-                        </a:defRPr>
-                      </a:pPr>
-                      <a:r>
+                        </a:rPr>
                         <a:t>Baseline + Topology</a:t>
                       </a:r>
                     </a:p>
                   </a:txBody>
-                  <a:tcPr marL="73152" marR="73152" marT="54864" marB="54864">
+                  <a:tcPr anchor="ctr">
                     <a:solidFill>
-                      <a:srgbClr val="365F91"/>
+                      <a:srgbClr val="003366"/>
                     </a:solidFill>
                   </a:tcPr>
                 </a:tc>
@@ -5202,22 +4663,21 @@
                     <a:bodyPr/>
                     <a:lstStyle/>
                     <a:p>
-                      <a:pPr algn="ctr">
-                        <a:defRPr sz="1200" b="1">
+                      <a:pPr algn="ctr"/>
+                      <a:r>
+                        <a:rPr sz="1050" b="1">
                           <a:solidFill>
                             <a:srgbClr val="FFFFFF"/>
                           </a:solidFill>
                           <a:latin typeface="Times New Roman"/>
-                        </a:defRPr>
-                      </a:pPr>
-                      <a:r>
+                        </a:rPr>
                         <a:t>PR-AUC Lift</a:t>
                       </a:r>
                     </a:p>
                   </a:txBody>
-                  <a:tcPr marL="73152" marR="73152" marT="54864" marB="54864">
+                  <a:tcPr anchor="ctr">
                     <a:solidFill>
-                      <a:srgbClr val="365F91"/>
+                      <a:srgbClr val="003366"/>
                     </a:solidFill>
                   </a:tcPr>
                 </a:tc>
@@ -5226,53 +4686,46 @@
                     <a:bodyPr/>
                     <a:lstStyle/>
                     <a:p>
-                      <a:pPr algn="ctr">
-                        <a:defRPr sz="1200" b="1">
+                      <a:pPr algn="l"/>
+                      <a:r>
+                        <a:rPr sz="1050" b="1">
                           <a:solidFill>
                             <a:srgbClr val="FFFFFF"/>
                           </a:solidFill>
                           <a:latin typeface="Times New Roman"/>
-                        </a:defRPr>
-                      </a:pPr>
-                      <a:r>
+                        </a:rPr>
                         <a:t>Primary Scientific Signal</a:t>
                       </a:r>
                     </a:p>
                   </a:txBody>
-                  <a:tcPr marL="73152" marR="73152" marT="54864" marB="54864">
+                  <a:tcPr anchor="ctr">
                     <a:solidFill>
-                      <a:srgbClr val="365F91"/>
+                      <a:srgbClr val="003366"/>
                     </a:solidFill>
                   </a:tcPr>
                 </a:tc>
-                <a:extLst>
-                  <a:ext uri="{0D108BD9-81ED-4DB2-BD59-A6C34878D82A}">
-                    <a16:rowId xmlns:a16="http://schemas.microsoft.com/office/drawing/2014/main" val="10000"/>
-                  </a:ext>
-                </a:extLst>
               </a:tr>
-              <a:tr h="502920">
+              <a:tr h="391666">
                 <a:tc>
                   <a:txBody>
                     <a:bodyPr/>
                     <a:lstStyle/>
                     <a:p>
-                      <a:pPr>
-                        <a:defRPr sz="1100">
+                      <a:pPr algn="l"/>
+                      <a:r>
+                        <a:rPr sz="950" b="1">
                           <a:solidFill>
-                            <a:srgbClr val="000000"/>
+                            <a:srgbClr val="1E1E1E"/>
                           </a:solidFill>
                           <a:latin typeface="Times New Roman"/>
-                        </a:defRPr>
-                      </a:pPr>
-                      <a:r>
-                        <a:t>BankSim</a:t>
+                        </a:rPr>
+                        <a:t>BankSim (Relational Graph)</a:t>
                       </a:r>
                     </a:p>
                   </a:txBody>
-                  <a:tcPr marL="73152" marR="73152" marT="54864" marB="54864">
+                  <a:tcPr anchor="ctr">
                     <a:solidFill>
-                      <a:srgbClr val="F0F4FA"/>
+                      <a:srgbClr val="F5F8FC"/>
                     </a:solidFill>
                   </a:tcPr>
                 </a:tc>
@@ -5281,22 +4734,21 @@
                     <a:bodyPr/>
                     <a:lstStyle/>
                     <a:p>
-                      <a:pPr>
-                        <a:defRPr sz="1100">
+                      <a:pPr algn="ctr"/>
+                      <a:r>
+                        <a:rPr sz="950">
                           <a:solidFill>
-                            <a:srgbClr val="000000"/>
+                            <a:srgbClr val="1E1E1E"/>
                           </a:solidFill>
                           <a:latin typeface="Times New Roman"/>
-                        </a:defRPr>
-                      </a:pPr>
-                      <a:r>
+                        </a:rPr>
                         <a:t>0.824 ± 0.003</a:t>
                       </a:r>
                     </a:p>
                   </a:txBody>
-                  <a:tcPr marL="73152" marR="73152" marT="54864" marB="54864">
+                  <a:tcPr anchor="ctr">
                     <a:solidFill>
-                      <a:srgbClr val="F0F4FA"/>
+                      <a:srgbClr val="F5F8FC"/>
                     </a:solidFill>
                   </a:tcPr>
                 </a:tc>
@@ -5305,22 +4757,21 @@
                     <a:bodyPr/>
                     <a:lstStyle/>
                     <a:p>
-                      <a:pPr>
-                        <a:defRPr sz="1100">
+                      <a:pPr algn="ctr"/>
+                      <a:r>
+                        <a:rPr sz="950">
                           <a:solidFill>
-                            <a:srgbClr val="000000"/>
+                            <a:srgbClr val="1E1E1E"/>
                           </a:solidFill>
                           <a:latin typeface="Times New Roman"/>
-                        </a:defRPr>
-                      </a:pPr>
-                      <a:r>
+                        </a:rPr>
                         <a:t>0.921 ± 0.002</a:t>
                       </a:r>
                     </a:p>
                   </a:txBody>
-                  <a:tcPr marL="73152" marR="73152" marT="54864" marB="54864">
+                  <a:tcPr anchor="ctr">
                     <a:solidFill>
-                      <a:srgbClr val="F0F4FA"/>
+                      <a:srgbClr val="F5F8FC"/>
                     </a:solidFill>
                   </a:tcPr>
                 </a:tc>
@@ -5329,22 +4780,21 @@
                     <a:bodyPr/>
                     <a:lstStyle/>
                     <a:p>
-                      <a:pPr>
-                        <a:defRPr sz="1100">
+                      <a:pPr algn="ctr"/>
+                      <a:r>
+                        <a:rPr sz="950" b="1">
                           <a:solidFill>
-                            <a:srgbClr val="000000"/>
+                            <a:srgbClr val="1E1E1E"/>
                           </a:solidFill>
                           <a:latin typeface="Times New Roman"/>
-                        </a:defRPr>
-                      </a:pPr>
-                      <a:r>
+                        </a:rPr>
                         <a:t>+11.7%</a:t>
                       </a:r>
                     </a:p>
                   </a:txBody>
-                  <a:tcPr marL="73152" marR="73152" marT="54864" marB="54864">
+                  <a:tcPr anchor="ctr">
                     <a:solidFill>
-                      <a:srgbClr val="F0F4FA"/>
+                      <a:srgbClr val="F5F8FC"/>
                     </a:solidFill>
                   </a:tcPr>
                 </a:tc>
@@ -5353,51 +4803,44 @@
                     <a:bodyPr/>
                     <a:lstStyle/>
                     <a:p>
-                      <a:pPr>
-                        <a:defRPr sz="1100">
+                      <a:pPr algn="l"/>
+                      <a:r>
+                        <a:rPr sz="950">
                           <a:solidFill>
-                            <a:srgbClr val="000000"/>
+                            <a:srgbClr val="1E1E1E"/>
                           </a:solidFill>
                           <a:latin typeface="Times New Roman"/>
-                        </a:defRPr>
-                      </a:pPr>
-                      <a:r>
+                        </a:rPr>
                         <a:t>Strong structural signal; fan-in and degree velocity dominate</a:t>
                       </a:r>
                     </a:p>
                   </a:txBody>
-                  <a:tcPr marL="73152" marR="73152" marT="54864" marB="54864">
+                  <a:tcPr anchor="ctr">
                     <a:solidFill>
-                      <a:srgbClr val="F0F4FA"/>
+                      <a:srgbClr val="F5F8FC"/>
                     </a:solidFill>
                   </a:tcPr>
                 </a:tc>
-                <a:extLst>
-                  <a:ext uri="{0D108BD9-81ED-4DB2-BD59-A6C34878D82A}">
-                    <a16:rowId xmlns:a16="http://schemas.microsoft.com/office/drawing/2014/main" val="10001"/>
-                  </a:ext>
-                </a:extLst>
               </a:tr>
-              <a:tr h="502920">
+              <a:tr h="391666">
                 <a:tc>
                   <a:txBody>
                     <a:bodyPr/>
                     <a:lstStyle/>
                     <a:p>
-                      <a:pPr>
-                        <a:defRPr sz="1100">
+                      <a:pPr algn="l"/>
+                      <a:r>
+                        <a:rPr sz="950" b="1">
                           <a:solidFill>
-                            <a:srgbClr val="000000"/>
+                            <a:srgbClr val="1E1E1E"/>
                           </a:solidFill>
                           <a:latin typeface="Times New Roman"/>
-                        </a:defRPr>
-                      </a:pPr>
-                      <a:r>
-                        <a:t>IBM AML</a:t>
+                        </a:rPr>
+                        <a:t>BankSim Final Champion (TGN)</a:t>
                       </a:r>
                     </a:p>
                   </a:txBody>
-                  <a:tcPr marL="73152" marR="73152" marT="54864" marB="54864">
+                  <a:tcPr anchor="ctr">
                     <a:solidFill>
                       <a:srgbClr val="FFFFFF"/>
                     </a:solidFill>
@@ -5408,20 +4851,19 @@
                     <a:bodyPr/>
                     <a:lstStyle/>
                     <a:p>
-                      <a:pPr>
-                        <a:defRPr sz="1100">
+                      <a:pPr algn="ctr"/>
+                      <a:r>
+                        <a:rPr sz="950">
                           <a:solidFill>
-                            <a:srgbClr val="000000"/>
+                            <a:srgbClr val="1E1E1E"/>
                           </a:solidFill>
                           <a:latin typeface="Times New Roman"/>
-                        </a:defRPr>
-                      </a:pPr>
-                      <a:r>
-                        <a:t>0.991 ± 0.001</a:t>
+                        </a:rPr>
+                        <a:t>0.787 ± 0.070</a:t>
                       </a:r>
                     </a:p>
                   </a:txBody>
-                  <a:tcPr marL="73152" marR="73152" marT="54864" marB="54864">
+                  <a:tcPr anchor="ctr">
                     <a:solidFill>
                       <a:srgbClr val="FFFFFF"/>
                     </a:solidFill>
@@ -5432,20 +4874,19 @@
                     <a:bodyPr/>
                     <a:lstStyle/>
                     <a:p>
-                      <a:pPr>
-                        <a:defRPr sz="1100">
+                      <a:pPr algn="ctr"/>
+                      <a:r>
+                        <a:rPr sz="950">
                           <a:solidFill>
-                            <a:srgbClr val="000000"/>
+                            <a:srgbClr val="1E1E1E"/>
                           </a:solidFill>
                           <a:latin typeface="Times New Roman"/>
-                        </a:defRPr>
-                      </a:pPr>
-                      <a:r>
-                        <a:t>0.993 ± 0.001</a:t>
+                        </a:rPr>
+                        <a:t>0.936 ± 0.002</a:t>
                       </a:r>
                     </a:p>
                   </a:txBody>
-                  <a:tcPr marL="73152" marR="73152" marT="54864" marB="54864">
+                  <a:tcPr anchor="ctr">
                     <a:solidFill>
                       <a:srgbClr val="FFFFFF"/>
                     </a:solidFill>
@@ -5456,20 +4897,19 @@
                     <a:bodyPr/>
                     <a:lstStyle/>
                     <a:p>
-                      <a:pPr>
-                        <a:defRPr sz="1100">
+                      <a:pPr algn="ctr"/>
+                      <a:r>
+                        <a:rPr sz="950">
                           <a:solidFill>
-                            <a:srgbClr val="000000"/>
+                            <a:srgbClr val="1E1E1E"/>
                           </a:solidFill>
                           <a:latin typeface="Times New Roman"/>
-                        </a:defRPr>
-                      </a:pPr>
-                      <a:r>
-                        <a:t>+0.2%</a:t>
+                        </a:rPr>
+                        <a:t>+18.9%</a:t>
                       </a:r>
                     </a:p>
                   </a:txBody>
-                  <a:tcPr marL="73152" marR="73152" marT="54864" marB="54864">
+                  <a:tcPr anchor="ctr">
                     <a:solidFill>
                       <a:srgbClr val="FFFFFF"/>
                     </a:solidFill>
@@ -5480,53 +4920,46 @@
                     <a:bodyPr/>
                     <a:lstStyle/>
                     <a:p>
-                      <a:pPr>
-                        <a:defRPr sz="1100">
+                      <a:pPr algn="l"/>
+                      <a:r>
+                        <a:rPr sz="950">
                           <a:solidFill>
-                            <a:srgbClr val="000000"/>
+                            <a:srgbClr val="1E1E1E"/>
                           </a:solidFill>
                           <a:latin typeface="Times New Roman"/>
-                        </a:defRPr>
-                      </a:pPr>
-                      <a:r>
-                        <a:t>Baseline saturated by amount; +0.09 lift in amount-blind probe</a:t>
+                        </a:rPr>
+                        <a:t>Precision@100 = 1.00; collapses seed variance via focal loss</a:t>
                       </a:r>
                     </a:p>
                   </a:txBody>
-                  <a:tcPr marL="73152" marR="73152" marT="54864" marB="54864">
+                  <a:tcPr anchor="ctr">
                     <a:solidFill>
                       <a:srgbClr val="FFFFFF"/>
                     </a:solidFill>
                   </a:tcPr>
                 </a:tc>
-                <a:extLst>
-                  <a:ext uri="{0D108BD9-81ED-4DB2-BD59-A6C34878D82A}">
-                    <a16:rowId xmlns:a16="http://schemas.microsoft.com/office/drawing/2014/main" val="10002"/>
-                  </a:ext>
-                </a:extLst>
               </a:tr>
-              <a:tr h="502920">
+              <a:tr h="391666">
                 <a:tc>
                   <a:txBody>
                     <a:bodyPr/>
                     <a:lstStyle/>
                     <a:p>
-                      <a:pPr>
-                        <a:defRPr sz="1100">
+                      <a:pPr algn="l"/>
+                      <a:r>
+                        <a:rPr sz="950" b="1">
                           <a:solidFill>
-                            <a:srgbClr val="000000"/>
+                            <a:srgbClr val="1E1E1E"/>
                           </a:solidFill>
                           <a:latin typeface="Times New Roman"/>
-                        </a:defRPr>
-                      </a:pPr>
-                      <a:r>
-                        <a:t>Synthetic ERP</a:t>
+                        </a:rPr>
+                        <a:t>IBM AML (Amount-Saturated)</a:t>
                       </a:r>
                     </a:p>
                   </a:txBody>
-                  <a:tcPr marL="73152" marR="73152" marT="54864" marB="54864">
+                  <a:tcPr anchor="ctr">
                     <a:solidFill>
-                      <a:srgbClr val="F0F4FA"/>
+                      <a:srgbClr val="F5F8FC"/>
                     </a:solidFill>
                   </a:tcPr>
                 </a:tc>
@@ -5535,22 +4968,21 @@
                     <a:bodyPr/>
                     <a:lstStyle/>
                     <a:p>
-                      <a:pPr>
-                        <a:defRPr sz="1100">
+                      <a:pPr algn="ctr"/>
+                      <a:r>
+                        <a:rPr sz="950">
                           <a:solidFill>
-                            <a:srgbClr val="000000"/>
+                            <a:srgbClr val="1E1E1E"/>
                           </a:solidFill>
                           <a:latin typeface="Times New Roman"/>
-                        </a:defRPr>
-                      </a:pPr>
-                      <a:r>
-                        <a:t>0.876 ± 0.004</a:t>
+                        </a:rPr>
+                        <a:t>0.991 ± 0.001</a:t>
                       </a:r>
                     </a:p>
                   </a:txBody>
-                  <a:tcPr marL="73152" marR="73152" marT="54864" marB="54864">
+                  <a:tcPr anchor="ctr">
                     <a:solidFill>
-                      <a:srgbClr val="F0F4FA"/>
+                      <a:srgbClr val="F5F8FC"/>
                     </a:solidFill>
                   </a:tcPr>
                 </a:tc>
@@ -5559,22 +4991,21 @@
                     <a:bodyPr/>
                     <a:lstStyle/>
                     <a:p>
-                      <a:pPr>
-                        <a:defRPr sz="1100">
+                      <a:pPr algn="ctr"/>
+                      <a:r>
+                        <a:rPr sz="950">
                           <a:solidFill>
-                            <a:srgbClr val="000000"/>
+                            <a:srgbClr val="1E1E1E"/>
                           </a:solidFill>
                           <a:latin typeface="Times New Roman"/>
-                        </a:defRPr>
-                      </a:pPr>
-                      <a:r>
-                        <a:t>0.942 ± 0.003</a:t>
+                        </a:rPr>
+                        <a:t>0.993 ± 0.001</a:t>
                       </a:r>
                     </a:p>
                   </a:txBody>
-                  <a:tcPr marL="73152" marR="73152" marT="54864" marB="54864">
+                  <a:tcPr anchor="ctr">
                     <a:solidFill>
-                      <a:srgbClr val="F0F4FA"/>
+                      <a:srgbClr val="F5F8FC"/>
                     </a:solidFill>
                   </a:tcPr>
                 </a:tc>
@@ -5583,22 +5014,21 @@
                     <a:bodyPr/>
                     <a:lstStyle/>
                     <a:p>
-                      <a:pPr>
-                        <a:defRPr sz="1100">
+                      <a:pPr algn="ctr"/>
+                      <a:r>
+                        <a:rPr sz="950">
                           <a:solidFill>
-                            <a:srgbClr val="000000"/>
+                            <a:srgbClr val="1E1E1E"/>
                           </a:solidFill>
                           <a:latin typeface="Times New Roman"/>
-                        </a:defRPr>
-                      </a:pPr>
-                      <a:r>
-                        <a:t>+7.5%</a:t>
+                        </a:rPr>
+                        <a:t>+0.2%</a:t>
                       </a:r>
                     </a:p>
                   </a:txBody>
-                  <a:tcPr marL="73152" marR="73152" marT="54864" marB="54864">
+                  <a:tcPr anchor="ctr">
                     <a:solidFill>
-                      <a:srgbClr val="F0F4FA"/>
+                      <a:srgbClr val="F5F8FC"/>
                     </a:solidFill>
                   </a:tcPr>
                 </a:tc>
@@ -5607,30 +5037,258 @@
                     <a:bodyPr/>
                     <a:lstStyle/>
                     <a:p>
-                      <a:pPr>
-                        <a:defRPr sz="1100">
+                      <a:pPr algn="l"/>
+                      <a:r>
+                        <a:rPr sz="950">
                           <a:solidFill>
-                            <a:srgbClr val="000000"/>
+                            <a:srgbClr val="1E1E1E"/>
                           </a:solidFill>
                           <a:latin typeface="Times New Roman"/>
-                        </a:defRPr>
-                      </a:pPr>
+                        </a:rPr>
+                        <a:t>Baseline saturated by amount; +0.09 lift in amount-blind probe</a:t>
+                      </a:r>
+                    </a:p>
+                  </a:txBody>
+                  <a:tcPr anchor="ctr">
+                    <a:solidFill>
+                      <a:srgbClr val="F5F8FC"/>
+                    </a:solidFill>
+                  </a:tcPr>
+                </a:tc>
+              </a:tr>
+              <a:tr h="391666">
+                <a:tc>
+                  <a:txBody>
+                    <a:bodyPr/>
+                    <a:lstStyle/>
+                    <a:p>
+                      <a:pPr algn="l"/>
                       <a:r>
+                        <a:rPr sz="950" b="1">
+                          <a:solidFill>
+                            <a:srgbClr val="1E1E1E"/>
+                          </a:solidFill>
+                          <a:latin typeface="Times New Roman"/>
+                        </a:rPr>
+                        <a:t>Synthetic ERP (Controlled)</a:t>
+                      </a:r>
+                    </a:p>
+                  </a:txBody>
+                  <a:tcPr anchor="ctr">
+                    <a:solidFill>
+                      <a:srgbClr val="FFFFFF"/>
+                    </a:solidFill>
+                  </a:tcPr>
+                </a:tc>
+                <a:tc>
+                  <a:txBody>
+                    <a:bodyPr/>
+                    <a:lstStyle/>
+                    <a:p>
+                      <a:pPr algn="ctr"/>
+                      <a:r>
+                        <a:rPr sz="950">
+                          <a:solidFill>
+                            <a:srgbClr val="1E1E1E"/>
+                          </a:solidFill>
+                          <a:latin typeface="Times New Roman"/>
+                        </a:rPr>
+                        <a:t>0.876 ± 0.004</a:t>
+                      </a:r>
+                    </a:p>
+                  </a:txBody>
+                  <a:tcPr anchor="ctr">
+                    <a:solidFill>
+                      <a:srgbClr val="FFFFFF"/>
+                    </a:solidFill>
+                  </a:tcPr>
+                </a:tc>
+                <a:tc>
+                  <a:txBody>
+                    <a:bodyPr/>
+                    <a:lstStyle/>
+                    <a:p>
+                      <a:pPr algn="ctr"/>
+                      <a:r>
+                        <a:rPr sz="950">
+                          <a:solidFill>
+                            <a:srgbClr val="1E1E1E"/>
+                          </a:solidFill>
+                          <a:latin typeface="Times New Roman"/>
+                        </a:rPr>
+                        <a:t>0.942 ± 0.003</a:t>
+                      </a:r>
+                    </a:p>
+                  </a:txBody>
+                  <a:tcPr anchor="ctr">
+                    <a:solidFill>
+                      <a:srgbClr val="FFFFFF"/>
+                    </a:solidFill>
+                  </a:tcPr>
+                </a:tc>
+                <a:tc>
+                  <a:txBody>
+                    <a:bodyPr/>
+                    <a:lstStyle/>
+                    <a:p>
+                      <a:pPr algn="ctr"/>
+                      <a:r>
+                        <a:rPr sz="950">
+                          <a:solidFill>
+                            <a:srgbClr val="1E1E1E"/>
+                          </a:solidFill>
+                          <a:latin typeface="Times New Roman"/>
+                        </a:rPr>
+                        <a:t>+7.5%</a:t>
+                      </a:r>
+                    </a:p>
+                  </a:txBody>
+                  <a:tcPr anchor="ctr">
+                    <a:solidFill>
+                      <a:srgbClr val="FFFFFF"/>
+                    </a:solidFill>
+                  </a:tcPr>
+                </a:tc>
+                <a:tc>
+                  <a:txBody>
+                    <a:bodyPr/>
+                    <a:lstStyle/>
+                    <a:p>
+                      <a:pPr algn="l"/>
+                      <a:r>
+                        <a:rPr sz="950">
+                          <a:solidFill>
+                            <a:srgbClr val="1E1E1E"/>
+                          </a:solidFill>
+                          <a:latin typeface="Times New Roman"/>
+                        </a:rPr>
                         <a:t>Circular money flows and structuring patterns clearly separated</a:t>
                       </a:r>
                     </a:p>
                   </a:txBody>
-                  <a:tcPr marL="73152" marR="73152" marT="54864" marB="54864">
+                  <a:tcPr anchor="ctr">
                     <a:solidFill>
-                      <a:srgbClr val="F0F4FA"/>
+                      <a:srgbClr val="FFFFFF"/>
                     </a:solidFill>
                   </a:tcPr>
                 </a:tc>
-                <a:extLst>
-                  <a:ext uri="{0D108BD9-81ED-4DB2-BD59-A6C34878D82A}">
-                    <a16:rowId xmlns:a16="http://schemas.microsoft.com/office/drawing/2014/main" val="10003"/>
-                  </a:ext>
-                </a:extLst>
+              </a:tr>
+              <a:tr h="391670">
+                <a:tc>
+                  <a:txBody>
+                    <a:bodyPr/>
+                    <a:lstStyle/>
+                    <a:p>
+                      <a:pPr algn="l"/>
+                      <a:r>
+                        <a:rPr sz="950" b="1">
+                          <a:solidFill>
+                            <a:srgbClr val="1E1E1E"/>
+                          </a:solidFill>
+                          <a:latin typeface="Times New Roman"/>
+                        </a:rPr>
+                        <a:t>Federated Consortium (K=4)</a:t>
+                      </a:r>
+                    </a:p>
+                  </a:txBody>
+                  <a:tcPr anchor="ctr">
+                    <a:solidFill>
+                      <a:srgbClr val="F5F8FC"/>
+                    </a:solidFill>
+                  </a:tcPr>
+                </a:tc>
+                <a:tc>
+                  <a:txBody>
+                    <a:bodyPr/>
+                    <a:lstStyle/>
+                    <a:p>
+                      <a:pPr algn="ctr"/>
+                      <a:r>
+                        <a:rPr sz="950">
+                          <a:solidFill>
+                            <a:srgbClr val="1E1E1E"/>
+                          </a:solidFill>
+                          <a:latin typeface="Times New Roman"/>
+                        </a:rPr>
+                        <a:t>0.855 (Isolated)</a:t>
+                      </a:r>
+                    </a:p>
+                  </a:txBody>
+                  <a:tcPr anchor="ctr">
+                    <a:solidFill>
+                      <a:srgbClr val="F5F8FC"/>
+                    </a:solidFill>
+                  </a:tcPr>
+                </a:tc>
+                <a:tc>
+                  <a:txBody>
+                    <a:bodyPr/>
+                    <a:lstStyle/>
+                    <a:p>
+                      <a:pPr algn="ctr"/>
+                      <a:r>
+                        <a:rPr sz="950">
+                          <a:solidFill>
+                            <a:srgbClr val="1E1E1E"/>
+                          </a:solidFill>
+                          <a:latin typeface="Times New Roman"/>
+                        </a:rPr>
+                        <a:t>0.914 (FedProx)</a:t>
+                      </a:r>
+                    </a:p>
+                  </a:txBody>
+                  <a:tcPr anchor="ctr">
+                    <a:solidFill>
+                      <a:srgbClr val="F5F8FC"/>
+                    </a:solidFill>
+                  </a:tcPr>
+                </a:tc>
+                <a:tc>
+                  <a:txBody>
+                    <a:bodyPr/>
+                    <a:lstStyle/>
+                    <a:p>
+                      <a:pPr algn="ctr"/>
+                      <a:r>
+                        <a:rPr sz="950">
+                          <a:solidFill>
+                            <a:srgbClr val="1E1E1E"/>
+                          </a:solidFill>
+                          <a:latin typeface="Times New Roman"/>
+                        </a:rPr>
+                        <a:t>+5.93%</a:t>
+                      </a:r>
+                    </a:p>
+                  </a:txBody>
+                  <a:tcPr anchor="ctr">
+                    <a:solidFill>
+                      <a:srgbClr val="F5F8FC"/>
+                    </a:solidFill>
+                  </a:tcPr>
+                </a:tc>
+                <a:tc>
+                  <a:txBody>
+                    <a:bodyPr/>
+                    <a:lstStyle/>
+                    <a:p>
+                      <a:pPr algn="l"/>
+                      <a:r>
+                        <a:rPr sz="950">
+                          <a:solidFill>
+                            <a:srgbClr val="1E1E1E"/>
+                          </a:solidFill>
+                          <a:latin typeface="Times New Roman"/>
+                        </a:rPr>
+                        <a:t>98.91% Centralized Parity; Zero private PII shared across banks</a:t>
+                      </a:r>
+                    </a:p>
+                  </a:txBody>
+                  <a:tcPr anchor="ctr">
+                    <a:solidFill>
+                      <a:srgbClr val="F5F8FC"/>
+                    </a:solidFill>
+                  </a:tcPr>
+                </a:tc>
               </a:tr>
             </a:tbl>
           </a:graphicData>
@@ -5644,8 +5302,8 @@
         </p:nvSpPr>
         <p:spPr>
           <a:xfrm>
-            <a:off x="548640" y="3566160"/>
-            <a:ext cx="11064240" cy="2011680"/>
+            <a:off x="548640" y="3850000"/>
+            <a:ext cx="11064240" cy="2250000"/>
           </a:xfrm>
           <a:prstGeom prst="rect">
             <a:avLst/>
@@ -5659,50 +5317,114 @@
           <a:lstStyle/>
           <a:p>
             <a:pPr>
+              <a:spcBef>
+                <a:spcPts val="200"/>
+              </a:spcBef>
               <a:spcAft>
-                <a:spcPts val="800"/>
+                <a:spcPts val="200"/>
               </a:spcAft>
-              <a:defRPr sz="1400">
-                <a:solidFill>
-                  <a:srgbClr val="000000"/>
-                </a:solidFill>
-                <a:latin typeface="Times New Roman"/>
-              </a:defRPr>
             </a:pPr>
             <a:r>
-              <a:t>• Structural Lift Validated: Pure graph topology delivers a statistically validated +11.7% PR-AUC improvement in dense transaction networks (BankSim) under strictly chronological splits across 3 seeds.</a:t>
+              <a:rPr sz="1100" b="1">
+                <a:solidFill>
+                  <a:srgbClr val="003366"/>
+                </a:solidFill>
+                <a:latin typeface="Times New Roman"/>
+              </a:rPr>
+              <a:t>• Structural Lift Validated: </a:t>
+            </a:r>
+            <a:r>
+              <a:rPr sz="1050">
+                <a:solidFill>
+                  <a:srgbClr val="1E1E1E"/>
+                </a:solidFill>
+                <a:latin typeface="Times New Roman"/>
+              </a:rPr>
+              <a:t>Pure graph topology delivers a statistically validated +11.7% PR-AUC improvement in dense transaction networks (BankSim) under strictly chronological splits across 3 seeds.</a:t>
             </a:r>
           </a:p>
           <a:p>
             <a:pPr>
+              <a:spcBef>
+                <a:spcPts val="200"/>
+              </a:spcBef>
               <a:spcAft>
-                <a:spcPts val="800"/>
+                <a:spcPts val="200"/>
               </a:spcAft>
-              <a:defRPr sz="1400">
-                <a:solidFill>
-                  <a:srgbClr val="000000"/>
-                </a:solidFill>
-                <a:latin typeface="Times New Roman"/>
-              </a:defRPr>
             </a:pPr>
             <a:r>
-              <a:t>• Density is the Signal: Simple temporal in-degree and fan-in velocity drive over 90% of topological predictive lift; complex cycle detectors are largely redundant with local density.</a:t>
+              <a:rPr sz="1100" b="1">
+                <a:solidFill>
+                  <a:srgbClr val="003366"/>
+                </a:solidFill>
+                <a:latin typeface="Times New Roman"/>
+              </a:rPr>
+              <a:t>• Density is the Signal: </a:t>
+            </a:r>
+            <a:r>
+              <a:rPr sz="1050">
+                <a:solidFill>
+                  <a:srgbClr val="1E1E1E"/>
+                </a:solidFill>
+                <a:latin typeface="Times New Roman"/>
+              </a:rPr>
+              <a:t>Simple temporal in-degree and fan-in velocity drive over 90% of topological predictive lift; complex cycle detectors are largely redundant with local density.</a:t>
             </a:r>
           </a:p>
           <a:p>
             <a:pPr>
+              <a:spcBef>
+                <a:spcPts val="200"/>
+              </a:spcBef>
               <a:spcAft>
-                <a:spcPts val="800"/>
+                <a:spcPts val="200"/>
               </a:spcAft>
-              <a:defRPr sz="1400">
-                <a:solidFill>
-                  <a:srgbClr val="000000"/>
-                </a:solidFill>
-                <a:latin typeface="Times New Roman"/>
-              </a:defRPr>
             </a:pPr>
             <a:r>
-              <a:t>• Amount-Blind Independence: In amount-dominated environments (IBM AML), structural features provide a vital orthogonal signal (+0.09 PR-AUC) when transaction amounts are structured to evade thresholds.</a:t>
+              <a:rPr sz="1100" b="1">
+                <a:solidFill>
+                  <a:srgbClr val="003366"/>
+                </a:solidFill>
+                <a:latin typeface="Times New Roman"/>
+              </a:rPr>
+              <a:t>• Amount-Blind Independence: </a:t>
+            </a:r>
+            <a:r>
+              <a:rPr sz="1050">
+                <a:solidFill>
+                  <a:srgbClr val="1E1E1E"/>
+                </a:solidFill>
+                <a:latin typeface="Times New Roman"/>
+              </a:rPr>
+              <a:t>In amount-dominated environments (IBM AML), structural features provide a vital orthogonal signal (+0.09 PR-AUC) when transaction amounts are structured to evade thresholds.</a:t>
+            </a:r>
+          </a:p>
+          <a:p>
+            <a:pPr>
+              <a:spcBef>
+                <a:spcPts val="200"/>
+              </a:spcBef>
+              <a:spcAft>
+                <a:spcPts val="200"/>
+              </a:spcAft>
+            </a:pPr>
+            <a:r>
+              <a:rPr sz="1100" b="1">
+                <a:solidFill>
+                  <a:srgbClr val="003366"/>
+                </a:solidFill>
+                <a:latin typeface="Times New Roman"/>
+              </a:rPr>
+              <a:t>• Federated Consortium Lift: </a:t>
+            </a:r>
+            <a:r>
+              <a:rPr sz="1050">
+                <a:solidFill>
+                  <a:srgbClr val="1E1E1E"/>
+                </a:solidFill>
+                <a:latin typeface="Times New Roman"/>
+              </a:rPr>
+              <a:t>FedProx score-level consensus recovers 98.91% of centralized detection power with +5.93% collaboration gain across heterogeneous banking clients without raw data sharing.</a:t>
             </a:r>
           </a:p>
         </p:txBody>
@@ -5759,90 +5481,155 @@
             <p:ph idx="1"/>
           </p:nvPr>
         </p:nvSpPr>
-        <p:spPr/>
+        <p:spPr>
+          <a:xfrm>
+            <a:off x="0" y="1450000"/>
+            <a:ext cx="0" cy="4750000"/>
+          </a:xfrm>
+        </p:spPr>
         <p:txBody>
           <a:bodyPr>
             <a:normAutofit/>
           </a:bodyPr>
           <a:lstStyle/>
           <a:p>
-            <a:pPr marL="0" indent="0">
+            <a:pPr>
+              <a:spcBef>
+                <a:spcPts val="400"/>
+              </a:spcBef>
               <a:spcAft>
-                <a:spcPts val="1200"/>
+                <a:spcPts val="400"/>
               </a:spcAft>
-              <a:buNone/>
-              <a:defRPr sz="1500">
-                <a:solidFill>
-                  <a:srgbClr val="000000"/>
-                </a:solidFill>
-                <a:latin typeface="Times New Roman"/>
-              </a:defRPr>
             </a:pPr>
             <a:r>
-              <a:rPr dirty="0"/>
-              <a:t>• Scientific Rigor &amp; Leakage Elimination: Disproved prior literature claims of &gt;99% GNN accuracy by proving they stemmed from lookahead leakage. Built the first provably leakage-free, streaming graph audit framework.</a:t>
-            </a:r>
-          </a:p>
-          <a:p>
-            <a:pPr marL="0" indent="0">
+              <a:rPr sz="1200" b="1">
+                <a:solidFill>
+                  <a:srgbClr val="003366"/>
+                </a:solidFill>
+                <a:latin typeface="Times New Roman"/>
+              </a:rPr>
+              <a:t>• Scientific Rigor &amp; Leakage Elimination: </a:t>
+            </a:r>
+            <a:r>
+              <a:rPr sz="1150">
+                <a:solidFill>
+                  <a:srgbClr val="1E1E1E"/>
+                </a:solidFill>
+                <a:latin typeface="Times New Roman"/>
+              </a:rPr>
+              <a:t>Disproved prior literature claims of &gt;99% GNN accuracy by proving they stemmed from lookahead leakage. Built the first provably leakage-free, streaming graph audit framework.</a:t>
+            </a:r>
+          </a:p>
+          <a:p>
+            <a:pPr>
+              <a:spcBef>
+                <a:spcPts val="400"/>
+              </a:spcBef>
               <a:spcAft>
-                <a:spcPts val="1200"/>
+                <a:spcPts val="400"/>
               </a:spcAft>
-              <a:buNone/>
-              <a:defRPr sz="1500">
-                <a:solidFill>
-                  <a:srgbClr val="000000"/>
-                </a:solidFill>
-                <a:latin typeface="Times New Roman"/>
-              </a:defRPr>
             </a:pPr>
             <a:r>
-              <a:rPr dirty="0"/>
-              <a:t>• Defensible Empirical Value: Confirmed that temporal graph topology provides statistically significant lift (+11.7% PR-AUC) in dense transaction networks, while clarifying its limits in amount-saturated environments.</a:t>
-            </a:r>
-          </a:p>
-          <a:p>
-            <a:pPr marL="0" indent="0">
+              <a:rPr sz="1200" b="1">
+                <a:solidFill>
+                  <a:srgbClr val="003366"/>
+                </a:solidFill>
+                <a:latin typeface="Times New Roman"/>
+              </a:rPr>
+              <a:t>• Defensible Empirical Value: </a:t>
+            </a:r>
+            <a:r>
+              <a:rPr sz="1150">
+                <a:solidFill>
+                  <a:srgbClr val="1E1E1E"/>
+                </a:solidFill>
+                <a:latin typeface="Times New Roman"/>
+              </a:rPr>
+              <a:t>Confirmed that temporal graph topology provides statistically significant lift (+11.7% PR-AUC) in dense transaction networks, while clarifying its limits in amount-saturated environments.</a:t>
+            </a:r>
+          </a:p>
+          <a:p>
+            <a:pPr>
+              <a:spcBef>
+                <a:spcPts val="400"/>
+              </a:spcBef>
               <a:spcAft>
-                <a:spcPts val="1200"/>
+                <a:spcPts val="400"/>
               </a:spcAft>
-              <a:buNone/>
-              <a:defRPr sz="1500">
-                <a:solidFill>
-                  <a:srgbClr val="000000"/>
-                </a:solidFill>
-                <a:latin typeface="Times New Roman"/>
-              </a:defRPr>
             </a:pPr>
             <a:r>
-              <a:rPr dirty="0"/>
-              <a:t>• Audit-Grade Human Explainability: Eliminated the deep learning 'black box' by marrying quantitative </a:t>
-            </a:r>
-            <a:r>
-              <a:rPr dirty="0" err="1"/>
-              <a:t>TreeSHAP</a:t>
-            </a:r>
-            <a:r>
-              <a:rPr dirty="0"/>
-              <a:t> waterfall values with visual Neo4j graph subgraphs, satisfying enterprise regulatory standards (SOX, Basel III).</a:t>
-            </a:r>
-          </a:p>
-          <a:p>
-            <a:pPr marL="0" indent="0">
+              <a:rPr sz="1200" b="1">
+                <a:solidFill>
+                  <a:srgbClr val="003366"/>
+                </a:solidFill>
+                <a:latin typeface="Times New Roman"/>
+              </a:rPr>
+              <a:t>• Audit-Grade Human Explainability: </a:t>
+            </a:r>
+            <a:r>
+              <a:rPr sz="1150">
+                <a:solidFill>
+                  <a:srgbClr val="1E1E1E"/>
+                </a:solidFill>
+                <a:latin typeface="Times New Roman"/>
+              </a:rPr>
+              <a:t>Eliminated the deep learning 'black box' by marrying quantitative TreeSHAP waterfall values with visual Neo4j graph subgraphs, satisfying enterprise regulatory standards (SOX, Basel III).</a:t>
+            </a:r>
+          </a:p>
+          <a:p>
+            <a:pPr>
+              <a:spcBef>
+                <a:spcPts val="400"/>
+              </a:spcBef>
               <a:spcAft>
-                <a:spcPts val="1200"/>
+                <a:spcPts val="400"/>
               </a:spcAft>
-              <a:buNone/>
-              <a:defRPr sz="1500">
-                <a:solidFill>
-                  <a:srgbClr val="000000"/>
-                </a:solidFill>
-                <a:latin typeface="Times New Roman"/>
-              </a:defRPr>
             </a:pPr>
             <a:r>
-              <a:rPr dirty="0"/>
-              <a:t>• Enterprise Simulation &amp; Operational Readiness: Built a calibrated synthetic ERP engine and achieved sub-second streaming inference latency, delivering an end-to-end prototype ready for enterprise deployment.</a:t>
+              <a:rPr sz="1200" b="1">
+                <a:solidFill>
+                  <a:srgbClr val="003366"/>
+                </a:solidFill>
+                <a:latin typeface="Times New Roman"/>
+              </a:rPr>
+              <a:t>• Privacy-Preserving Federation: </a:t>
+            </a:r>
+            <a:r>
+              <a:rPr sz="1150">
+                <a:solidFill>
+                  <a:srgbClr val="1E1E1E"/>
+                </a:solidFill>
+                <a:latin typeface="Times New Roman"/>
+              </a:rPr>
+              <a:t>Demonstrated multi-bank collaborative defense via FedProx score-level consensus, recovering 98.91% of centralized performance without sharing raw customer financial data.</a:t>
+            </a:r>
+          </a:p>
+          <a:p>
+            <a:pPr>
+              <a:spcBef>
+                <a:spcPts val="400"/>
+              </a:spcBef>
+              <a:spcAft>
+                <a:spcPts val="400"/>
+              </a:spcAft>
+            </a:pPr>
+            <a:r>
+              <a:rPr sz="1200" b="1">
+                <a:solidFill>
+                  <a:srgbClr val="003366"/>
+                </a:solidFill>
+                <a:latin typeface="Times New Roman"/>
+              </a:rPr>
+              <a:t>• Enterprise Simulation &amp; Operational Readiness: </a:t>
+            </a:r>
+            <a:r>
+              <a:rPr sz="1150">
+                <a:solidFill>
+                  <a:srgbClr val="1E1E1E"/>
+                </a:solidFill>
+                <a:latin typeface="Times New Roman"/>
+              </a:rPr>
+              <a:t>Built a calibrated synthetic ERP engine and achieved sub-second streaming inference latency, delivering an end-to-end prototype ready for enterprise deployment.</a:t>
             </a:r>
           </a:p>
         </p:txBody>
@@ -5921,17 +5708,19 @@
           <a:bodyPr/>
           <a:lstStyle/>
           <a:p>
-            <a:pPr>
-              <a:defRPr sz="1200">
-                <a:solidFill>
-                  <a:srgbClr val="323232"/>
-                </a:solidFill>
-                <a:latin typeface="Times New Roman"/>
-              </a:defRPr>
-            </a:pPr>
-            <a:r>
+            <a:r>
+              <a:rPr sz="1000">
+                <a:solidFill>
+                  <a:srgbClr val="505050"/>
+                </a:solidFill>
+                <a:latin typeface="Times New Roman"/>
+              </a:rPr>
               <a:t>09-09-2026</a:t>
             </a:r>
+            <a:endParaRPr lang="en-IN">
+              <a:latin typeface="Times New Roman" panose="02020603050405020304" pitchFamily="18" charset="0"/>
+              <a:cs typeface="Times New Roman" panose="02020603050405020304" pitchFamily="18" charset="0"/>
+            </a:endParaRPr>
           </a:p>
         </p:txBody>
       </p:sp>
@@ -5956,15 +5745,11 @@
           <a:bodyPr/>
           <a:lstStyle/>
           <a:p>
-            <a:pPr>
-              <a:defRPr sz="1200">
-                <a:solidFill>
-                  <a:srgbClr val="323232"/>
-                </a:solidFill>
-                <a:latin typeface="Times New Roman"/>
-              </a:defRPr>
-            </a:pPr>
-            <a:r>
+            <a:r>
+              <a:rPr lang="en-IN" dirty="0">
+                <a:latin typeface="Times New Roman" panose="02020603050405020304" pitchFamily="18" charset="0"/>
+                <a:cs typeface="Times New Roman" panose="02020603050405020304" pitchFamily="18" charset="0"/>
+              </a:rPr>
               <a:t>SCOPE</a:t>
             </a:r>
           </a:p>
@@ -5991,17 +5776,17 @@
           <a:bodyPr/>
           <a:lstStyle/>
           <a:p>
-            <a:pPr>
-              <a:defRPr sz="1200">
-                <a:solidFill>
-                  <a:srgbClr val="323232"/>
-                </a:solidFill>
-                <a:latin typeface="Times New Roman"/>
-              </a:defRPr>
-            </a:pPr>
-            <a:r>
+            <a:fld id="{65201FD4-9D8D-4491-815B-63C7BF4F0034}" type="slidenum">
+              <a:rPr lang="en-IN" smtClean="0">
+                <a:latin typeface="Times New Roman" panose="02020603050405020304" pitchFamily="18" charset="0"/>
+                <a:cs typeface="Times New Roman" panose="02020603050405020304" pitchFamily="18" charset="0"/>
+              </a:rPr>
               <a:t>12</a:t>
-            </a:r>
+            </a:fld>
+            <a:endParaRPr lang="en-IN" dirty="0">
+              <a:latin typeface="Times New Roman" panose="02020603050405020304" pitchFamily="18" charset="0"/>
+              <a:cs typeface="Times New Roman" panose="02020603050405020304" pitchFamily="18" charset="0"/>
+            </a:endParaRPr>
           </a:p>
         </p:txBody>
       </p:sp>
@@ -6166,239 +5951,231 @@
                 <a:spcPct val="100000"/>
               </a:lnSpc>
               <a:spcBef>
-                <a:spcPct val="0"/>
+                <a:spcPts val="200"/>
               </a:spcBef>
-              <a:buNone/>
-            </a:pPr>
-            <a:r>
-              <a:rPr lang="en-US" sz="1400" dirty="0"/>
-              <a:t>[1]  S. Motie and B. </a:t>
-            </a:r>
-            <a:r>
-              <a:rPr lang="en-US" sz="1400" dirty="0" err="1"/>
-              <a:t>Raahemi</a:t>
-            </a:r>
-            <a:r>
-              <a:rPr lang="en-US" sz="1400" dirty="0"/>
-              <a:t>, "Financial fraud detection using graph neural networks: A systematic review," Expert Syst. Appl., vol. 240, Apr. 2024.</a:t>
-            </a:r>
-          </a:p>
-          <a:p>
-            <a:pPr marL="0" indent="0">
               <a:spcAft>
-                <a:spcPts val="50"/>
+                <a:spcPts val="200"/>
               </a:spcAft>
               <a:buNone/>
             </a:pPr>
             <a:r>
-              <a:rPr lang="en-US" sz="1400" dirty="0"/>
-              <a:t>[2]  N. Innan et al., "Financial fraud detection using quantum graph neural networks," Quantum Mach. Intell., vol. 6, no. 1, Feb. 2024.</a:t>
-            </a:r>
-          </a:p>
-          <a:p>
-            <a:pPr marL="0" indent="0">
-              <a:spcAft>
-                <a:spcPts val="50"/>
-              </a:spcAft>
-              <a:buNone/>
-            </a:pPr>
-            <a:r>
-              <a:rPr lang="en-US" sz="1400" dirty="0"/>
-              <a:t>[3]  M. Grossi et al., "Mixed quantum–classical method for fraud detection with quantum feature selection," IEEE Trans. Quantum Eng., vol. 3, 2022.</a:t>
-            </a:r>
-          </a:p>
-          <a:p>
-            <a:pPr marL="0" indent="0">
-              <a:spcAft>
-                <a:spcPts val="50"/>
-              </a:spcAft>
-              <a:buNone/>
-            </a:pPr>
-            <a:r>
-              <a:rPr lang="en-US" sz="1400" dirty="0"/>
-              <a:t>[4]  R. R. Devi, J. E. Raja, and Y. B. Chin, "RL-GNN fusion for real-time financial fraud detection," Sci. Rep., vol. 15, no. 1, 2025.</a:t>
-            </a:r>
-          </a:p>
-          <a:p>
-            <a:pPr marL="0" indent="0">
-              <a:spcAft>
-                <a:spcPts val="50"/>
-              </a:spcAft>
-              <a:buNone/>
-            </a:pPr>
-            <a:r>
-              <a:rPr lang="en-US" sz="1400" dirty="0"/>
-              <a:t>[5]  Z. N. Jawad et al., "ML-driven optimization of ERP systems: A comprehensive review," </a:t>
-            </a:r>
-            <a:r>
-              <a:rPr lang="en-US" sz="1400" dirty="0" err="1"/>
-              <a:t>Discov</a:t>
-            </a:r>
-            <a:r>
-              <a:rPr lang="en-US" sz="1400" dirty="0"/>
-              <a:t>. </a:t>
-            </a:r>
-            <a:r>
-              <a:rPr lang="en-US" sz="1400" dirty="0" err="1"/>
-              <a:t>Artif</a:t>
-            </a:r>
-            <a:r>
-              <a:rPr lang="en-US" sz="1400" dirty="0"/>
-              <a:t>. Intell., vol. 4, 2024.</a:t>
-            </a:r>
-          </a:p>
-          <a:p>
-            <a:pPr marL="0" indent="0">
-              <a:spcAft>
-                <a:spcPts val="50"/>
-              </a:spcAft>
-              <a:buNone/>
-            </a:pPr>
-            <a:r>
-              <a:rPr lang="en-US" sz="1400" dirty="0"/>
-              <a:t>[6]  Z. Yuan et al., "A comprehensive survey on GNN-based anomaly detection," ACM </a:t>
-            </a:r>
-            <a:r>
-              <a:rPr lang="en-US" sz="1400" dirty="0" err="1"/>
-              <a:t>Comput</a:t>
-            </a:r>
-            <a:r>
-              <a:rPr lang="en-US" sz="1400" dirty="0"/>
-              <a:t>. </a:t>
-            </a:r>
-            <a:r>
-              <a:rPr lang="en-US" sz="1400" dirty="0" err="1"/>
-              <a:t>Surv</a:t>
-            </a:r>
-            <a:r>
-              <a:rPr lang="en-US" sz="1400" dirty="0"/>
-              <a:t>., 2025.</a:t>
-            </a:r>
-          </a:p>
-          <a:p>
-            <a:pPr marL="0" indent="0">
-              <a:spcAft>
-                <a:spcPts val="50"/>
-              </a:spcAft>
-              <a:buNone/>
-            </a:pPr>
-            <a:r>
-              <a:rPr lang="en-US" sz="1400" dirty="0"/>
-              <a:t>[7]  Y. Shi et al., "Uncertainty-aware </a:t>
-            </a:r>
-            <a:r>
-              <a:rPr lang="en-US" sz="1400" dirty="0" err="1"/>
-              <a:t>spatio</a:t>
-            </a:r>
-            <a:r>
-              <a:rPr lang="en-US" sz="1400" dirty="0"/>
-              <a:t>-temporal contrastive GNNs for financial fraud detection," in Proc. AAAI, 2026.</a:t>
-            </a:r>
-          </a:p>
-          <a:p>
-            <a:pPr marL="0" indent="0">
-              <a:spcAft>
-                <a:spcPts val="50"/>
-              </a:spcAft>
-              <a:buNone/>
-            </a:pPr>
-            <a:r>
-              <a:rPr lang="en-US" sz="1400" dirty="0"/>
-              <a:t>[8]  L. Zhi et al., "Imbalanced fraudulent transaction detection based on embedding-aware conditional GAN," J. Big Data, vol. 12, 2025.</a:t>
-            </a:r>
-          </a:p>
-          <a:p>
-            <a:pPr marL="0" indent="0">
-              <a:spcAft>
-                <a:spcPts val="50"/>
-              </a:spcAft>
-              <a:buNone/>
-            </a:pPr>
-            <a:r>
-              <a:rPr lang="en-US" sz="1400" dirty="0"/>
-              <a:t>[9]  G. Tong et al., "Financial transaction fraud detector based on imbalance learning and GNN," Appl. Intell., vol. 53, 2023.</a:t>
-            </a:r>
-          </a:p>
-          <a:p>
-            <a:pPr marL="0" indent="0">
-              <a:spcAft>
-                <a:spcPts val="50"/>
-              </a:spcAft>
-              <a:buNone/>
-            </a:pPr>
-            <a:r>
-              <a:rPr lang="en-US" sz="1400" dirty="0"/>
-              <a:t>[10] M. Boyapati et al., "</a:t>
-            </a:r>
-            <a:r>
-              <a:rPr lang="en-US" sz="1400" dirty="0" err="1"/>
-              <a:t>BalancerGNN</a:t>
-            </a:r>
-            <a:r>
-              <a:rPr lang="en-US" sz="1400" dirty="0"/>
-              <a:t>: Balancer GNNs for imbalanced datasets," IEEE Access, vol. 13, 2025.</a:t>
-            </a:r>
-          </a:p>
-          <a:p>
-            <a:pPr marL="0" indent="0">
-              <a:spcAft>
-                <a:spcPts val="50"/>
-              </a:spcAft>
-              <a:buNone/>
-            </a:pPr>
-            <a:r>
-              <a:rPr lang="en-US" sz="1400" dirty="0"/>
-              <a:t>[11] X. J. </a:t>
-            </a:r>
-            <a:r>
-              <a:rPr lang="en-US" sz="1400" dirty="0" err="1"/>
-              <a:t>Mamakou</a:t>
-            </a:r>
-            <a:r>
-              <a:rPr lang="en-US" sz="1400" dirty="0"/>
-              <a:t> et al., "Post-implementation evaluation of ERP systems: An internal auditors’ perspective," Inf. Syst. Manag., 2024.</a:t>
-            </a:r>
-          </a:p>
-          <a:p>
-            <a:pPr marL="0" indent="0">
-              <a:spcAft>
-                <a:spcPts val="50"/>
-              </a:spcAft>
-              <a:buNone/>
-            </a:pPr>
-            <a:r>
-              <a:rPr lang="en-US" sz="1400" dirty="0"/>
-              <a:t>[12] M. A. </a:t>
-            </a:r>
-            <a:r>
-              <a:rPr lang="en-US" sz="1400" dirty="0" err="1"/>
-              <a:t>Vasarhelyi</a:t>
-            </a:r>
-            <a:r>
-              <a:rPr lang="en-US" sz="1400" dirty="0"/>
-              <a:t> et al., "The acceptance and adoption of continuous auditing by internal auditors," Int. J. Account. Inf. Syst., vol. 13, no. 3, pp. 267–281, 2012.</a:t>
-            </a:r>
-          </a:p>
-          <a:p>
-            <a:pPr marL="0" indent="0" eaLnBrk="0" fontAlgn="base" hangingPunct="0">
-              <a:lnSpc>
-                <a:spcPct val="100000"/>
-              </a:lnSpc>
+              <a:rPr sz="1000">
+                <a:solidFill>
+                  <a:srgbClr val="1E1E1E"/>
+                </a:solidFill>
+                <a:latin typeface="Times New Roman"/>
+              </a:rPr>
+              <a:t>[1]  S. Motie and B. Raahemi, "Financial fraud detection using graph neural networks: A systematic review," Expert Syst. Appl., vol. 240, Apr. 2024.</a:t>
+            </a:r>
+          </a:p>
+          <a:p>
+            <a:pPr>
               <a:spcBef>
-                <a:spcPct val="0"/>
+                <a:spcPts val="200"/>
               </a:spcBef>
               <a:spcAft>
-                <a:spcPts val="1000"/>
+                <a:spcPts val="200"/>
               </a:spcAft>
-              <a:buNone/>
-              <a:defRPr sz="1400">
-                <a:solidFill>
-                  <a:srgbClr val="000000"/>
-                </a:solidFill>
-                <a:latin typeface="Times New Roman"/>
-              </a:defRPr>
             </a:pPr>
-            <a:endParaRPr dirty="0"/>
+            <a:r>
+              <a:rPr sz="1000">
+                <a:solidFill>
+                  <a:srgbClr val="1E1E1E"/>
+                </a:solidFill>
+                <a:latin typeface="Times New Roman"/>
+              </a:rPr>
+              <a:t>[2]  N. Innan et al., "Financial fraud detection using quantum graph neural networks," Quantum Mach. Intell., vol. 6, no. 1, Feb. 2024.</a:t>
+            </a:r>
+          </a:p>
+          <a:p>
+            <a:pPr>
+              <a:spcBef>
+                <a:spcPts val="200"/>
+              </a:spcBef>
+              <a:spcAft>
+                <a:spcPts val="200"/>
+              </a:spcAft>
+            </a:pPr>
+            <a:r>
+              <a:rPr sz="1000">
+                <a:solidFill>
+                  <a:srgbClr val="1E1E1E"/>
+                </a:solidFill>
+                <a:latin typeface="Times New Roman"/>
+              </a:rPr>
+              <a:t>[3]  M. Grossi et al., "Mixed quantum–classical method for fraud detection with quantum feature selection," IEEE Trans. Quantum Eng., vol. 3, 2022.</a:t>
+            </a:r>
+          </a:p>
+          <a:p>
+            <a:pPr>
+              <a:spcBef>
+                <a:spcPts val="200"/>
+              </a:spcBef>
+              <a:spcAft>
+                <a:spcPts val="200"/>
+              </a:spcAft>
+            </a:pPr>
+            <a:r>
+              <a:rPr sz="1000">
+                <a:solidFill>
+                  <a:srgbClr val="1E1E1E"/>
+                </a:solidFill>
+                <a:latin typeface="Times New Roman"/>
+              </a:rPr>
+              <a:t>[4]  R. R. Devi, J. E. Raja, and Y. B. Chin, "RL-GNN fusion for real-time financial fraud detection," Sci. Rep., vol. 15, no. 1, 2025.</a:t>
+            </a:r>
+          </a:p>
+          <a:p>
+            <a:pPr>
+              <a:spcBef>
+                <a:spcPts val="200"/>
+              </a:spcBef>
+              <a:spcAft>
+                <a:spcPts val="200"/>
+              </a:spcAft>
+            </a:pPr>
+            <a:r>
+              <a:rPr sz="1000">
+                <a:solidFill>
+                  <a:srgbClr val="1E1E1E"/>
+                </a:solidFill>
+                <a:latin typeface="Times New Roman"/>
+              </a:rPr>
+              <a:t>[5]  Z. N. Jawad et al., "ML-driven optimization of ERP systems: A comprehensive review," Discov. Artif. Intell., vol. 4, 2024.</a:t>
+            </a:r>
+          </a:p>
+          <a:p>
+            <a:pPr>
+              <a:spcBef>
+                <a:spcPts val="200"/>
+              </a:spcBef>
+              <a:spcAft>
+                <a:spcPts val="200"/>
+              </a:spcAft>
+            </a:pPr>
+            <a:r>
+              <a:rPr sz="1000">
+                <a:solidFill>
+                  <a:srgbClr val="1E1E1E"/>
+                </a:solidFill>
+                <a:latin typeface="Times New Roman"/>
+              </a:rPr>
+              <a:t>[6]  Z. Yuan et al., "A comprehensive survey on GNN-based anomaly detection," ACM Comput. Surv., 2025.</a:t>
+            </a:r>
+          </a:p>
+          <a:p>
+            <a:pPr>
+              <a:spcBef>
+                <a:spcPts val="200"/>
+              </a:spcBef>
+              <a:spcAft>
+                <a:spcPts val="200"/>
+              </a:spcAft>
+            </a:pPr>
+            <a:r>
+              <a:rPr sz="1000">
+                <a:solidFill>
+                  <a:srgbClr val="1E1E1E"/>
+                </a:solidFill>
+                <a:latin typeface="Times New Roman"/>
+              </a:rPr>
+              <a:t>[7]  Y. Shi et al., "Uncertainty-aware spatio-temporal contrastive GNNs for financial fraud detection," in Proc. AAAI, 2026.</a:t>
+            </a:r>
+          </a:p>
+          <a:p>
+            <a:pPr>
+              <a:spcBef>
+                <a:spcPts val="200"/>
+              </a:spcBef>
+              <a:spcAft>
+                <a:spcPts val="200"/>
+              </a:spcAft>
+            </a:pPr>
+            <a:r>
+              <a:rPr sz="1000">
+                <a:solidFill>
+                  <a:srgbClr val="1E1E1E"/>
+                </a:solidFill>
+                <a:latin typeface="Times New Roman"/>
+              </a:rPr>
+              <a:t>[8]  L. Zhi et al., "Imbalanced fraudulent transaction detection based on embedding-aware conditional GAN," J. Big Data, vol. 12, 2025.</a:t>
+            </a:r>
+          </a:p>
+          <a:p>
+            <a:pPr>
+              <a:spcBef>
+                <a:spcPts val="200"/>
+              </a:spcBef>
+              <a:spcAft>
+                <a:spcPts val="200"/>
+              </a:spcAft>
+            </a:pPr>
+            <a:r>
+              <a:rPr sz="1000">
+                <a:solidFill>
+                  <a:srgbClr val="1E1E1E"/>
+                </a:solidFill>
+                <a:latin typeface="Times New Roman"/>
+              </a:rPr>
+              <a:t>[9]  G. Tong et al., "Financial transaction fraud detector based on imbalance learning and GNN," Appl. Intell., vol. 53, 2023.</a:t>
+            </a:r>
+          </a:p>
+          <a:p>
+            <a:pPr>
+              <a:spcBef>
+                <a:spcPts val="200"/>
+              </a:spcBef>
+              <a:spcAft>
+                <a:spcPts val="200"/>
+              </a:spcAft>
+            </a:pPr>
+            <a:r>
+              <a:rPr sz="1000">
+                <a:solidFill>
+                  <a:srgbClr val="1E1E1E"/>
+                </a:solidFill>
+                <a:latin typeface="Times New Roman"/>
+              </a:rPr>
+              <a:t>[10] M. Boyapati et al., "BalancerGNN: Balancer GNNs for imbalanced datasets," IEEE Access, vol. 13, 2025.</a:t>
+            </a:r>
+          </a:p>
+          <a:p>
+            <a:pPr>
+              <a:spcBef>
+                <a:spcPts val="200"/>
+              </a:spcBef>
+              <a:spcAft>
+                <a:spcPts val="200"/>
+              </a:spcAft>
+            </a:pPr>
+            <a:r>
+              <a:rPr sz="1000">
+                <a:solidFill>
+                  <a:srgbClr val="1E1E1E"/>
+                </a:solidFill>
+                <a:latin typeface="Times New Roman"/>
+              </a:rPr>
+              <a:t>[11] X. J. Mamakou et al., "Post-implementation evaluation of ERP systems: An internal auditors’ perspective," Inf. Syst. Manag., 2024.</a:t>
+            </a:r>
+          </a:p>
+          <a:p>
+            <a:pPr>
+              <a:spcBef>
+                <a:spcPts val="200"/>
+              </a:spcBef>
+              <a:spcAft>
+                <a:spcPts val="200"/>
+              </a:spcAft>
+            </a:pPr>
+            <a:r>
+              <a:rPr sz="1000">
+                <a:solidFill>
+                  <a:srgbClr val="1E1E1E"/>
+                </a:solidFill>
+                <a:latin typeface="Times New Roman"/>
+              </a:rPr>
+              <a:t>[12] M. A. Vasarhelyi et al., "The acceptance and adoption of continuous auditing by internal auditors," Int. J. Account. Inf. Syst., vol. 13, no. 3, pp. 267–281, 2012.</a:t>
+            </a:r>
           </a:p>
         </p:txBody>
       </p:sp>
@@ -6423,17 +6200,16 @@
           <a:bodyPr/>
           <a:lstStyle/>
           <a:p>
-            <a:pPr>
-              <a:defRPr sz="1200">
-                <a:solidFill>
-                  <a:srgbClr val="323232"/>
-                </a:solidFill>
-                <a:latin typeface="Times New Roman"/>
-              </a:defRPr>
-            </a:pPr>
-            <a:r>
+            <a:r>
+              <a:rPr sz="1000">
+                <a:solidFill>
+                  <a:srgbClr val="505050"/>
+                </a:solidFill>
+                <a:latin typeface="Times New Roman"/>
+              </a:rPr>
               <a:t>09-09-2026</a:t>
             </a:r>
+            <a:endParaRPr lang="en-IN"/>
           </a:p>
         </p:txBody>
       </p:sp>
@@ -6458,15 +6234,8 @@
           <a:bodyPr/>
           <a:lstStyle/>
           <a:p>
-            <a:pPr>
-              <a:defRPr sz="1200">
-                <a:solidFill>
-                  <a:srgbClr val="323232"/>
-                </a:solidFill>
-                <a:latin typeface="Times New Roman"/>
-              </a:defRPr>
-            </a:pPr>
-            <a:r>
+            <a:r>
+              <a:rPr lang="en-IN"/>
               <a:t>SCOPE</a:t>
             </a:r>
           </a:p>
@@ -6493,17 +6262,11 @@
           <a:bodyPr/>
           <a:lstStyle/>
           <a:p>
-            <a:pPr>
-              <a:defRPr sz="1200">
-                <a:solidFill>
-                  <a:srgbClr val="323232"/>
-                </a:solidFill>
-                <a:latin typeface="Times New Roman"/>
-              </a:defRPr>
-            </a:pPr>
-            <a:r>
+            <a:fld id="{65201FD4-9D8D-4491-815B-63C7BF4F0034}" type="slidenum">
+              <a:rPr lang="en-IN" smtClean="0"/>
               <a:t>13</a:t>
-            </a:r>
+            </a:fld>
+            <a:endParaRPr lang="en-IN"/>
           </a:p>
         </p:txBody>
       </p:sp>
@@ -6586,41 +6349,76 @@
             <p:ph idx="1"/>
           </p:nvPr>
         </p:nvSpPr>
+        <p:spPr>
+          <a:xfrm>
+            <a:off x="0" y="1400000"/>
+            <a:ext cx="0" cy="600000"/>
+          </a:xfrm>
+        </p:spPr>
+        <p:txBody>
+          <a:bodyPr/>
+          <a:lstStyle/>
+          <a:p>
+            <a:r>
+              <a:rPr sz="1400" b="1">
+                <a:solidFill>
+                  <a:srgbClr val="003366"/>
+                </a:solidFill>
+                <a:latin typeface="Times New Roman"/>
+              </a:rPr>
+              <a:t>• Approval obtained from Faculty Guide (Prof. Dhivya C.R.) via official mail:</a:t>
+            </a:r>
+          </a:p>
+        </p:txBody>
+      </p:sp>
+      <p:sp>
+        <p:nvSpPr>
+          <p:cNvPr id="4" name="Date Placeholder 3">
+            <a:extLst>
+              <a:ext uri="{FF2B5EF4-FFF2-40B4-BE49-F238E27FC236}">
+                <a16:creationId xmlns:a16="http://schemas.microsoft.com/office/drawing/2014/main" id="{C7827C50-3ED3-2DB6-C227-6784C6CA9E30}"/>
+              </a:ext>
+            </a:extLst>
+          </p:cNvPr>
+          <p:cNvSpPr>
+            <a:spLocks noGrp="1"/>
+          </p:cNvSpPr>
+          <p:nvPr>
+            <p:ph type="dt" sz="half" idx="10"/>
+          </p:nvPr>
+        </p:nvSpPr>
         <p:spPr/>
         <p:txBody>
           <a:bodyPr/>
           <a:lstStyle/>
           <a:p>
-            <a:pPr marL="0" indent="0">
-              <a:buNone/>
-              <a:defRPr sz="1800" b="1">
-                <a:solidFill>
-                  <a:srgbClr val="000000"/>
-                </a:solidFill>
-                <a:latin typeface="Times New Roman"/>
-              </a:defRPr>
-            </a:pPr>
-            <a:r>
-              <a:rPr dirty="0"/>
-              <a:t>• Approval obtained from Faculty Guide (Prof. Dhivya C.R.) via official mail:</a:t>
-            </a:r>
-          </a:p>
-        </p:txBody>
-      </p:sp>
-      <p:sp>
-        <p:nvSpPr>
-          <p:cNvPr id="4" name="Date Placeholder 3">
-            <a:extLst>
-              <a:ext uri="{FF2B5EF4-FFF2-40B4-BE49-F238E27FC236}">
-                <a16:creationId xmlns:a16="http://schemas.microsoft.com/office/drawing/2014/main" id="{C7827C50-3ED3-2DB6-C227-6784C6CA9E30}"/>
-              </a:ext>
-            </a:extLst>
-          </p:cNvPr>
-          <p:cNvSpPr>
-            <a:spLocks noGrp="1"/>
-          </p:cNvSpPr>
-          <p:nvPr>
-            <p:ph type="dt" sz="half" idx="10"/>
+            <a:r>
+              <a:rPr sz="1000">
+                <a:solidFill>
+                  <a:srgbClr val="505050"/>
+                </a:solidFill>
+                <a:latin typeface="Times New Roman"/>
+              </a:rPr>
+              <a:t>09-09-2026</a:t>
+            </a:r>
+            <a:endParaRPr lang="en-IN" dirty="0"/>
+          </a:p>
+        </p:txBody>
+      </p:sp>
+      <p:sp>
+        <p:nvSpPr>
+          <p:cNvPr id="5" name="Footer Placeholder 4">
+            <a:extLst>
+              <a:ext uri="{FF2B5EF4-FFF2-40B4-BE49-F238E27FC236}">
+                <a16:creationId xmlns:a16="http://schemas.microsoft.com/office/drawing/2014/main" id="{56664170-792F-28F8-1C31-5F7A8D69F97E}"/>
+              </a:ext>
+            </a:extLst>
+          </p:cNvPr>
+          <p:cNvSpPr>
+            <a:spLocks noGrp="1"/>
+          </p:cNvSpPr>
+          <p:nvPr>
+            <p:ph type="ftr" sz="quarter" idx="11"/>
           </p:nvPr>
         </p:nvSpPr>
         <p:spPr/>
@@ -6628,34 +6426,27 @@
           <a:bodyPr/>
           <a:lstStyle/>
           <a:p>
-            <a:pPr>
-              <a:defRPr sz="1200">
-                <a:solidFill>
-                  <a:srgbClr val="323232"/>
-                </a:solidFill>
-                <a:latin typeface="Times New Roman"/>
-              </a:defRPr>
-            </a:pPr>
-            <a:r>
-              <a:t>09-09-2026</a:t>
-            </a:r>
-          </a:p>
-        </p:txBody>
-      </p:sp>
-      <p:sp>
-        <p:nvSpPr>
-          <p:cNvPr id="5" name="Footer Placeholder 4">
-            <a:extLst>
-              <a:ext uri="{FF2B5EF4-FFF2-40B4-BE49-F238E27FC236}">
-                <a16:creationId xmlns:a16="http://schemas.microsoft.com/office/drawing/2014/main" id="{56664170-792F-28F8-1C31-5F7A8D69F97E}"/>
-              </a:ext>
-            </a:extLst>
-          </p:cNvPr>
-          <p:cNvSpPr>
-            <a:spLocks noGrp="1"/>
-          </p:cNvSpPr>
-          <p:nvPr>
-            <p:ph type="ftr" sz="quarter" idx="11"/>
+            <a:r>
+              <a:rPr lang="en-IN"/>
+              <a:t>SCOPE</a:t>
+            </a:r>
+          </a:p>
+        </p:txBody>
+      </p:sp>
+      <p:sp>
+        <p:nvSpPr>
+          <p:cNvPr id="6" name="Slide Number Placeholder 5">
+            <a:extLst>
+              <a:ext uri="{FF2B5EF4-FFF2-40B4-BE49-F238E27FC236}">
+                <a16:creationId xmlns:a16="http://schemas.microsoft.com/office/drawing/2014/main" id="{EE16528B-72DB-0275-6A94-33ABB5CD7075}"/>
+              </a:ext>
+            </a:extLst>
+          </p:cNvPr>
+          <p:cNvSpPr>
+            <a:spLocks noGrp="1"/>
+          </p:cNvSpPr>
+          <p:nvPr>
+            <p:ph type="sldNum" sz="quarter" idx="12"/>
           </p:nvPr>
         </p:nvSpPr>
         <p:spPr/>
@@ -6663,79 +6454,32 @@
           <a:bodyPr/>
           <a:lstStyle/>
           <a:p>
-            <a:pPr>
-              <a:defRPr sz="1200">
-                <a:solidFill>
-                  <a:srgbClr val="323232"/>
-                </a:solidFill>
-                <a:latin typeface="Times New Roman"/>
-              </a:defRPr>
-            </a:pPr>
-            <a:r>
-              <a:t>SCOPE</a:t>
-            </a:r>
-          </a:p>
-        </p:txBody>
-      </p:sp>
-      <p:sp>
-        <p:nvSpPr>
-          <p:cNvPr id="6" name="Slide Number Placeholder 5">
-            <a:extLst>
-              <a:ext uri="{FF2B5EF4-FFF2-40B4-BE49-F238E27FC236}">
-                <a16:creationId xmlns:a16="http://schemas.microsoft.com/office/drawing/2014/main" id="{EE16528B-72DB-0275-6A94-33ABB5CD7075}"/>
-              </a:ext>
-            </a:extLst>
-          </p:cNvPr>
-          <p:cNvSpPr>
-            <a:spLocks noGrp="1"/>
-          </p:cNvSpPr>
-          <p:nvPr>
-            <p:ph type="sldNum" sz="quarter" idx="12"/>
-          </p:nvPr>
-        </p:nvSpPr>
-        <p:spPr/>
-        <p:txBody>
-          <a:bodyPr/>
-          <a:lstStyle/>
-          <a:p>
-            <a:pPr>
-              <a:defRPr sz="1200">
-                <a:solidFill>
-                  <a:srgbClr val="323232"/>
-                </a:solidFill>
-                <a:latin typeface="Times New Roman"/>
-              </a:defRPr>
-            </a:pPr>
-            <a:r>
+            <a:fld id="{65201FD4-9D8D-4491-815B-63C7BF4F0034}" type="slidenum">
+              <a:rPr lang="en-IN" smtClean="0"/>
               <a:t>2</a:t>
-            </a:r>
+            </a:fld>
+            <a:endParaRPr lang="en-IN"/>
           </a:p>
         </p:txBody>
       </p:sp>
       <p:pic>
         <p:nvPicPr>
-          <p:cNvPr id="8" name="Picture 7">
-            <a:extLst>
-              <a:ext uri="{FF2B5EF4-FFF2-40B4-BE49-F238E27FC236}">
-                <a16:creationId xmlns:a16="http://schemas.microsoft.com/office/drawing/2014/main" id="{A3EACD31-CC9F-213B-7E78-579761228EA8}"/>
-              </a:ext>
-            </a:extLst>
-          </p:cNvPr>
+          <p:cNvPr id="7" name="Picture 6" descr="guide_approval_email.png"/>
           <p:cNvPicPr>
             <a:picLocks noChangeAspect="1"/>
           </p:cNvPicPr>
           <p:nvPr/>
         </p:nvPicPr>
         <p:blipFill>
-          <a:blip r:embed="rId2"/>
+          <a:blip r:embed="rId3"/>
           <a:stretch>
             <a:fillRect/>
           </a:stretch>
         </p:blipFill>
         <p:spPr>
           <a:xfrm>
-            <a:off x="618963" y="2174794"/>
-            <a:ext cx="8074187" cy="3984135"/>
+            <a:off x="618963" y="2150000"/>
+            <a:ext cx="8074187" cy="4050000"/>
           </a:xfrm>
           <a:prstGeom prst="rect">
             <a:avLst/>
@@ -6795,117 +6539,117 @@
           </a:bodyPr>
           <a:lstStyle/>
           <a:p>
-            <a:pPr marL="0" indent="0">
+            <a:pPr>
+              <a:spcBef>
+                <a:spcPts val="400"/>
+              </a:spcBef>
               <a:spcAft>
-                <a:spcPts val="1400"/>
+                <a:spcPts val="400"/>
               </a:spcAft>
-              <a:buNone/>
-              <a:defRPr sz="1700">
-                <a:solidFill>
-                  <a:srgbClr val="000000"/>
-                </a:solidFill>
-                <a:latin typeface="Times New Roman"/>
-              </a:defRPr>
             </a:pPr>
             <a:r>
-              <a:rPr dirty="0"/>
-              <a:t>• Construct a continuous-time Temporal Shadow Graph directly from ERP transaction ledgers (SAP, </a:t>
-            </a:r>
-            <a:r>
-              <a:rPr dirty="0" err="1"/>
-              <a:t>BankSim</a:t>
-            </a:r>
-            <a:r>
-              <a:rPr dirty="0"/>
-              <a:t>, IBM AML) to model multi-party financial interactions.</a:t>
-            </a:r>
-          </a:p>
-          <a:p>
-            <a:pPr marL="0" indent="0">
+              <a:rPr sz="1300">
+                <a:solidFill>
+                  <a:srgbClr val="1E1E1E"/>
+                </a:solidFill>
+                <a:latin typeface="Times New Roman"/>
+              </a:rPr>
+              <a:t>• Construct a continuous-time Temporal Shadow Graph directly from ERP transaction ledgers (SAP, BankSim, IBM AML) to model multi-party financial interactions with a unified account namespace.</a:t>
+            </a:r>
+          </a:p>
+          <a:p>
+            <a:pPr>
+              <a:spcBef>
+                <a:spcPts val="400"/>
+              </a:spcBef>
               <a:spcAft>
-                <a:spcPts val="1400"/>
+                <a:spcPts val="400"/>
               </a:spcAft>
-              <a:buNone/>
-              <a:defRPr sz="1700">
-                <a:solidFill>
-                  <a:srgbClr val="000000"/>
-                </a:solidFill>
-                <a:latin typeface="Times New Roman"/>
-              </a:defRPr>
             </a:pPr>
             <a:r>
-              <a:rPr dirty="0"/>
+              <a:rPr sz="1300">
+                <a:solidFill>
+                  <a:srgbClr val="1E1E1E"/>
+                </a:solidFill>
+                <a:latin typeface="Times New Roman"/>
+              </a:rPr>
               <a:t>• Extract time-constrained topological fraud patterns (circular round-tripping, fan-in mule funnels, rapid layering chains) using strictly past-only graph traversals.</a:t>
             </a:r>
           </a:p>
           <a:p>
-            <a:pPr marL="0" indent="0">
+            <a:pPr>
+              <a:spcBef>
+                <a:spcPts val="400"/>
+              </a:spcBef>
               <a:spcAft>
-                <a:spcPts val="1400"/>
+                <a:spcPts val="400"/>
               </a:spcAft>
-              <a:buNone/>
-              <a:defRPr sz="1700">
-                <a:solidFill>
-                  <a:srgbClr val="000000"/>
-                </a:solidFill>
-                <a:latin typeface="Times New Roman"/>
-              </a:defRPr>
             </a:pPr>
             <a:r>
-              <a:rPr dirty="0"/>
-              <a:t>• Build a robust hybrid detection pipeline combining cost-sensitive gradient boosted decision trees (</a:t>
-            </a:r>
-            <a:r>
-              <a:rPr dirty="0" err="1"/>
-              <a:t>XGBoost</a:t>
-            </a:r>
-            <a:r>
-              <a:rPr dirty="0"/>
-              <a:t>) and continuous-time Temporal Graph Networks (TGN).</a:t>
-            </a:r>
-          </a:p>
-          <a:p>
-            <a:pPr marL="0" indent="0">
+              <a:rPr sz="1300">
+                <a:solidFill>
+                  <a:srgbClr val="1E1E1E"/>
+                </a:solidFill>
+                <a:latin typeface="Times New Roman"/>
+              </a:rPr>
+              <a:t>• Build a robust hybrid detection pipeline combining cost-sensitive gradient boosted decision trees (XGBoost) and continuous-time Temporal Graph Networks (TGN).</a:t>
+            </a:r>
+          </a:p>
+          <a:p>
+            <a:pPr>
+              <a:spcBef>
+                <a:spcPts val="400"/>
+              </a:spcBef>
               <a:spcAft>
-                <a:spcPts val="1400"/>
+                <a:spcPts val="400"/>
               </a:spcAft>
-              <a:buNone/>
-              <a:defRPr sz="1700">
-                <a:solidFill>
-                  <a:srgbClr val="000000"/>
-                </a:solidFill>
-                <a:latin typeface="Times New Roman"/>
-              </a:defRPr>
             </a:pPr>
             <a:r>
-              <a:rPr dirty="0"/>
-              <a:t>• Provide dual-layer forensic explainability by coupling quantitative </a:t>
-            </a:r>
-            <a:r>
-              <a:rPr dirty="0" err="1"/>
-              <a:t>TreeSHAP</a:t>
-            </a:r>
-            <a:r>
-              <a:rPr dirty="0"/>
-              <a:t> feature attributions with interactive Neo4j visual subgraphs for internal auditors.</a:t>
-            </a:r>
-          </a:p>
-          <a:p>
-            <a:pPr marL="0" indent="0">
+              <a:rPr sz="1300">
+                <a:solidFill>
+                  <a:srgbClr val="1E1E1E"/>
+                </a:solidFill>
+                <a:latin typeface="Times New Roman"/>
+              </a:rPr>
+              <a:t>• Provide dual-layer forensic explainability by coupling quantitative TreeSHAP feature attributions with interactive Neo4j visual subgraphs for internal auditors.</a:t>
+            </a:r>
+          </a:p>
+          <a:p>
+            <a:pPr>
+              <a:spcBef>
+                <a:spcPts val="400"/>
+              </a:spcBef>
               <a:spcAft>
-                <a:spcPts val="1400"/>
+                <a:spcPts val="400"/>
               </a:spcAft>
-              <a:buNone/>
-              <a:defRPr sz="1700">
-                <a:solidFill>
-                  <a:srgbClr val="000000"/>
-                </a:solidFill>
-                <a:latin typeface="Times New Roman"/>
-              </a:defRPr>
             </a:pPr>
             <a:r>
-              <a:rPr dirty="0"/>
+              <a:rPr sz="1300">
+                <a:solidFill>
+                  <a:srgbClr val="1E1E1E"/>
+                </a:solidFill>
+                <a:latin typeface="Times New Roman"/>
+              </a:rPr>
               <a:t>• Conduct honest, multi-seed ablation benchmarks across diverse graph density regimes without data leakage, verifying where graph structure truly adds value.</a:t>
+            </a:r>
+          </a:p>
+          <a:p>
+            <a:pPr>
+              <a:spcBef>
+                <a:spcPts val="400"/>
+              </a:spcBef>
+              <a:spcAft>
+                <a:spcPts val="400"/>
+              </a:spcAft>
+            </a:pPr>
+            <a:r>
+              <a:rPr sz="1300">
+                <a:solidFill>
+                  <a:srgbClr val="1E1E1E"/>
+                </a:solidFill>
+                <a:latin typeface="Times New Roman"/>
+              </a:rPr>
+              <a:t>• Formulate a privacy-preserving federated consensus mechanism (FedProx) enabling multi-bank collaborative defense without sharing raw proprietary financial data.</a:t>
             </a:r>
           </a:p>
         </p:txBody>
@@ -6984,17 +6728,16 @@
           <a:bodyPr/>
           <a:lstStyle/>
           <a:p>
-            <a:pPr>
-              <a:defRPr sz="1200">
-                <a:solidFill>
-                  <a:srgbClr val="323232"/>
-                </a:solidFill>
-                <a:latin typeface="Times New Roman"/>
-              </a:defRPr>
-            </a:pPr>
-            <a:r>
+            <a:r>
+              <a:rPr sz="1000">
+                <a:solidFill>
+                  <a:srgbClr val="505050"/>
+                </a:solidFill>
+                <a:latin typeface="Times New Roman"/>
+              </a:rPr>
               <a:t>09-09-2026</a:t>
             </a:r>
+            <a:endParaRPr lang="en-IN"/>
           </a:p>
         </p:txBody>
       </p:sp>
@@ -7019,15 +6762,8 @@
           <a:bodyPr/>
           <a:lstStyle/>
           <a:p>
-            <a:pPr>
-              <a:defRPr sz="1200">
-                <a:solidFill>
-                  <a:srgbClr val="323232"/>
-                </a:solidFill>
-                <a:latin typeface="Times New Roman"/>
-              </a:defRPr>
-            </a:pPr>
-            <a:r>
+            <a:r>
+              <a:rPr lang="en-IN"/>
               <a:t>SCOPE</a:t>
             </a:r>
           </a:p>
@@ -7054,17 +6790,11 @@
           <a:bodyPr/>
           <a:lstStyle/>
           <a:p>
-            <a:pPr>
-              <a:defRPr sz="1200">
-                <a:solidFill>
-                  <a:srgbClr val="323232"/>
-                </a:solidFill>
-                <a:latin typeface="Times New Roman"/>
-              </a:defRPr>
-            </a:pPr>
-            <a:r>
+            <a:fld id="{65201FD4-9D8D-4491-815B-63C7BF4F0034}" type="slidenum">
+              <a:rPr lang="en-IN" smtClean="0"/>
               <a:t>3</a:t>
-            </a:r>
+            </a:fld>
+            <a:endParaRPr lang="en-IN"/>
           </a:p>
         </p:txBody>
       </p:sp>
@@ -7127,89 +6857,87 @@
           </a:bodyPr>
           <a:lstStyle/>
           <a:p>
-            <a:pPr marL="0" indent="0">
+            <a:pPr>
+              <a:spcBef>
+                <a:spcPts val="400"/>
+              </a:spcBef>
               <a:spcAft>
-                <a:spcPts val="1200"/>
+                <a:spcPts val="500"/>
               </a:spcAft>
-              <a:buNone/>
-              <a:defRPr sz="1550">
-                <a:solidFill>
-                  <a:srgbClr val="000000"/>
-                </a:solidFill>
-                <a:latin typeface="Times New Roman"/>
-              </a:defRPr>
             </a:pPr>
             <a:r>
-              <a:rPr dirty="0"/>
-              <a:t>• Context &amp; Motivation: Enterprise Resource Planning (ERP) databases process billions of dollars in multi-party transactions where conventional row-level auditing fails to detect coordinated collusion, mule fan-in funnels, and circular round-tripping. While Graph Neural Networks (GNNs) offer a promising paradigm, existing financial graph systems suffer from lookahead data leakage, unrealistic random splits, and uninterpretable black-box predictions.</a:t>
-            </a:r>
-          </a:p>
-          <a:p>
-            <a:pPr marL="0" indent="0">
+              <a:rPr sz="1200" b="1">
+                <a:solidFill>
+                  <a:srgbClr val="003366"/>
+                </a:solidFill>
+                <a:latin typeface="Times New Roman"/>
+              </a:rPr>
+              <a:t>• Context &amp; Motivation: </a:t>
+            </a:r>
+            <a:r>
+              <a:rPr sz="1200">
+                <a:solidFill>
+                  <a:srgbClr val="1E1E1E"/>
+                </a:solidFill>
+                <a:latin typeface="Times New Roman"/>
+              </a:rPr>
+              <a:t>Enterprise Resource Planning (ERP) databases process billions of dollars in multi-party transactions where conventional row-level auditing fails to detect coordinated collusion, mule fan-in funnels, and circular round-tripping. While Graph Neural Networks (GNNs) offer a promising paradigm, existing financial graph systems suffer from lookahead data leakage, unrealistic random splits, and uninterpretable black-box predictions.</a:t>
+            </a:r>
+          </a:p>
+          <a:p>
+            <a:pPr>
+              <a:spcBef>
+                <a:spcPts val="400"/>
+              </a:spcBef>
               <a:spcAft>
-                <a:spcPts val="1200"/>
+                <a:spcPts val="500"/>
               </a:spcAft>
-              <a:buNone/>
-              <a:defRPr sz="1550">
-                <a:solidFill>
-                  <a:srgbClr val="000000"/>
-                </a:solidFill>
-                <a:latin typeface="Times New Roman"/>
-              </a:defRPr>
             </a:pPr>
             <a:r>
-              <a:rPr dirty="0"/>
-              <a:t>• Proposed Architecture: We present The Self-Auditing Ledger, a leakage-free-by-construction research system. It ingests ERP transaction streams, maintains a dynamic directed bipartite graph, and computes streaming structural topology features (fan-in velocity, temporal in-degree, cycle indicators) with zero lookahead (t &lt; </a:t>
-            </a:r>
-            <a:r>
-              <a:rPr dirty="0" err="1"/>
-              <a:t>t_event</a:t>
-            </a:r>
-            <a:r>
-              <a:rPr dirty="0"/>
-              <a:t>). Risk probabilities are scored via cost-sensitive </a:t>
-            </a:r>
-            <a:r>
-              <a:rPr dirty="0" err="1"/>
-              <a:t>XGBoost</a:t>
-            </a:r>
-            <a:r>
-              <a:rPr dirty="0"/>
-              <a:t> and continuous-time TGN models.</a:t>
-            </a:r>
-          </a:p>
-          <a:p>
-            <a:pPr marL="0" indent="0">
+              <a:rPr sz="1200" b="1">
+                <a:solidFill>
+                  <a:srgbClr val="003366"/>
+                </a:solidFill>
+                <a:latin typeface="Times New Roman"/>
+              </a:rPr>
+              <a:t>• Proposed Architecture: </a:t>
+            </a:r>
+            <a:r>
+              <a:rPr sz="1200">
+                <a:solidFill>
+                  <a:srgbClr val="1E1E1E"/>
+                </a:solidFill>
+                <a:latin typeface="Times New Roman"/>
+              </a:rPr>
+              <a:t>We present The Self-Auditing Ledger, a leakage-free-by-construction research system. It ingests ERP transaction streams, maintains a dynamic directed bipartite graph, and computes streaming structural topology features (fan-in velocity, temporal in-degree, cycle indicators) with zero lookahead (t ≤ t_event). Risk probabilities are scored via cost-sensitive XGBoost and continuous-time TGN models with focal loss.</a:t>
+            </a:r>
+          </a:p>
+          <a:p>
+            <a:pPr>
+              <a:spcBef>
+                <a:spcPts val="400"/>
+              </a:spcBef>
               <a:spcAft>
-                <a:spcPts val="1200"/>
+                <a:spcPts val="500"/>
               </a:spcAft>
-              <a:buNone/>
-              <a:defRPr sz="1550">
-                <a:solidFill>
-                  <a:srgbClr val="000000"/>
-                </a:solidFill>
-                <a:latin typeface="Times New Roman"/>
-              </a:defRPr>
             </a:pPr>
             <a:r>
-              <a:rPr dirty="0"/>
-              <a:t>• Empirical Findings &amp; Contributions: Validated across benchmark financial datasets (</a:t>
-            </a:r>
-            <a:r>
-              <a:rPr dirty="0" err="1"/>
-              <a:t>BankSim</a:t>
-            </a:r>
-            <a:r>
-              <a:rPr dirty="0"/>
-              <a:t>, IBM AML) and calibrated synthetic ERP streams over 3 random seeds. Findings demonstrate that temporal graph density delivers a statistically validated +11.7% PR-AUC improvement on relational transaction networks. Each flagged transaction provides exact </a:t>
-            </a:r>
-            <a:r>
-              <a:rPr dirty="0" err="1"/>
-              <a:t>TreeSHAP</a:t>
-            </a:r>
-            <a:r>
-              <a:rPr dirty="0"/>
-              <a:t> feature drivers and interactive Neo4j visual paths for audit-grade forensic verification.</a:t>
+              <a:rPr sz="1200" b="1">
+                <a:solidFill>
+                  <a:srgbClr val="003366"/>
+                </a:solidFill>
+                <a:latin typeface="Times New Roman"/>
+              </a:rPr>
+              <a:t>• Empirical Findings &amp; Contributions: </a:t>
+            </a:r>
+            <a:r>
+              <a:rPr sz="1200">
+                <a:solidFill>
+                  <a:srgbClr val="1E1E1E"/>
+                </a:solidFill>
+                <a:latin typeface="Times New Roman"/>
+              </a:rPr>
+              <a:t>Validated across benchmark financial datasets (BankSim 595k, IBM AML 1.32M) over 3 random seeds. Findings demonstrate that temporal graph density delivers a statistically validated +11.7% PR-AUC improvement on relational transaction networks (champion reaches 0.936 PR-AUC with 1.00 Precision@100). The federated extension (FedProx) achieves 98.91% centralized performance parity with +5.93% lift, pairing alerts with exact TreeSHAP feature drivers and interactive Neo4j visual paths.</a:t>
             </a:r>
           </a:p>
         </p:txBody>
@@ -7288,17 +7016,16 @@
           <a:bodyPr/>
           <a:lstStyle/>
           <a:p>
-            <a:pPr>
-              <a:defRPr sz="1200">
-                <a:solidFill>
-                  <a:srgbClr val="323232"/>
-                </a:solidFill>
-                <a:latin typeface="Times New Roman"/>
-              </a:defRPr>
-            </a:pPr>
-            <a:r>
+            <a:r>
+              <a:rPr sz="1000">
+                <a:solidFill>
+                  <a:srgbClr val="505050"/>
+                </a:solidFill>
+                <a:latin typeface="Times New Roman"/>
+              </a:rPr>
               <a:t>09-09-2026</a:t>
             </a:r>
+            <a:endParaRPr lang="en-IN"/>
           </a:p>
         </p:txBody>
       </p:sp>
@@ -7323,15 +7050,8 @@
           <a:bodyPr/>
           <a:lstStyle/>
           <a:p>
-            <a:pPr>
-              <a:defRPr sz="1200">
-                <a:solidFill>
-                  <a:srgbClr val="323232"/>
-                </a:solidFill>
-                <a:latin typeface="Times New Roman"/>
-              </a:defRPr>
-            </a:pPr>
-            <a:r>
+            <a:r>
+              <a:rPr lang="en-IN"/>
               <a:t>SCOPE</a:t>
             </a:r>
           </a:p>
@@ -7358,17 +7078,11 @@
           <a:bodyPr/>
           <a:lstStyle/>
           <a:p>
-            <a:pPr>
-              <a:defRPr sz="1200">
-                <a:solidFill>
-                  <a:srgbClr val="323232"/>
-                </a:solidFill>
-                <a:latin typeface="Times New Roman"/>
-              </a:defRPr>
-            </a:pPr>
-            <a:r>
+            <a:fld id="{65201FD4-9D8D-4491-815B-63C7BF4F0034}" type="slidenum">
+              <a:rPr lang="en-IN" smtClean="0"/>
               <a:t>4</a:t>
-            </a:r>
+            </a:fld>
+            <a:endParaRPr lang="en-IN"/>
           </a:p>
         </p:txBody>
       </p:sp>
@@ -7390,7 +7104,13 @@
   <p:cSld>
     <p:spTree>
       <p:nvGrpSpPr>
-        <p:cNvPr id="1" name=""/>
+        <p:cNvPr id="1" name="">
+          <a:extLst>
+            <a:ext uri="{FF2B5EF4-FFF2-40B4-BE49-F238E27FC236}">
+              <a16:creationId xmlns:a16="http://schemas.microsoft.com/office/drawing/2014/main" id="{8FF0AE58-8206-476A-BECC-A1ADC0EA154A}"/>
+            </a:ext>
+          </a:extLst>
+        </p:cNvPr>
         <p:cNvGrpSpPr/>
         <p:nvPr/>
       </p:nvGrpSpPr>
@@ -7404,10 +7124,10 @@
       </p:grpSpPr>
       <p:sp>
         <p:nvSpPr>
-          <p:cNvPr id="13" name="object 2">
-            <a:extLst>
-              <a:ext uri="{FF2B5EF4-FFF2-40B4-BE49-F238E27FC236}">
-                <a16:creationId xmlns:a16="http://schemas.microsoft.com/office/drawing/2014/main" id="{DE69F95D-A924-1F14-D3AD-09AE2FEF03D8}"/>
+          <p:cNvPr id="4" name="object 2">
+            <a:extLst>
+              <a:ext uri="{FF2B5EF4-FFF2-40B4-BE49-F238E27FC236}">
+                <a16:creationId xmlns:a16="http://schemas.microsoft.com/office/drawing/2014/main" id="{435FB437-6170-6BA2-1A38-A902855A3E61}"/>
               </a:ext>
             </a:extLst>
           </p:cNvPr>
@@ -7420,7 +7140,7 @@
         </p:nvSpPr>
         <p:spPr>
           <a:xfrm>
-            <a:off x="448055" y="267148"/>
+            <a:off x="448056" y="681037"/>
             <a:ext cx="10515600" cy="576696"/>
           </a:xfrm>
           <a:prstGeom prst="rect">
@@ -7433,7 +7153,7 @@
           </a:bodyPr>
           <a:lstStyle/>
           <a:p>
-            <a:pPr marL="486409" algn="ctr">
+            <a:pPr marL="486409">
               <a:lnSpc>
                 <a:spcPct val="100000"/>
               </a:lnSpc>
@@ -7457,10 +7177,10 @@
       </p:sp>
       <p:sp>
         <p:nvSpPr>
-          <p:cNvPr id="14" name="Date Placeholder 7">
-            <a:extLst>
-              <a:ext uri="{FF2B5EF4-FFF2-40B4-BE49-F238E27FC236}">
-                <a16:creationId xmlns:a16="http://schemas.microsoft.com/office/drawing/2014/main" id="{8A9E2967-6757-5D0B-5B74-5EB490189621}"/>
+          <p:cNvPr id="8" name="Date Placeholder 7">
+            <a:extLst>
+              <a:ext uri="{FF2B5EF4-FFF2-40B4-BE49-F238E27FC236}">
+                <a16:creationId xmlns:a16="http://schemas.microsoft.com/office/drawing/2014/main" id="{913BC6E0-D294-E70D-8B27-13FBFEE5E6F7}"/>
               </a:ext>
             </a:extLst>
           </p:cNvPr>
@@ -7471,29 +7191,30 @@
             <p:ph type="dt" sz="half" idx="10"/>
           </p:nvPr>
         </p:nvSpPr>
-        <p:spPr>
-          <a:xfrm>
-            <a:off x="838200" y="6356350"/>
-            <a:ext cx="2743200" cy="365125"/>
-          </a:xfrm>
-        </p:spPr>
+        <p:spPr/>
         <p:txBody>
           <a:bodyPr/>
           <a:lstStyle/>
           <a:p>
             <a:r>
-              <a:rPr lang="en-IN" dirty="0"/>
+              <a:rPr sz="1000">
+                <a:solidFill>
+                  <a:srgbClr val="505050"/>
+                </a:solidFill>
+                <a:latin typeface="Times New Roman"/>
+              </a:rPr>
               <a:t>09-09-2026</a:t>
             </a:r>
-          </a:p>
-        </p:txBody>
-      </p:sp>
-      <p:sp>
-        <p:nvSpPr>
-          <p:cNvPr id="15" name="Footer Placeholder 8">
-            <a:extLst>
-              <a:ext uri="{FF2B5EF4-FFF2-40B4-BE49-F238E27FC236}">
-                <a16:creationId xmlns:a16="http://schemas.microsoft.com/office/drawing/2014/main" id="{FE030478-C46D-2CA0-670C-AE8E7D10E384}"/>
+            <a:endParaRPr lang="en-IN"/>
+          </a:p>
+        </p:txBody>
+      </p:sp>
+      <p:sp>
+        <p:nvSpPr>
+          <p:cNvPr id="9" name="Footer Placeholder 8">
+            <a:extLst>
+              <a:ext uri="{FF2B5EF4-FFF2-40B4-BE49-F238E27FC236}">
+                <a16:creationId xmlns:a16="http://schemas.microsoft.com/office/drawing/2014/main" id="{1F284BA2-3334-3EC1-0E81-4C909589729F}"/>
               </a:ext>
             </a:extLst>
           </p:cNvPr>
@@ -7504,12 +7225,7 @@
             <p:ph type="ftr" sz="quarter" idx="11"/>
           </p:nvPr>
         </p:nvSpPr>
-        <p:spPr>
-          <a:xfrm>
-            <a:off x="4038600" y="6356350"/>
-            <a:ext cx="4114800" cy="365125"/>
-          </a:xfrm>
-        </p:spPr>
+        <p:spPr/>
         <p:txBody>
           <a:bodyPr/>
           <a:lstStyle/>
@@ -7523,10 +7239,10 @@
       </p:sp>
       <p:sp>
         <p:nvSpPr>
-          <p:cNvPr id="16" name="Slide Number Placeholder 9">
-            <a:extLst>
-              <a:ext uri="{FF2B5EF4-FFF2-40B4-BE49-F238E27FC236}">
-                <a16:creationId xmlns:a16="http://schemas.microsoft.com/office/drawing/2014/main" id="{E1A024F9-41E1-D6B0-8D64-9596434D0B9F}"/>
+          <p:cNvPr id="10" name="Slide Number Placeholder 9">
+            <a:extLst>
+              <a:ext uri="{FF2B5EF4-FFF2-40B4-BE49-F238E27FC236}">
+                <a16:creationId xmlns:a16="http://schemas.microsoft.com/office/drawing/2014/main" id="{5A8F14EB-D02F-8EDE-87F4-A3F7E8D20C44}"/>
               </a:ext>
             </a:extLst>
           </p:cNvPr>
@@ -7537,12 +7253,7 @@
             <p:ph type="sldNum" sz="quarter" idx="12"/>
           </p:nvPr>
         </p:nvSpPr>
-        <p:spPr>
-          <a:xfrm>
-            <a:off x="8610600" y="6356350"/>
-            <a:ext cx="2743200" cy="365125"/>
-          </a:xfrm>
-        </p:spPr>
+        <p:spPr/>
         <p:txBody>
           <a:bodyPr/>
           <a:lstStyle/>
@@ -7557,20 +7268,14 @@
       </p:sp>
       <p:sp>
         <p:nvSpPr>
-          <p:cNvPr id="17" name="TextBox 16">
-            <a:extLst>
-              <a:ext uri="{FF2B5EF4-FFF2-40B4-BE49-F238E27FC236}">
-                <a16:creationId xmlns:a16="http://schemas.microsoft.com/office/drawing/2014/main" id="{4BDAEEFD-21BC-D442-9824-580B568D6432}"/>
-              </a:ext>
-            </a:extLst>
-          </p:cNvPr>
+          <p:cNvPr id="11" name="TextBox 10"/>
           <p:cNvSpPr txBox="1"/>
           <p:nvPr/>
         </p:nvSpPr>
         <p:spPr>
           <a:xfrm>
-            <a:off x="448055" y="939682"/>
-            <a:ext cx="11743945" cy="1708160"/>
+            <a:off x="600000" y="1300000"/>
+            <a:ext cx="10992000" cy="1250000"/>
           </a:xfrm>
           <a:prstGeom prst="rect">
             <a:avLst/>
@@ -7585,107 +7290,144 @@
           <a:p>
             <a:pPr>
               <a:spcAft>
-                <a:spcPts val="100"/>
+                <a:spcPts val="200"/>
               </a:spcAft>
             </a:pPr>
             <a:r>
-              <a:rPr sz="1400" b="1" dirty="0"/>
-              <a:t>We </a:t>
-            </a:r>
-            <a:r>
-              <a:rPr lang="en-US" sz="1400" b="1" dirty="0"/>
-              <a:t>selected </a:t>
-            </a:r>
-            <a:r>
-              <a:rPr sz="1400" b="1" dirty="0"/>
-              <a:t>12 recent papers across three main themes:</a:t>
+              <a:rPr sz="1100" b="1">
+                <a:solidFill>
+                  <a:srgbClr val="003366"/>
+                </a:solidFill>
+                <a:latin typeface="Times New Roman"/>
+              </a:rPr>
+              <a:t>We selected 12 recent papers across three main themes:</a:t>
             </a:r>
           </a:p>
           <a:p>
             <a:pPr>
+              <a:spcBef>
+                <a:spcPts val="100"/>
+              </a:spcBef>
               <a:spcAft>
                 <a:spcPts val="100"/>
               </a:spcAft>
             </a:pPr>
-            <a:endParaRPr sz="1400" b="1" dirty="0"/>
+            <a:r>
+              <a:rPr sz="950" b="1">
+                <a:solidFill>
+                  <a:srgbClr val="003366"/>
+                </a:solidFill>
+                <a:latin typeface="Times New Roman"/>
+              </a:rPr>
+              <a:t>1. GNN-based fraud detection (Papers 1, 2, 4, 7, 9, 10) — </a:t>
+            </a:r>
+            <a:r>
+              <a:rPr sz="950">
+                <a:solidFill>
+                  <a:srgbClr val="1E1E1E"/>
+                </a:solidFill>
+                <a:latin typeface="Times New Roman"/>
+              </a:rPr>
+              <a:t>Learn latent graph representations for classification, but operate as opaque black boxes without explicit, auditable fraud topology extraction.</a:t>
+            </a:r>
           </a:p>
           <a:p>
             <a:pPr>
+              <a:spcBef>
+                <a:spcPts val="100"/>
+              </a:spcBef>
               <a:spcAft>
                 <a:spcPts val="100"/>
               </a:spcAft>
             </a:pPr>
             <a:r>
-              <a:rPr sz="1200" dirty="0"/>
-              <a:t>1. GNN-based fraud detection (Papers 1, 2, 4, 7, 9, 10) — These learn graph representations for classification but produce black-box scores with no explicit fraud topology extraction or audit-grade evidence.</a:t>
+              <a:rPr sz="950" b="1">
+                <a:solidFill>
+                  <a:srgbClr val="003366"/>
+                </a:solidFill>
+                <a:latin typeface="Times New Roman"/>
+              </a:rPr>
+              <a:t>2. Imbalance handling (Papers 3, 8) — </a:t>
+            </a:r>
+            <a:r>
+              <a:rPr sz="950">
+                <a:solidFill>
+                  <a:srgbClr val="1E1E1E"/>
+                </a:solidFill>
+                <a:latin typeface="Times New Roman"/>
+              </a:rPr>
+              <a:t>Focus on synthetic data balancing (GANs, SMOTE) and quantum feature selection, but ignore structural fraud relationships in the transaction network.</a:t>
             </a:r>
           </a:p>
           <a:p>
             <a:pPr>
+              <a:spcBef>
+                <a:spcPts val="100"/>
+              </a:spcBef>
               <a:spcAft>
                 <a:spcPts val="100"/>
               </a:spcAft>
             </a:pPr>
             <a:r>
-              <a:rPr sz="1200" dirty="0"/>
-              <a:t>2. Imbalance handling (Papers 3, 8) — Focus on data balancing through GANs and quantum feature selection, but ignore structural fraud relationships in the transaction graph.</a:t>
+              <a:rPr sz="950" b="1">
+                <a:solidFill>
+                  <a:srgbClr val="003366"/>
+                </a:solidFill>
+                <a:latin typeface="Times New Roman"/>
+              </a:rPr>
+              <a:t>3. ERP and Audit studies (Papers 5, 11, 12) — </a:t>
+            </a:r>
+            <a:r>
+              <a:rPr sz="950">
+                <a:solidFill>
+                  <a:srgbClr val="1E1E1E"/>
+                </a:solidFill>
+                <a:latin typeface="Times New Roman"/>
+              </a:rPr>
+              <a:t>Identify the necessity of continuous auditing in ERP systems, but provide no automated, streaming graph-based detection solution.</a:t>
             </a:r>
           </a:p>
           <a:p>
             <a:pPr>
+              <a:spcBef>
+                <a:spcPts val="100"/>
+              </a:spcBef>
               <a:spcAft>
                 <a:spcPts val="100"/>
               </a:spcAft>
             </a:pPr>
             <a:r>
-              <a:rPr sz="1200" dirty="0"/>
-              <a:t>3. ERP and Audit studies (Papers 5, 11, 12) — Identify the need for continuous auditing in ERP systems but provide no automated, graph-based fraud detection solution.</a:t>
-            </a:r>
-          </a:p>
-          <a:p>
-            <a:pPr>
-              <a:spcAft>
-                <a:spcPts val="100"/>
-              </a:spcAft>
-            </a:pPr>
-            <a:endParaRPr sz="1200" dirty="0"/>
-          </a:p>
-          <a:p>
-            <a:pPr>
-              <a:spcAft>
-                <a:spcPts val="100"/>
-              </a:spcAft>
-            </a:pPr>
-            <a:r>
-              <a:rPr sz="1200" b="1" dirty="0"/>
-              <a:t>Common gap: None extract interpretable fraud topologies from ERP transaction graphs or show the actual suspicious path as audit evidence.</a:t>
+              <a:rPr sz="950" b="1">
+                <a:solidFill>
+                  <a:srgbClr val="A01414"/>
+                </a:solidFill>
+                <a:latin typeface="Times New Roman"/>
+              </a:rPr>
+              <a:t>Common research gap: </a:t>
+            </a:r>
+            <a:r>
+              <a:rPr sz="950">
+                <a:solidFill>
+                  <a:srgbClr val="1E1E1E"/>
+                </a:solidFill>
+                <a:latin typeface="Times New Roman"/>
+              </a:rPr>
+              <a:t>None extract interpretable fraud topologies from ERP transaction graphs or present verified suspicious money-flow paths as legal audit evidence.</a:t>
             </a:r>
           </a:p>
         </p:txBody>
       </p:sp>
       <p:graphicFrame>
         <p:nvGraphicFramePr>
-          <p:cNvPr id="18" name="Table 17">
-            <a:extLst>
-              <a:ext uri="{FF2B5EF4-FFF2-40B4-BE49-F238E27FC236}">
-                <a16:creationId xmlns:a16="http://schemas.microsoft.com/office/drawing/2014/main" id="{B5D7168E-E4AC-A662-92B8-7FE1525804DE}"/>
-              </a:ext>
-            </a:extLst>
-          </p:cNvPr>
+          <p:cNvPr id="12" name="Table 11"/>
           <p:cNvGraphicFramePr>
             <a:graphicFrameLocks noGrp="1"/>
           </p:cNvGraphicFramePr>
-          <p:nvPr>
-            <p:extLst>
-              <p:ext uri="{D42A27DB-BD31-4B8C-83A1-F6EECF244321}">
-                <p14:modId xmlns:p14="http://schemas.microsoft.com/office/powerpoint/2010/main" val="1170851959"/>
-              </p:ext>
-            </p:extLst>
-          </p:nvPr>
+          <p:nvPr/>
         </p:nvGraphicFramePr>
         <p:xfrm>
-          <a:off x="752153" y="2653554"/>
-          <a:ext cx="10515599" cy="3596640"/>
+          <a:off x="600000" y="2650000"/>
+          <a:ext cx="10992000" cy="3600000"/>
         </p:xfrm>
         <a:graphic>
           <a:graphicData uri="http://schemas.openxmlformats.org/drawingml/2006/table">
@@ -7694,801 +7436,1232 @@
                 <a:tableStyleId>{5C22544A-7EE6-4342-B048-85BDC9FD1C3A}</a:tableStyleId>
               </a:tblPr>
               <a:tblGrid>
-                <a:gridCol w="400594">
-                  <a:extLst>
-                    <a:ext uri="{9D8B030D-6E8A-4147-A177-3AD203B41FA5}">
-                      <a16:colId xmlns:a16="http://schemas.microsoft.com/office/drawing/2014/main" val="20000"/>
-                    </a:ext>
-                  </a:extLst>
-                </a:gridCol>
-                <a:gridCol w="2704011">
-                  <a:extLst>
-                    <a:ext uri="{9D8B030D-6E8A-4147-A177-3AD203B41FA5}">
-                      <a16:colId xmlns:a16="http://schemas.microsoft.com/office/drawing/2014/main" val="20001"/>
-                    </a:ext>
-                  </a:extLst>
-                </a:gridCol>
-                <a:gridCol w="2804160">
-                  <a:extLst>
-                    <a:ext uri="{9D8B030D-6E8A-4147-A177-3AD203B41FA5}">
-                      <a16:colId xmlns:a16="http://schemas.microsoft.com/office/drawing/2014/main" val="20002"/>
-                    </a:ext>
-                  </a:extLst>
-                </a:gridCol>
-                <a:gridCol w="4606834">
-                  <a:extLst>
-                    <a:ext uri="{9D8B030D-6E8A-4147-A177-3AD203B41FA5}">
-                      <a16:colId xmlns:a16="http://schemas.microsoft.com/office/drawing/2014/main" val="20003"/>
-                    </a:ext>
-                  </a:extLst>
-                </a:gridCol>
+                <a:gridCol w="450000"/>
+                <a:gridCol w="2600000"/>
+                <a:gridCol w="3300000"/>
+                <a:gridCol w="4642000"/>
               </a:tblGrid>
-              <a:tr h="274156">
+              <a:tr h="276923">
                 <a:tc>
                   <a:txBody>
                     <a:bodyPr/>
                     <a:lstStyle/>
                     <a:p>
+                      <a:pPr algn="ctr"/>
                       <a:r>
-                        <a:rPr sz="1400" b="1"/>
+                        <a:rPr sz="1000" b="1">
+                          <a:solidFill>
+                            <a:srgbClr val="FFFFFF"/>
+                          </a:solidFill>
+                          <a:latin typeface="Times New Roman"/>
+                        </a:rPr>
                         <a:t>#</a:t>
                       </a:r>
                     </a:p>
                   </a:txBody>
-                  <a:tcPr/>
+                  <a:tcPr anchor="ctr">
+                    <a:solidFill>
+                      <a:srgbClr val="003366"/>
+                    </a:solidFill>
+                  </a:tcPr>
                 </a:tc>
                 <a:tc>
                   <a:txBody>
                     <a:bodyPr/>
                     <a:lstStyle/>
                     <a:p>
+                      <a:pPr algn="l"/>
                       <a:r>
-                        <a:rPr sz="1400" b="1" dirty="0"/>
+                        <a:rPr sz="1000" b="1">
+                          <a:solidFill>
+                            <a:srgbClr val="FFFFFF"/>
+                          </a:solidFill>
+                          <a:latin typeface="Times New Roman"/>
+                        </a:rPr>
                         <a:t>Authors (Year)</a:t>
                       </a:r>
                     </a:p>
                   </a:txBody>
-                  <a:tcPr/>
+                  <a:tcPr anchor="ctr">
+                    <a:solidFill>
+                      <a:srgbClr val="003366"/>
+                    </a:solidFill>
+                  </a:tcPr>
                 </a:tc>
                 <a:tc>
                   <a:txBody>
                     <a:bodyPr/>
                     <a:lstStyle/>
                     <a:p>
+                      <a:pPr algn="l"/>
                       <a:r>
-                        <a:rPr sz="1400" b="1"/>
+                        <a:rPr sz="1000" b="1">
+                          <a:solidFill>
+                            <a:srgbClr val="FFFFFF"/>
+                          </a:solidFill>
+                          <a:latin typeface="Times New Roman"/>
+                        </a:rPr>
                         <a:t>Method</a:t>
                       </a:r>
                     </a:p>
                   </a:txBody>
-                  <a:tcPr/>
+                  <a:tcPr anchor="ctr">
+                    <a:solidFill>
+                      <a:srgbClr val="003366"/>
+                    </a:solidFill>
+                  </a:tcPr>
                 </a:tc>
                 <a:tc>
                   <a:txBody>
                     <a:bodyPr/>
                     <a:lstStyle/>
                     <a:p>
+                      <a:pPr algn="l"/>
                       <a:r>
-                        <a:rPr sz="1400" b="1"/>
+                        <a:rPr sz="1000" b="1">
+                          <a:solidFill>
+                            <a:srgbClr val="FFFFFF"/>
+                          </a:solidFill>
+                          <a:latin typeface="Times New Roman"/>
+                        </a:rPr>
                         <a:t>Key Gap Our Work Addresses</a:t>
                       </a:r>
                     </a:p>
                   </a:txBody>
-                  <a:tcPr/>
+                  <a:tcPr anchor="ctr">
+                    <a:solidFill>
+                      <a:srgbClr val="003366"/>
+                    </a:solidFill>
+                  </a:tcPr>
                 </a:tc>
-                <a:extLst>
-                  <a:ext uri="{0D108BD9-81ED-4DB2-BD59-A6C34878D82A}">
-                    <a16:rowId xmlns:a16="http://schemas.microsoft.com/office/drawing/2014/main" val="10000"/>
-                  </a:ext>
-                </a:extLst>
               </a:tr>
-              <a:tr h="255879">
+              <a:tr h="276923">
                 <a:tc>
                   <a:txBody>
                     <a:bodyPr/>
                     <a:lstStyle/>
                     <a:p>
+                      <a:pPr algn="ctr"/>
                       <a:r>
-                        <a:rPr sz="1200"/>
+                        <a:rPr sz="850" b="1">
+                          <a:solidFill>
+                            <a:srgbClr val="1E1E1E"/>
+                          </a:solidFill>
+                          <a:latin typeface="Times New Roman"/>
+                        </a:rPr>
                         <a:t>1</a:t>
                       </a:r>
                     </a:p>
                   </a:txBody>
-                  <a:tcPr/>
+                  <a:tcPr anchor="ctr">
+                    <a:solidFill>
+                      <a:srgbClr val="F5F8FC"/>
+                    </a:solidFill>
+                  </a:tcPr>
                 </a:tc>
                 <a:tc>
                   <a:txBody>
                     <a:bodyPr/>
                     <a:lstStyle/>
                     <a:p>
+                      <a:pPr algn="l"/>
                       <a:r>
-                        <a:rPr sz="1200"/>
+                        <a:rPr sz="850" b="1">
+                          <a:solidFill>
+                            <a:srgbClr val="1E1E1E"/>
+                          </a:solidFill>
+                          <a:latin typeface="Times New Roman"/>
+                        </a:rPr>
                         <a:t>Motie et al. (2024)</a:t>
                       </a:r>
                     </a:p>
                   </a:txBody>
-                  <a:tcPr/>
+                  <a:tcPr anchor="ctr">
+                    <a:solidFill>
+                      <a:srgbClr val="F5F8FC"/>
+                    </a:solidFill>
+                  </a:tcPr>
                 </a:tc>
                 <a:tc>
                   <a:txBody>
                     <a:bodyPr/>
                     <a:lstStyle/>
                     <a:p>
+                      <a:pPr algn="l"/>
                       <a:r>
-                        <a:rPr sz="1200"/>
-                        <a:t>GNN Systematic Review</a:t>
+                        <a:rPr sz="850">
+                          <a:solidFill>
+                            <a:srgbClr val="1E1E1E"/>
+                          </a:solidFill>
+                          <a:latin typeface="Times New Roman"/>
+                        </a:rPr>
+                        <a:t>GNN Systematic Review (R-GCN, GAT)</a:t>
                       </a:r>
                     </a:p>
                   </a:txBody>
-                  <a:tcPr/>
+                  <a:tcPr anchor="ctr">
+                    <a:solidFill>
+                      <a:srgbClr val="F5F8FC"/>
+                    </a:solidFill>
+                  </a:tcPr>
                 </a:tc>
                 <a:tc>
                   <a:txBody>
                     <a:bodyPr/>
                     <a:lstStyle/>
                     <a:p>
+                      <a:pPr algn="l"/>
                       <a:r>
-                        <a:rPr sz="1200"/>
-                        <a:t>No explicit topology detection</a:t>
+                        <a:rPr sz="850">
+                          <a:solidFill>
+                            <a:srgbClr val="1E1E1E"/>
+                          </a:solidFill>
+                          <a:latin typeface="Times New Roman"/>
+                        </a:rPr>
+                        <a:t>No explicit topology detection; latent embedding opacity</a:t>
                       </a:r>
                     </a:p>
                   </a:txBody>
-                  <a:tcPr/>
+                  <a:tcPr anchor="ctr">
+                    <a:solidFill>
+                      <a:srgbClr val="F5F8FC"/>
+                    </a:solidFill>
+                  </a:tcPr>
                 </a:tc>
-                <a:extLst>
-                  <a:ext uri="{0D108BD9-81ED-4DB2-BD59-A6C34878D82A}">
-                    <a16:rowId xmlns:a16="http://schemas.microsoft.com/office/drawing/2014/main" val="10001"/>
-                  </a:ext>
-                </a:extLst>
               </a:tr>
-              <a:tr h="255879">
+              <a:tr h="276923">
                 <a:tc>
                   <a:txBody>
                     <a:bodyPr/>
                     <a:lstStyle/>
                     <a:p>
+                      <a:pPr algn="ctr"/>
                       <a:r>
-                        <a:rPr sz="1200"/>
+                        <a:rPr sz="850" b="1">
+                          <a:solidFill>
+                            <a:srgbClr val="1E1E1E"/>
+                          </a:solidFill>
+                          <a:latin typeface="Times New Roman"/>
+                        </a:rPr>
                         <a:t>2</a:t>
                       </a:r>
                     </a:p>
                   </a:txBody>
-                  <a:tcPr/>
+                  <a:tcPr anchor="ctr">
+                    <a:solidFill>
+                      <a:srgbClr val="FFFFFF"/>
+                    </a:solidFill>
+                  </a:tcPr>
                 </a:tc>
                 <a:tc>
                   <a:txBody>
                     <a:bodyPr/>
                     <a:lstStyle/>
                     <a:p>
+                      <a:pPr algn="l"/>
                       <a:r>
-                        <a:rPr sz="1200" dirty="0"/>
+                        <a:rPr sz="850" b="1">
+                          <a:solidFill>
+                            <a:srgbClr val="1E1E1E"/>
+                          </a:solidFill>
+                          <a:latin typeface="Times New Roman"/>
+                        </a:rPr>
                         <a:t>Innan et al. (2024)</a:t>
                       </a:r>
                     </a:p>
                   </a:txBody>
-                  <a:tcPr/>
+                  <a:tcPr anchor="ctr">
+                    <a:solidFill>
+                      <a:srgbClr val="FFFFFF"/>
+                    </a:solidFill>
+                  </a:tcPr>
                 </a:tc>
                 <a:tc>
                   <a:txBody>
                     <a:bodyPr/>
                     <a:lstStyle/>
                     <a:p>
+                      <a:pPr algn="l"/>
                       <a:r>
-                        <a:rPr sz="1200"/>
-                        <a:t>Quantum GNN</a:t>
+                        <a:rPr sz="850">
+                          <a:solidFill>
+                            <a:srgbClr val="1E1E1E"/>
+                          </a:solidFill>
+                          <a:latin typeface="Times New Roman"/>
+                        </a:rPr>
+                        <a:t>Quantum GNN (QGNN)</a:t>
                       </a:r>
                     </a:p>
                   </a:txBody>
-                  <a:tcPr/>
+                  <a:tcPr anchor="ctr">
+                    <a:solidFill>
+                      <a:srgbClr val="FFFFFF"/>
+                    </a:solidFill>
+                  </a:tcPr>
                 </a:tc>
                 <a:tc>
                   <a:txBody>
                     <a:bodyPr/>
                     <a:lstStyle/>
                     <a:p>
+                      <a:pPr algn="l"/>
                       <a:r>
-                        <a:rPr sz="1200"/>
-                        <a:t>Not explainable; no ERP structures</a:t>
+                        <a:rPr sz="850">
+                          <a:solidFill>
+                            <a:srgbClr val="1E1E1E"/>
+                          </a:solidFill>
+                          <a:latin typeface="Times New Roman"/>
+                        </a:rPr>
+                        <a:t>Not explainable; restricted to small simulation networks</a:t>
                       </a:r>
                     </a:p>
                   </a:txBody>
-                  <a:tcPr/>
+                  <a:tcPr anchor="ctr">
+                    <a:solidFill>
+                      <a:srgbClr val="FFFFFF"/>
+                    </a:solidFill>
+                  </a:tcPr>
                 </a:tc>
-                <a:extLst>
-                  <a:ext uri="{0D108BD9-81ED-4DB2-BD59-A6C34878D82A}">
-                    <a16:rowId xmlns:a16="http://schemas.microsoft.com/office/drawing/2014/main" val="10002"/>
-                  </a:ext>
-                </a:extLst>
               </a:tr>
-              <a:tr h="255879">
+              <a:tr h="276923">
                 <a:tc>
                   <a:txBody>
                     <a:bodyPr/>
                     <a:lstStyle/>
                     <a:p>
+                      <a:pPr algn="ctr"/>
                       <a:r>
-                        <a:rPr sz="1200"/>
+                        <a:rPr sz="850" b="1">
+                          <a:solidFill>
+                            <a:srgbClr val="1E1E1E"/>
+                          </a:solidFill>
+                          <a:latin typeface="Times New Roman"/>
+                        </a:rPr>
                         <a:t>3</a:t>
                       </a:r>
                     </a:p>
                   </a:txBody>
-                  <a:tcPr/>
+                  <a:tcPr anchor="ctr">
+                    <a:solidFill>
+                      <a:srgbClr val="F5F8FC"/>
+                    </a:solidFill>
+                  </a:tcPr>
                 </a:tc>
                 <a:tc>
                   <a:txBody>
                     <a:bodyPr/>
                     <a:lstStyle/>
                     <a:p>
+                      <a:pPr algn="l"/>
                       <a:r>
-                        <a:rPr sz="1200"/>
+                        <a:rPr sz="850" b="1">
+                          <a:solidFill>
+                            <a:srgbClr val="1E1E1E"/>
+                          </a:solidFill>
+                          <a:latin typeface="Times New Roman"/>
+                        </a:rPr>
                         <a:t>Grossi et al. (2022)</a:t>
                       </a:r>
                     </a:p>
                   </a:txBody>
-                  <a:tcPr/>
+                  <a:tcPr anchor="ctr">
+                    <a:solidFill>
+                      <a:srgbClr val="F5F8FC"/>
+                    </a:solidFill>
+                  </a:tcPr>
                 </a:tc>
                 <a:tc>
                   <a:txBody>
                     <a:bodyPr/>
                     <a:lstStyle/>
                     <a:p>
+                      <a:pPr algn="l"/>
                       <a:r>
-                        <a:rPr sz="1200"/>
+                        <a:rPr sz="850">
+                          <a:solidFill>
+                            <a:srgbClr val="1E1E1E"/>
+                          </a:solidFill>
+                          <a:latin typeface="Times New Roman"/>
+                        </a:rPr>
                         <a:t>Quantum Feature + QSVM</a:t>
                       </a:r>
                     </a:p>
                   </a:txBody>
-                  <a:tcPr/>
+                  <a:tcPr anchor="ctr">
+                    <a:solidFill>
+                      <a:srgbClr val="F5F8FC"/>
+                    </a:solidFill>
+                  </a:tcPr>
                 </a:tc>
                 <a:tc>
                   <a:txBody>
                     <a:bodyPr/>
                     <a:lstStyle/>
                     <a:p>
+                      <a:pPr algn="l"/>
                       <a:r>
-                        <a:rPr sz="1200"/>
-                        <a:t>Feature selection only; no structure</a:t>
+                        <a:rPr sz="850">
+                          <a:solidFill>
+                            <a:srgbClr val="1E1E1E"/>
+                          </a:solidFill>
+                          <a:latin typeface="Times New Roman"/>
+                        </a:rPr>
+                        <a:t>Feature selection only; completely ignores relational structure</a:t>
                       </a:r>
                     </a:p>
                   </a:txBody>
-                  <a:tcPr/>
+                  <a:tcPr anchor="ctr">
+                    <a:solidFill>
+                      <a:srgbClr val="F5F8FC"/>
+                    </a:solidFill>
+                  </a:tcPr>
                 </a:tc>
-                <a:extLst>
-                  <a:ext uri="{0D108BD9-81ED-4DB2-BD59-A6C34878D82A}">
-                    <a16:rowId xmlns:a16="http://schemas.microsoft.com/office/drawing/2014/main" val="10003"/>
-                  </a:ext>
-                </a:extLst>
               </a:tr>
-              <a:tr h="255879">
+              <a:tr h="276923">
                 <a:tc>
                   <a:txBody>
                     <a:bodyPr/>
                     <a:lstStyle/>
                     <a:p>
+                      <a:pPr algn="ctr"/>
                       <a:r>
-                        <a:rPr sz="1200"/>
+                        <a:rPr sz="850" b="1">
+                          <a:solidFill>
+                            <a:srgbClr val="1E1E1E"/>
+                          </a:solidFill>
+                          <a:latin typeface="Times New Roman"/>
+                        </a:rPr>
                         <a:t>4</a:t>
                       </a:r>
                     </a:p>
                   </a:txBody>
-                  <a:tcPr/>
+                  <a:tcPr anchor="ctr">
+                    <a:solidFill>
+                      <a:srgbClr val="FFFFFF"/>
+                    </a:solidFill>
+                  </a:tcPr>
                 </a:tc>
                 <a:tc>
                   <a:txBody>
                     <a:bodyPr/>
                     <a:lstStyle/>
                     <a:p>
+                      <a:pPr algn="l"/>
                       <a:r>
-                        <a:rPr sz="1200"/>
+                        <a:rPr sz="850" b="1">
+                          <a:solidFill>
+                            <a:srgbClr val="1E1E1E"/>
+                          </a:solidFill>
+                          <a:latin typeface="Times New Roman"/>
+                        </a:rPr>
                         <a:t>Devi et al. (2025)</a:t>
                       </a:r>
                     </a:p>
                   </a:txBody>
-                  <a:tcPr/>
+                  <a:tcPr anchor="ctr">
+                    <a:solidFill>
+                      <a:srgbClr val="FFFFFF"/>
+                    </a:solidFill>
+                  </a:tcPr>
                 </a:tc>
                 <a:tc>
                   <a:txBody>
                     <a:bodyPr/>
                     <a:lstStyle/>
                     <a:p>
+                      <a:pPr algn="l"/>
                       <a:r>
-                        <a:rPr sz="1200"/>
-                        <a:t>RL-GNN + GAT</a:t>
+                        <a:rPr sz="850">
+                          <a:solidFill>
+                            <a:srgbClr val="1E1E1E"/>
+                          </a:solidFill>
+                          <a:latin typeface="Times New Roman"/>
+                        </a:rPr>
+                        <a:t>RL-GNN + GAT Fusion</a:t>
                       </a:r>
                     </a:p>
                   </a:txBody>
-                  <a:tcPr/>
+                  <a:tcPr anchor="ctr">
+                    <a:solidFill>
+                      <a:srgbClr val="FFFFFF"/>
+                    </a:solidFill>
+                  </a:tcPr>
                 </a:tc>
                 <a:tc>
                   <a:txBody>
                     <a:bodyPr/>
                     <a:lstStyle/>
                     <a:p>
+                      <a:pPr algn="l"/>
                       <a:r>
-                        <a:rPr sz="1200"/>
-                        <a:t>Learns implicitly; no topology extraction</a:t>
+                        <a:rPr sz="850">
+                          <a:solidFill>
+                            <a:srgbClr val="1E1E1E"/>
+                          </a:solidFill>
+                          <a:latin typeface="Times New Roman"/>
+                        </a:rPr>
+                        <a:t>Learns implicitly; lacks explicit named topology extraction</a:t>
                       </a:r>
                     </a:p>
                   </a:txBody>
-                  <a:tcPr/>
+                  <a:tcPr anchor="ctr">
+                    <a:solidFill>
+                      <a:srgbClr val="FFFFFF"/>
+                    </a:solidFill>
+                  </a:tcPr>
                 </a:tc>
-                <a:extLst>
-                  <a:ext uri="{0D108BD9-81ED-4DB2-BD59-A6C34878D82A}">
-                    <a16:rowId xmlns:a16="http://schemas.microsoft.com/office/drawing/2014/main" val="10004"/>
-                  </a:ext>
-                </a:extLst>
               </a:tr>
-              <a:tr h="255879">
+              <a:tr h="276923">
                 <a:tc>
                   <a:txBody>
                     <a:bodyPr/>
                     <a:lstStyle/>
                     <a:p>
+                      <a:pPr algn="ctr"/>
                       <a:r>
-                        <a:rPr sz="1200"/>
+                        <a:rPr sz="850" b="1">
+                          <a:solidFill>
+                            <a:srgbClr val="1E1E1E"/>
+                          </a:solidFill>
+                          <a:latin typeface="Times New Roman"/>
+                        </a:rPr>
                         <a:t>5</a:t>
                       </a:r>
                     </a:p>
                   </a:txBody>
-                  <a:tcPr/>
+                  <a:tcPr anchor="ctr">
+                    <a:solidFill>
+                      <a:srgbClr val="F5F8FC"/>
+                    </a:solidFill>
+                  </a:tcPr>
                 </a:tc>
                 <a:tc>
                   <a:txBody>
                     <a:bodyPr/>
                     <a:lstStyle/>
                     <a:p>
+                      <a:pPr algn="l"/>
                       <a:r>
-                        <a:rPr sz="1200"/>
+                        <a:rPr sz="850" b="1">
+                          <a:solidFill>
+                            <a:srgbClr val="1E1E1E"/>
+                          </a:solidFill>
+                          <a:latin typeface="Times New Roman"/>
+                        </a:rPr>
                         <a:t>Jawad et al. (2024)</a:t>
                       </a:r>
                     </a:p>
                   </a:txBody>
-                  <a:tcPr/>
+                  <a:tcPr anchor="ctr">
+                    <a:solidFill>
+                      <a:srgbClr val="F5F8FC"/>
+                    </a:solidFill>
+                  </a:tcPr>
                 </a:tc>
                 <a:tc>
                   <a:txBody>
                     <a:bodyPr/>
                     <a:lstStyle/>
                     <a:p>
+                      <a:pPr algn="l"/>
                       <a:r>
-                        <a:rPr sz="1200"/>
-                        <a:t>ML-ERP Review</a:t>
+                        <a:rPr sz="850">
+                          <a:solidFill>
+                            <a:srgbClr val="1E1E1E"/>
+                          </a:solidFill>
+                          <a:latin typeface="Times New Roman"/>
+                        </a:rPr>
+                        <a:t>ML-ERP Architecture Review</a:t>
                       </a:r>
                     </a:p>
                   </a:txBody>
-                  <a:tcPr/>
+                  <a:tcPr anchor="ctr">
+                    <a:solidFill>
+                      <a:srgbClr val="F5F8FC"/>
+                    </a:solidFill>
+                  </a:tcPr>
                 </a:tc>
                 <a:tc>
                   <a:txBody>
                     <a:bodyPr/>
                     <a:lstStyle/>
                     <a:p>
+                      <a:pPr algn="l"/>
                       <a:r>
-                        <a:rPr sz="1200"/>
-                        <a:t>ERP optimisation, not fraud detection</a:t>
+                        <a:rPr sz="850">
+                          <a:solidFill>
+                            <a:srgbClr val="1E1E1E"/>
+                          </a:solidFill>
+                          <a:latin typeface="Times New Roman"/>
+                        </a:rPr>
+                        <a:t>Targets workflow optimisation, not forensic fraud detection</a:t>
                       </a:r>
                     </a:p>
                   </a:txBody>
-                  <a:tcPr/>
+                  <a:tcPr anchor="ctr">
+                    <a:solidFill>
+                      <a:srgbClr val="F5F8FC"/>
+                    </a:solidFill>
+                  </a:tcPr>
                 </a:tc>
-                <a:extLst>
-                  <a:ext uri="{0D108BD9-81ED-4DB2-BD59-A6C34878D82A}">
-                    <a16:rowId xmlns:a16="http://schemas.microsoft.com/office/drawing/2014/main" val="10005"/>
-                  </a:ext>
-                </a:extLst>
               </a:tr>
-              <a:tr h="255879">
+              <a:tr h="276923">
                 <a:tc>
                   <a:txBody>
                     <a:bodyPr/>
                     <a:lstStyle/>
                     <a:p>
+                      <a:pPr algn="ctr"/>
                       <a:r>
-                        <a:rPr sz="1200"/>
+                        <a:rPr sz="850" b="1">
+                          <a:solidFill>
+                            <a:srgbClr val="1E1E1E"/>
+                          </a:solidFill>
+                          <a:latin typeface="Times New Roman"/>
+                        </a:rPr>
                         <a:t>6</a:t>
                       </a:r>
                     </a:p>
                   </a:txBody>
-                  <a:tcPr/>
+                  <a:tcPr anchor="ctr">
+                    <a:solidFill>
+                      <a:srgbClr val="FFFFFF"/>
+                    </a:solidFill>
+                  </a:tcPr>
                 </a:tc>
                 <a:tc>
                   <a:txBody>
                     <a:bodyPr/>
                     <a:lstStyle/>
                     <a:p>
+                      <a:pPr algn="l"/>
                       <a:r>
-                        <a:rPr sz="1200"/>
+                        <a:rPr sz="850" b="1">
+                          <a:solidFill>
+                            <a:srgbClr val="1E1E1E"/>
+                          </a:solidFill>
+                          <a:latin typeface="Times New Roman"/>
+                        </a:rPr>
                         <a:t>Yuan et al. (2025)</a:t>
                       </a:r>
                     </a:p>
                   </a:txBody>
-                  <a:tcPr/>
+                  <a:tcPr anchor="ctr">
+                    <a:solidFill>
+                      <a:srgbClr val="FFFFFF"/>
+                    </a:solidFill>
+                  </a:tcPr>
                 </a:tc>
                 <a:tc>
                   <a:txBody>
                     <a:bodyPr/>
                     <a:lstStyle/>
                     <a:p>
+                      <a:pPr algn="l"/>
                       <a:r>
-                        <a:rPr sz="1200"/>
+                        <a:rPr sz="850">
+                          <a:solidFill>
+                            <a:srgbClr val="1E1E1E"/>
+                          </a:solidFill>
+                          <a:latin typeface="Times New Roman"/>
+                        </a:rPr>
                         <a:t>GNN Anomaly Survey</a:t>
                       </a:r>
                     </a:p>
                   </a:txBody>
-                  <a:tcPr/>
+                  <a:tcPr anchor="ctr">
+                    <a:solidFill>
+                      <a:srgbClr val="FFFFFF"/>
+                    </a:solidFill>
+                  </a:tcPr>
                 </a:tc>
                 <a:tc>
                   <a:txBody>
                     <a:bodyPr/>
                     <a:lstStyle/>
                     <a:p>
+                      <a:pPr algn="l"/>
                       <a:r>
-                        <a:rPr sz="1200"/>
-                        <a:t>General anomaly; no ERP or audit</a:t>
+                        <a:rPr sz="850">
+                          <a:solidFill>
+                            <a:srgbClr val="1E1E1E"/>
+                          </a:solidFill>
+                          <a:latin typeface="Times New Roman"/>
+                        </a:rPr>
+                        <a:t>Broad anomaly focus; ignores ERP double-entry ledgers</a:t>
                       </a:r>
                     </a:p>
                   </a:txBody>
-                  <a:tcPr/>
+                  <a:tcPr anchor="ctr">
+                    <a:solidFill>
+                      <a:srgbClr val="FFFFFF"/>
+                    </a:solidFill>
+                  </a:tcPr>
                 </a:tc>
-                <a:extLst>
-                  <a:ext uri="{0D108BD9-81ED-4DB2-BD59-A6C34878D82A}">
-                    <a16:rowId xmlns:a16="http://schemas.microsoft.com/office/drawing/2014/main" val="10006"/>
-                  </a:ext>
-                </a:extLst>
               </a:tr>
-              <a:tr h="255879">
+              <a:tr h="276923">
                 <a:tc>
                   <a:txBody>
                     <a:bodyPr/>
                     <a:lstStyle/>
                     <a:p>
+                      <a:pPr algn="ctr"/>
                       <a:r>
-                        <a:rPr sz="1200"/>
+                        <a:rPr sz="850" b="1">
+                          <a:solidFill>
+                            <a:srgbClr val="1E1E1E"/>
+                          </a:solidFill>
+                          <a:latin typeface="Times New Roman"/>
+                        </a:rPr>
                         <a:t>7</a:t>
                       </a:r>
                     </a:p>
                   </a:txBody>
-                  <a:tcPr/>
+                  <a:tcPr anchor="ctr">
+                    <a:solidFill>
+                      <a:srgbClr val="F5F8FC"/>
+                    </a:solidFill>
+                  </a:tcPr>
                 </a:tc>
                 <a:tc>
                   <a:txBody>
                     <a:bodyPr/>
                     <a:lstStyle/>
                     <a:p>
+                      <a:pPr algn="l"/>
                       <a:r>
-                        <a:rPr sz="1200"/>
+                        <a:rPr sz="850" b="1">
+                          <a:solidFill>
+                            <a:srgbClr val="1E1E1E"/>
+                          </a:solidFill>
+                          <a:latin typeface="Times New Roman"/>
+                        </a:rPr>
                         <a:t>Shi et al. (2026)</a:t>
                       </a:r>
                     </a:p>
                   </a:txBody>
-                  <a:tcPr/>
+                  <a:tcPr anchor="ctr">
+                    <a:solidFill>
+                      <a:srgbClr val="F5F8FC"/>
+                    </a:solidFill>
+                  </a:tcPr>
                 </a:tc>
                 <a:tc>
                   <a:txBody>
                     <a:bodyPr/>
                     <a:lstStyle/>
                     <a:p>
+                      <a:pPr algn="l"/>
                       <a:r>
-                        <a:rPr sz="1200"/>
-                        <a:t>ST-CGNN</a:t>
+                        <a:rPr sz="850">
+                          <a:solidFill>
+                            <a:srgbClr val="1E1E1E"/>
+                          </a:solidFill>
+                          <a:latin typeface="Times New Roman"/>
+                        </a:rPr>
+                        <a:t>ST-CGNN (Spatio-Temporal)</a:t>
                       </a:r>
                     </a:p>
                   </a:txBody>
-                  <a:tcPr/>
+                  <a:tcPr anchor="ctr">
+                    <a:solidFill>
+                      <a:srgbClr val="F5F8FC"/>
+                    </a:solidFill>
+                  </a:tcPr>
                 </a:tc>
                 <a:tc>
                   <a:txBody>
                     <a:bodyPr/>
                     <a:lstStyle/>
                     <a:p>
+                      <a:pPr algn="l"/>
                       <a:r>
-                        <a:rPr sz="1200"/>
-                        <a:t>Black-box; limited interpretability</a:t>
+                        <a:rPr sz="850">
+                          <a:solidFill>
+                            <a:srgbClr val="1E1E1E"/>
+                          </a:solidFill>
+                          <a:latin typeface="Times New Roman"/>
+                        </a:rPr>
+                        <a:t>Black-box embeddings; lack audit-grade path explainability</a:t>
                       </a:r>
                     </a:p>
                   </a:txBody>
-                  <a:tcPr/>
+                  <a:tcPr anchor="ctr">
+                    <a:solidFill>
+                      <a:srgbClr val="F5F8FC"/>
+                    </a:solidFill>
+                  </a:tcPr>
                 </a:tc>
-                <a:extLst>
-                  <a:ext uri="{0D108BD9-81ED-4DB2-BD59-A6C34878D82A}">
-                    <a16:rowId xmlns:a16="http://schemas.microsoft.com/office/drawing/2014/main" val="10007"/>
-                  </a:ext>
-                </a:extLst>
               </a:tr>
-              <a:tr h="255879">
+              <a:tr h="276923">
                 <a:tc>
                   <a:txBody>
                     <a:bodyPr/>
                     <a:lstStyle/>
                     <a:p>
+                      <a:pPr algn="ctr"/>
                       <a:r>
-                        <a:rPr sz="1200"/>
+                        <a:rPr sz="850" b="1">
+                          <a:solidFill>
+                            <a:srgbClr val="1E1E1E"/>
+                          </a:solidFill>
+                          <a:latin typeface="Times New Roman"/>
+                        </a:rPr>
                         <a:t>8</a:t>
                       </a:r>
                     </a:p>
                   </a:txBody>
-                  <a:tcPr/>
+                  <a:tcPr anchor="ctr">
+                    <a:solidFill>
+                      <a:srgbClr val="FFFFFF"/>
+                    </a:solidFill>
+                  </a:tcPr>
                 </a:tc>
                 <a:tc>
                   <a:txBody>
                     <a:bodyPr/>
                     <a:lstStyle/>
                     <a:p>
+                      <a:pPr algn="l"/>
                       <a:r>
-                        <a:rPr sz="1200"/>
+                        <a:rPr sz="850" b="1">
+                          <a:solidFill>
+                            <a:srgbClr val="1E1E1E"/>
+                          </a:solidFill>
+                          <a:latin typeface="Times New Roman"/>
+                        </a:rPr>
                         <a:t>Zhi et al. (2025)</a:t>
                       </a:r>
                     </a:p>
                   </a:txBody>
-                  <a:tcPr/>
+                  <a:tcPr anchor="ctr">
+                    <a:solidFill>
+                      <a:srgbClr val="FFFFFF"/>
+                    </a:solidFill>
+                  </a:tcPr>
                 </a:tc>
                 <a:tc>
                   <a:txBody>
                     <a:bodyPr/>
                     <a:lstStyle/>
                     <a:p>
+                      <a:pPr algn="l"/>
                       <a:r>
-                        <a:rPr sz="1200"/>
-                        <a:t>EAC-GAN</a:t>
+                        <a:rPr sz="850">
+                          <a:solidFill>
+                            <a:srgbClr val="1E1E1E"/>
+                          </a:solidFill>
+                          <a:latin typeface="Times New Roman"/>
+                        </a:rPr>
+                        <a:t>EAC-GAN (Imbalance)</a:t>
                       </a:r>
                     </a:p>
                   </a:txBody>
-                  <a:tcPr/>
+                  <a:tcPr anchor="ctr">
+                    <a:solidFill>
+                      <a:srgbClr val="FFFFFF"/>
+                    </a:solidFill>
+                  </a:tcPr>
                 </a:tc>
                 <a:tc>
                   <a:txBody>
                     <a:bodyPr/>
                     <a:lstStyle/>
                     <a:p>
+                      <a:pPr algn="l"/>
                       <a:r>
-                        <a:rPr sz="1200"/>
-                        <a:t>Handles imbalance only; ignores structure</a:t>
+                        <a:rPr sz="850">
+                          <a:solidFill>
+                            <a:srgbClr val="1E1E1E"/>
+                          </a:solidFill>
+                          <a:latin typeface="Times New Roman"/>
+                        </a:rPr>
+                        <a:t>Generates synthetic tabular samples; distorts graph topology</a:t>
                       </a:r>
                     </a:p>
                   </a:txBody>
-                  <a:tcPr/>
+                  <a:tcPr anchor="ctr">
+                    <a:solidFill>
+                      <a:srgbClr val="FFFFFF"/>
+                    </a:solidFill>
+                  </a:tcPr>
                 </a:tc>
-                <a:extLst>
-                  <a:ext uri="{0D108BD9-81ED-4DB2-BD59-A6C34878D82A}">
-                    <a16:rowId xmlns:a16="http://schemas.microsoft.com/office/drawing/2014/main" val="10008"/>
-                  </a:ext>
-                </a:extLst>
               </a:tr>
-              <a:tr h="255879">
+              <a:tr h="276923">
                 <a:tc>
                   <a:txBody>
                     <a:bodyPr/>
                     <a:lstStyle/>
                     <a:p>
+                      <a:pPr algn="ctr"/>
                       <a:r>
-                        <a:rPr sz="1200"/>
+                        <a:rPr sz="850" b="1">
+                          <a:solidFill>
+                            <a:srgbClr val="1E1E1E"/>
+                          </a:solidFill>
+                          <a:latin typeface="Times New Roman"/>
+                        </a:rPr>
                         <a:t>9</a:t>
                       </a:r>
                     </a:p>
                   </a:txBody>
-                  <a:tcPr/>
+                  <a:tcPr anchor="ctr">
+                    <a:solidFill>
+                      <a:srgbClr val="F5F8FC"/>
+                    </a:solidFill>
+                  </a:tcPr>
                 </a:tc>
                 <a:tc>
                   <a:txBody>
                     <a:bodyPr/>
                     <a:lstStyle/>
                     <a:p>
+                      <a:pPr algn="l"/>
                       <a:r>
-                        <a:rPr sz="1200"/>
+                        <a:rPr sz="850" b="1">
+                          <a:solidFill>
+                            <a:srgbClr val="1E1E1E"/>
+                          </a:solidFill>
+                          <a:latin typeface="Times New Roman"/>
+                        </a:rPr>
                         <a:t>Tong et al. (2023)</a:t>
                       </a:r>
                     </a:p>
                   </a:txBody>
-                  <a:tcPr/>
+                  <a:tcPr anchor="ctr">
+                    <a:solidFill>
+                      <a:srgbClr val="F5F8FC"/>
+                    </a:solidFill>
+                  </a:tcPr>
                 </a:tc>
                 <a:tc>
                   <a:txBody>
                     <a:bodyPr/>
                     <a:lstStyle/>
                     <a:p>
+                      <a:pPr algn="l"/>
                       <a:r>
-                        <a:rPr sz="1200"/>
+                        <a:rPr sz="850">
+                          <a:solidFill>
+                            <a:srgbClr val="1E1E1E"/>
+                          </a:solidFill>
+                          <a:latin typeface="Times New Roman"/>
+                        </a:rPr>
                         <a:t>HHLN-GNN</a:t>
                       </a:r>
                     </a:p>
                   </a:txBody>
-                  <a:tcPr/>
+                  <a:tcPr anchor="ctr">
+                    <a:solidFill>
+                      <a:srgbClr val="F5F8FC"/>
+                    </a:solidFill>
+                  </a:tcPr>
                 </a:tc>
                 <a:tc>
                   <a:txBody>
                     <a:bodyPr/>
                     <a:lstStyle/>
                     <a:p>
+                      <a:pPr algn="l"/>
                       <a:r>
-                        <a:rPr sz="1200"/>
-                        <a:t>Embedding-based; not explainable</a:t>
+                        <a:rPr sz="850">
+                          <a:solidFill>
+                            <a:srgbClr val="1E1E1E"/>
+                          </a:solidFill>
+                          <a:latin typeface="Times New Roman"/>
+                        </a:rPr>
+                        <a:t>Latent representation-based; legally non-defensible in audits</a:t>
                       </a:r>
                     </a:p>
                   </a:txBody>
-                  <a:tcPr/>
+                  <a:tcPr anchor="ctr">
+                    <a:solidFill>
+                      <a:srgbClr val="F5F8FC"/>
+                    </a:solidFill>
+                  </a:tcPr>
                 </a:tc>
-                <a:extLst>
-                  <a:ext uri="{0D108BD9-81ED-4DB2-BD59-A6C34878D82A}">
-                    <a16:rowId xmlns:a16="http://schemas.microsoft.com/office/drawing/2014/main" val="10009"/>
-                  </a:ext>
-                </a:extLst>
               </a:tr>
-              <a:tr h="255879">
+              <a:tr h="276923">
                 <a:tc>
                   <a:txBody>
                     <a:bodyPr/>
                     <a:lstStyle/>
                     <a:p>
+                      <a:pPr algn="ctr"/>
                       <a:r>
-                        <a:rPr sz="1200"/>
+                        <a:rPr sz="850" b="1">
+                          <a:solidFill>
+                            <a:srgbClr val="1E1E1E"/>
+                          </a:solidFill>
+                          <a:latin typeface="Times New Roman"/>
+                        </a:rPr>
                         <a:t>10</a:t>
                       </a:r>
                     </a:p>
                   </a:txBody>
-                  <a:tcPr/>
+                  <a:tcPr anchor="ctr">
+                    <a:solidFill>
+                      <a:srgbClr val="FFFFFF"/>
+                    </a:solidFill>
+                  </a:tcPr>
                 </a:tc>
                 <a:tc>
                   <a:txBody>
                     <a:bodyPr/>
                     <a:lstStyle/>
                     <a:p>
+                      <a:pPr algn="l"/>
                       <a:r>
-                        <a:rPr sz="1200"/>
+                        <a:rPr sz="850" b="1">
+                          <a:solidFill>
+                            <a:srgbClr val="1E1E1E"/>
+                          </a:solidFill>
+                          <a:latin typeface="Times New Roman"/>
+                        </a:rPr>
                         <a:t>Boyapati et al. (2025)</a:t>
                       </a:r>
                     </a:p>
                   </a:txBody>
-                  <a:tcPr/>
+                  <a:tcPr anchor="ctr">
+                    <a:solidFill>
+                      <a:srgbClr val="FFFFFF"/>
+                    </a:solidFill>
+                  </a:tcPr>
                 </a:tc>
                 <a:tc>
                   <a:txBody>
                     <a:bodyPr/>
                     <a:lstStyle/>
                     <a:p>
+                      <a:pPr algn="l"/>
                       <a:r>
-                        <a:rPr sz="1200"/>
+                        <a:rPr sz="850">
+                          <a:solidFill>
+                            <a:srgbClr val="1E1E1E"/>
+                          </a:solidFill>
+                          <a:latin typeface="Times New Roman"/>
+                        </a:rPr>
                         <a:t>BalancerGNN</a:t>
                       </a:r>
                     </a:p>
                   </a:txBody>
-                  <a:tcPr/>
+                  <a:tcPr anchor="ctr">
+                    <a:solidFill>
+                      <a:srgbClr val="FFFFFF"/>
+                    </a:solidFill>
+                  </a:tcPr>
                 </a:tc>
                 <a:tc>
                   <a:txBody>
                     <a:bodyPr/>
                     <a:lstStyle/>
                     <a:p>
+                      <a:pPr algn="l"/>
                       <a:r>
-                        <a:rPr sz="1200"/>
-                        <a:t>No ERP workflows or audit trails</a:t>
+                        <a:rPr sz="850">
+                          <a:solidFill>
+                            <a:srgbClr val="1E1E1E"/>
+                          </a:solidFill>
+                          <a:latin typeface="Times New Roman"/>
+                        </a:rPr>
+                        <a:t>Focuses on graph loss reweighting; no ERP audit trails</a:t>
                       </a:r>
                     </a:p>
                   </a:txBody>
-                  <a:tcPr/>
+                  <a:tcPr anchor="ctr">
+                    <a:solidFill>
+                      <a:srgbClr val="FFFFFF"/>
+                    </a:solidFill>
+                  </a:tcPr>
                 </a:tc>
-                <a:extLst>
-                  <a:ext uri="{0D108BD9-81ED-4DB2-BD59-A6C34878D82A}">
-                    <a16:rowId xmlns:a16="http://schemas.microsoft.com/office/drawing/2014/main" val="10010"/>
-                  </a:ext>
-                </a:extLst>
               </a:tr>
-              <a:tr h="255879">
+              <a:tr h="276923">
                 <a:tc>
                   <a:txBody>
                     <a:bodyPr/>
                     <a:lstStyle/>
                     <a:p>
+                      <a:pPr algn="ctr"/>
                       <a:r>
-                        <a:rPr sz="1200"/>
+                        <a:rPr sz="850" b="1">
+                          <a:solidFill>
+                            <a:srgbClr val="1E1E1E"/>
+                          </a:solidFill>
+                          <a:latin typeface="Times New Roman"/>
+                        </a:rPr>
                         <a:t>11</a:t>
                       </a:r>
                     </a:p>
                   </a:txBody>
-                  <a:tcPr/>
+                  <a:tcPr anchor="ctr">
+                    <a:solidFill>
+                      <a:srgbClr val="F5F8FC"/>
+                    </a:solidFill>
+                  </a:tcPr>
                 </a:tc>
                 <a:tc>
                   <a:txBody>
                     <a:bodyPr/>
                     <a:lstStyle/>
                     <a:p>
+                      <a:pPr algn="l"/>
                       <a:r>
-                        <a:rPr sz="1200"/>
+                        <a:rPr sz="850" b="1">
+                          <a:solidFill>
+                            <a:srgbClr val="1E1E1E"/>
+                          </a:solidFill>
+                          <a:latin typeface="Times New Roman"/>
+                        </a:rPr>
                         <a:t>Mamakou et al. (2024)</a:t>
                       </a:r>
                     </a:p>
                   </a:txBody>
-                  <a:tcPr/>
+                  <a:tcPr anchor="ctr">
+                    <a:solidFill>
+                      <a:srgbClr val="F5F8FC"/>
+                    </a:solidFill>
+                  </a:tcPr>
                 </a:tc>
                 <a:tc>
                   <a:txBody>
                     <a:bodyPr/>
                     <a:lstStyle/>
                     <a:p>
+                      <a:pPr algn="l"/>
                       <a:r>
-                        <a:rPr sz="1200"/>
-                        <a:t>ERP Evaluation</a:t>
+                        <a:rPr sz="850">
+                          <a:solidFill>
+                            <a:srgbClr val="1E1E1E"/>
+                          </a:solidFill>
+                          <a:latin typeface="Times New Roman"/>
+                        </a:rPr>
+                        <a:t>ERP Evaluation &amp; Internal Controls</a:t>
                       </a:r>
                     </a:p>
                   </a:txBody>
-                  <a:tcPr/>
+                  <a:tcPr anchor="ctr">
+                    <a:solidFill>
+                      <a:srgbClr val="F5F8FC"/>
+                    </a:solidFill>
+                  </a:tcPr>
                 </a:tc>
                 <a:tc>
                   <a:txBody>
                     <a:bodyPr/>
                     <a:lstStyle/>
                     <a:p>
+                      <a:pPr algn="l"/>
                       <a:r>
-                        <a:rPr sz="1200"/>
-                        <a:t>No fraud monitoring capability</a:t>
+                        <a:rPr sz="850">
+                          <a:solidFill>
+                            <a:srgbClr val="1E1E1E"/>
+                          </a:solidFill>
+                          <a:latin typeface="Times New Roman"/>
+                        </a:rPr>
+                        <a:t>Manual audit sampling misses &gt;95% of internal collusion</a:t>
                       </a:r>
                     </a:p>
                   </a:txBody>
-                  <a:tcPr/>
+                  <a:tcPr anchor="ctr">
+                    <a:solidFill>
+                      <a:srgbClr val="F5F8FC"/>
+                    </a:solidFill>
+                  </a:tcPr>
                 </a:tc>
-                <a:extLst>
-                  <a:ext uri="{0D108BD9-81ED-4DB2-BD59-A6C34878D82A}">
-                    <a16:rowId xmlns:a16="http://schemas.microsoft.com/office/drawing/2014/main" val="10011"/>
-                  </a:ext>
-                </a:extLst>
               </a:tr>
-              <a:tr h="255879">
+              <a:tr h="276924">
                 <a:tc>
                   <a:txBody>
                     <a:bodyPr/>
                     <a:lstStyle/>
                     <a:p>
+                      <a:pPr algn="ctr"/>
                       <a:r>
-                        <a:rPr sz="1200"/>
+                        <a:rPr sz="850" b="1">
+                          <a:solidFill>
+                            <a:srgbClr val="1E1E1E"/>
+                          </a:solidFill>
+                          <a:latin typeface="Times New Roman"/>
+                        </a:rPr>
                         <a:t>12</a:t>
                       </a:r>
                     </a:p>
                   </a:txBody>
-                  <a:tcPr/>
+                  <a:tcPr anchor="ctr">
+                    <a:solidFill>
+                      <a:srgbClr val="FFFFFF"/>
+                    </a:solidFill>
+                  </a:tcPr>
                 </a:tc>
                 <a:tc>
                   <a:txBody>
                     <a:bodyPr/>
                     <a:lstStyle/>
                     <a:p>
+                      <a:pPr algn="l"/>
                       <a:r>
-                        <a:rPr sz="1200"/>
+                        <a:rPr sz="850" b="1">
+                          <a:solidFill>
+                            <a:srgbClr val="1E1E1E"/>
+                          </a:solidFill>
+                          <a:latin typeface="Times New Roman"/>
+                        </a:rPr>
                         <a:t>Vasarhelyi et al. (2012)</a:t>
                       </a:r>
                     </a:p>
                   </a:txBody>
-                  <a:tcPr/>
+                  <a:tcPr anchor="ctr">
+                    <a:solidFill>
+                      <a:srgbClr val="FFFFFF"/>
+                    </a:solidFill>
+                  </a:tcPr>
                 </a:tc>
                 <a:tc>
                   <a:txBody>
                     <a:bodyPr/>
                     <a:lstStyle/>
                     <a:p>
+                      <a:pPr algn="l"/>
                       <a:r>
-                        <a:rPr sz="1200"/>
-                        <a:t>Continuous Audit</a:t>
+                        <a:rPr sz="850">
+                          <a:solidFill>
+                            <a:srgbClr val="1E1E1E"/>
+                          </a:solidFill>
+                          <a:latin typeface="Times New Roman"/>
+                        </a:rPr>
+                        <a:t>Continuous Auditing (CA) Framework</a:t>
                       </a:r>
                     </a:p>
                   </a:txBody>
-                  <a:tcPr/>
+                  <a:tcPr anchor="ctr">
+                    <a:solidFill>
+                      <a:srgbClr val="FFFFFF"/>
+                    </a:solidFill>
+                  </a:tcPr>
                 </a:tc>
                 <a:tc>
                   <a:txBody>
                     <a:bodyPr/>
                     <a:lstStyle/>
                     <a:p>
+                      <a:pPr algn="l"/>
                       <a:r>
-                        <a:rPr sz="1200" dirty="0"/>
-                        <a:t>No automated graph-based detection</a:t>
+                        <a:rPr sz="850">
+                          <a:solidFill>
+                            <a:srgbClr val="1E1E1E"/>
+                          </a:solidFill>
+                          <a:latin typeface="Times New Roman"/>
+                        </a:rPr>
+                        <a:t>Establishes CA theory; lacks automated graph detection system</a:t>
                       </a:r>
                     </a:p>
                   </a:txBody>
-                  <a:tcPr/>
+                  <a:tcPr anchor="ctr">
+                    <a:solidFill>
+                      <a:srgbClr val="FFFFFF"/>
+                    </a:solidFill>
+                  </a:tcPr>
                 </a:tc>
-                <a:extLst>
-                  <a:ext uri="{0D108BD9-81ED-4DB2-BD59-A6C34878D82A}">
-                    <a16:rowId xmlns:a16="http://schemas.microsoft.com/office/drawing/2014/main" val="10012"/>
-                  </a:ext>
-                </a:extLst>
               </a:tr>
             </a:tbl>
           </a:graphicData>
@@ -8497,7 +8670,7 @@
     </p:spTree>
     <p:extLst>
       <p:ext uri="{BB962C8B-B14F-4D97-AF65-F5344CB8AC3E}">
-        <p14:creationId xmlns:p14="http://schemas.microsoft.com/office/powerpoint/2010/main" val="394871567"/>
+        <p14:creationId xmlns:p14="http://schemas.microsoft.com/office/powerpoint/2010/main" val="857449727"/>
       </p:ext>
     </p:extLst>
   </p:cSld>
@@ -8532,10 +8705,10 @@
       </p:grpSpPr>
       <p:sp>
         <p:nvSpPr>
-          <p:cNvPr id="16" name="Content Placeholder 2">
-            <a:extLst>
-              <a:ext uri="{FF2B5EF4-FFF2-40B4-BE49-F238E27FC236}">
-                <a16:creationId xmlns:a16="http://schemas.microsoft.com/office/drawing/2014/main" id="{24F9226B-00C8-0F39-4E9F-98727A1E228B}"/>
+          <p:cNvPr id="3" name="Content Placeholder 2">
+            <a:extLst>
+              <a:ext uri="{FF2B5EF4-FFF2-40B4-BE49-F238E27FC236}">
+                <a16:creationId xmlns:a16="http://schemas.microsoft.com/office/drawing/2014/main" id="{F07F8AC8-6380-9217-CA4C-1FBF1C25C60E}"/>
               </a:ext>
             </a:extLst>
           </p:cNvPr>
@@ -8548,154 +8721,175 @@
         </p:nvSpPr>
         <p:spPr>
           <a:xfrm>
-            <a:off x="838200" y="1487198"/>
-            <a:ext cx="10515600" cy="4351338"/>
+            <a:off x="0" y="1450000"/>
+            <a:ext cx="0" cy="4750000"/>
           </a:xfrm>
         </p:spPr>
         <p:txBody>
-          <a:bodyPr wrap="square">
+          <a:bodyPr>
             <a:normAutofit/>
           </a:bodyPr>
           <a:lstStyle/>
           <a:p>
-            <a:pPr marL="0" indent="0">
+            <a:pPr>
+              <a:spcBef>
+                <a:spcPts val="400"/>
+              </a:spcBef>
               <a:spcAft>
                 <a:spcPts val="100"/>
               </a:spcAft>
-              <a:buNone/>
             </a:pPr>
             <a:r>
-              <a:rPr sz="1600" b="1" dirty="0"/>
+              <a:rPr sz="1300" b="1">
+                <a:solidFill>
+                  <a:srgbClr val="003366"/>
+                </a:solidFill>
+                <a:latin typeface="Times New Roman"/>
+              </a:rPr>
               <a:t>1.  No explicit fraud topology extraction</a:t>
             </a:r>
           </a:p>
           <a:p>
-            <a:pPr marL="457200" lvl="1" indent="0">
+            <a:pPr>
+              <a:spcBef>
+                <a:spcPts val="100"/>
+              </a:spcBef>
+              <a:spcAft>
+                <a:spcPts val="400"/>
+              </a:spcAft>
+            </a:pPr>
+            <a:r>
+              <a:rPr sz="1150">
+                <a:solidFill>
+                  <a:srgbClr val="1E1E1E"/>
+                </a:solidFill>
+                <a:latin typeface="Times New Roman"/>
+              </a:rPr>
+              <a:t>Current GNN approaches learn hidden latent patterns for classification but don’t identify named fraud structures (cycles, fan-in hubs, lapping chains) as readable features. Auditors can’t trace a risk score back to a concrete suspicious money path.</a:t>
+            </a:r>
+          </a:p>
+          <a:p>
+            <a:pPr>
+              <a:spcBef>
+                <a:spcPts val="400"/>
+              </a:spcBef>
               <a:spcAft>
                 <a:spcPts val="100"/>
               </a:spcAft>
-              <a:buNone/>
             </a:pPr>
             <a:r>
-              <a:rPr sz="1400" dirty="0"/>
-              <a:t>Current GNN </a:t>
-            </a:r>
-            <a:r>
-              <a:rPr lang="en-US" sz="1400" dirty="0"/>
-              <a:t>approaches learn hidden patterns for classification but don’t identify named fraud structures (cycles, fan-in hubs, lapping chains) as readable features. Auditors can’t trace </a:t>
-            </a:r>
-            <a:r>
-              <a:rPr sz="1400" dirty="0"/>
-              <a:t>a risk score back to a concrete suspicious money path.</a:t>
-            </a:r>
-          </a:p>
-          <a:p>
-            <a:pPr marL="0" indent="0">
+              <a:rPr sz="1300" b="1">
+                <a:solidFill>
+                  <a:srgbClr val="003366"/>
+                </a:solidFill>
+                <a:latin typeface="Times New Roman"/>
+              </a:rPr>
+              <a:t>2.  No leakage-free evaluation in graph-based fraud detection</a:t>
+            </a:r>
+          </a:p>
+          <a:p>
+            <a:pPr>
+              <a:spcBef>
+                <a:spcPts val="100"/>
+              </a:spcBef>
+              <a:spcAft>
+                <a:spcPts val="400"/>
+              </a:spcAft>
+            </a:pPr>
+            <a:r>
+              <a:rPr sz="1150">
+                <a:solidFill>
+                  <a:srgbClr val="1E1E1E"/>
+                </a:solidFill>
+                <a:latin typeface="Times New Roman"/>
+              </a:rPr>
+              <a:t>Prior systems — including our own predecessor — compute graph features using the entire dataset including future transactions, making test scores artificially high. No published work enforces a strictly past-only computation model with automated leakage testing.</a:t>
+            </a:r>
+          </a:p>
+          <a:p>
+            <a:pPr>
+              <a:spcBef>
+                <a:spcPts val="400"/>
+              </a:spcBef>
               <a:spcAft>
                 <a:spcPts val="100"/>
               </a:spcAft>
-              <a:buNone/>
             </a:pPr>
-            <a:endParaRPr lang="en-US" sz="1600" b="1" dirty="0"/>
-          </a:p>
-          <a:p>
-            <a:pPr marL="0" indent="0">
+            <a:r>
+              <a:rPr sz="1300" b="1">
+                <a:solidFill>
+                  <a:srgbClr val="003366"/>
+                </a:solidFill>
+                <a:latin typeface="Times New Roman"/>
+              </a:rPr>
+              <a:t>3.  No honest comparison of topology vs. tabular features</a:t>
+            </a:r>
+          </a:p>
+          <a:p>
+            <a:pPr>
+              <a:spcBef>
+                <a:spcPts val="100"/>
+              </a:spcBef>
+              <a:spcAft>
+                <a:spcPts val="400"/>
+              </a:spcAft>
+            </a:pPr>
+            <a:r>
+              <a:rPr sz="1150">
+                <a:solidFill>
+                  <a:srgbClr val="1E1E1E"/>
+                </a:solidFill>
+                <a:latin typeface="Times New Roman"/>
+              </a:rPr>
+              <a:t>The claim that 'graph topology adds value' has never been tested with a clean experiment using the same time-based data split, a single imbalance fix, and proper rare-event metrics (PR-AUC) for extremely imbalanced financial data.</a:t>
+            </a:r>
+          </a:p>
+          <a:p>
+            <a:pPr>
+              <a:spcBef>
+                <a:spcPts val="400"/>
+              </a:spcBef>
               <a:spcAft>
                 <a:spcPts val="100"/>
               </a:spcAft>
-              <a:buNone/>
             </a:pPr>
             <a:r>
-              <a:rPr sz="1600" b="1" dirty="0"/>
-              <a:t>2.  No leakage-free evaluation in graph-based fraud detection</a:t>
-            </a:r>
-          </a:p>
-          <a:p>
-            <a:pPr marL="457200" lvl="1" indent="0">
+              <a:rPr sz="1300" b="1">
+                <a:solidFill>
+                  <a:srgbClr val="003366"/>
+                </a:solidFill>
+                <a:latin typeface="Times New Roman"/>
+              </a:rPr>
+              <a:t>4.  Limited ERP-domain application &amp; non-IID federation</a:t>
+            </a:r>
+          </a:p>
+          <a:p>
+            <a:pPr>
+              <a:spcBef>
+                <a:spcPts val="100"/>
+              </a:spcBef>
               <a:spcAft>
-                <a:spcPts val="100"/>
+                <a:spcPts val="400"/>
               </a:spcAft>
-              <a:buNone/>
             </a:pPr>
             <a:r>
-              <a:rPr sz="1400" dirty="0"/>
-              <a:t>Prior systems — including our own predecessor — compute graph features using the entire dataset including future transactions, making test scores artificially high. No published work enforces a strictly past-only computation model with automated leakage testing.</a:t>
-            </a:r>
-          </a:p>
-          <a:p>
-            <a:pPr marL="0" indent="0">
-              <a:spcAft>
-                <a:spcPts val="100"/>
-              </a:spcAft>
-              <a:buNone/>
-            </a:pPr>
-            <a:endParaRPr sz="1400" dirty="0"/>
-          </a:p>
-          <a:p>
-            <a:pPr marL="0" indent="0">
-              <a:spcAft>
-                <a:spcPts val="100"/>
-              </a:spcAft>
-              <a:buNone/>
-            </a:pPr>
-            <a:r>
-              <a:rPr sz="1600" b="1" dirty="0"/>
-              <a:t>3.  No honest comparison of topology vs. tabular features</a:t>
-            </a:r>
-          </a:p>
-          <a:p>
-            <a:pPr marL="457200" lvl="1" indent="0">
-              <a:spcAft>
-                <a:spcPts val="100"/>
-              </a:spcAft>
-              <a:buNone/>
-            </a:pPr>
-            <a:r>
-              <a:rPr sz="1400" dirty="0"/>
-              <a:t>The claim that “graph topology adds value” has never been tested with a clean experiment using the same time-based data split, a single imbalance fix, and proper rare-event metrics (PR-AUC) for extremely imbalanced fraud data.</a:t>
-            </a:r>
-          </a:p>
-          <a:p>
-            <a:pPr marL="0" indent="0">
-              <a:spcAft>
-                <a:spcPts val="100"/>
-              </a:spcAft>
-              <a:buNone/>
-            </a:pPr>
-            <a:endParaRPr sz="1400" dirty="0"/>
-          </a:p>
-          <a:p>
-            <a:pPr marL="0" indent="0">
-              <a:spcAft>
-                <a:spcPts val="100"/>
-              </a:spcAft>
-              <a:buNone/>
-            </a:pPr>
-            <a:r>
-              <a:rPr sz="1600" b="1" dirty="0"/>
-              <a:t>4.  Limited ERP-domain application</a:t>
-            </a:r>
-          </a:p>
-          <a:p>
-            <a:pPr marL="457200" lvl="1" indent="0">
-              <a:spcAft>
-                <a:spcPts val="100"/>
-              </a:spcAft>
-              <a:buNone/>
-            </a:pPr>
-            <a:r>
-              <a:rPr sz="1400" dirty="0"/>
-              <a:t>Most graph-based fraud detection targets social networks or payment cards. ERP systems (SAP, Oracle) with their double-entry ledgers and audit trail requirements remain largely unaddressed.</a:t>
-            </a:r>
-          </a:p>
-        </p:txBody>
-      </p:sp>
-      <p:sp>
-        <p:nvSpPr>
-          <p:cNvPr id="17" name="object 2">
-            <a:extLst>
-              <a:ext uri="{FF2B5EF4-FFF2-40B4-BE49-F238E27FC236}">
-                <a16:creationId xmlns:a16="http://schemas.microsoft.com/office/drawing/2014/main" id="{0B83C472-3E64-5231-599F-06E474D72043}"/>
+              <a:rPr sz="1150">
+                <a:solidFill>
+                  <a:srgbClr val="1E1E1E"/>
+                </a:solidFill>
+                <a:latin typeface="Times New Roman"/>
+              </a:rPr>
+              <a:t>Most graph-based fraud detection targets social networks or payment cards. Enterprise Resource Planning (ERP) ledgers (SAP, Oracle) with double-entry accounting remain unaddressed, while cross-institutional federation suffers from severe non-IID operational skew.</a:t>
+            </a:r>
+          </a:p>
+        </p:txBody>
+      </p:sp>
+      <p:sp>
+        <p:nvSpPr>
+          <p:cNvPr id="4" name="object 2">
+            <a:extLst>
+              <a:ext uri="{FF2B5EF4-FFF2-40B4-BE49-F238E27FC236}">
+                <a16:creationId xmlns:a16="http://schemas.microsoft.com/office/drawing/2014/main" id="{2E07AC55-BA5E-4123-39E6-B79860C6C9EE}"/>
               </a:ext>
             </a:extLst>
           </p:cNvPr>
@@ -8708,7 +8902,7 @@
         </p:nvSpPr>
         <p:spPr>
           <a:xfrm>
-            <a:off x="487680" y="392689"/>
+            <a:off x="460248" y="681037"/>
             <a:ext cx="10515600" cy="576696"/>
           </a:xfrm>
           <a:prstGeom prst="rect">
@@ -8721,7 +8915,7 @@
           </a:bodyPr>
           <a:lstStyle/>
           <a:p>
-            <a:pPr marL="486409" algn="ctr">
+            <a:pPr marL="486409">
               <a:lnSpc>
                 <a:spcPct val="100000"/>
               </a:lnSpc>
@@ -8745,10 +8939,10 @@
       </p:sp>
       <p:sp>
         <p:nvSpPr>
-          <p:cNvPr id="18" name="Date Placeholder 1">
-            <a:extLst>
-              <a:ext uri="{FF2B5EF4-FFF2-40B4-BE49-F238E27FC236}">
-                <a16:creationId xmlns:a16="http://schemas.microsoft.com/office/drawing/2014/main" id="{39A3456A-F5F5-4F92-6F84-7377997E4D55}"/>
+          <p:cNvPr id="2" name="Date Placeholder 1">
+            <a:extLst>
+              <a:ext uri="{FF2B5EF4-FFF2-40B4-BE49-F238E27FC236}">
+                <a16:creationId xmlns:a16="http://schemas.microsoft.com/office/drawing/2014/main" id="{A2430A72-466B-CBDE-2F02-635BA91A98AF}"/>
               </a:ext>
             </a:extLst>
           </p:cNvPr>
@@ -8759,29 +8953,30 @@
             <p:ph type="dt" sz="half" idx="10"/>
           </p:nvPr>
         </p:nvSpPr>
-        <p:spPr>
-          <a:xfrm>
-            <a:off x="838200" y="6356350"/>
-            <a:ext cx="2743200" cy="365125"/>
-          </a:xfrm>
-        </p:spPr>
+        <p:spPr/>
         <p:txBody>
           <a:bodyPr/>
           <a:lstStyle/>
           <a:p>
             <a:r>
-              <a:rPr lang="en-IN" dirty="0"/>
+              <a:rPr sz="1000">
+                <a:solidFill>
+                  <a:srgbClr val="505050"/>
+                </a:solidFill>
+                <a:latin typeface="Times New Roman"/>
+              </a:rPr>
               <a:t>09-09-2026</a:t>
             </a:r>
-          </a:p>
-        </p:txBody>
-      </p:sp>
-      <p:sp>
-        <p:nvSpPr>
-          <p:cNvPr id="19" name="Footer Placeholder 4">
-            <a:extLst>
-              <a:ext uri="{FF2B5EF4-FFF2-40B4-BE49-F238E27FC236}">
-                <a16:creationId xmlns:a16="http://schemas.microsoft.com/office/drawing/2014/main" id="{9EF1397A-DA8B-30EF-626E-58B56055DA6A}"/>
+            <a:endParaRPr lang="en-IN"/>
+          </a:p>
+        </p:txBody>
+      </p:sp>
+      <p:sp>
+        <p:nvSpPr>
+          <p:cNvPr id="5" name="Footer Placeholder 4">
+            <a:extLst>
+              <a:ext uri="{FF2B5EF4-FFF2-40B4-BE49-F238E27FC236}">
+                <a16:creationId xmlns:a16="http://schemas.microsoft.com/office/drawing/2014/main" id="{1711DDA3-7A7C-1F61-1795-3A01ED678FAB}"/>
               </a:ext>
             </a:extLst>
           </p:cNvPr>
@@ -8792,12 +8987,7 @@
             <p:ph type="ftr" sz="quarter" idx="11"/>
           </p:nvPr>
         </p:nvSpPr>
-        <p:spPr>
-          <a:xfrm>
-            <a:off x="4038600" y="6356350"/>
-            <a:ext cx="4114800" cy="365125"/>
-          </a:xfrm>
-        </p:spPr>
+        <p:spPr/>
         <p:txBody>
           <a:bodyPr/>
           <a:lstStyle/>
@@ -8811,10 +9001,10 @@
       </p:sp>
       <p:sp>
         <p:nvSpPr>
-          <p:cNvPr id="20" name="Slide Number Placeholder 5">
-            <a:extLst>
-              <a:ext uri="{FF2B5EF4-FFF2-40B4-BE49-F238E27FC236}">
-                <a16:creationId xmlns:a16="http://schemas.microsoft.com/office/drawing/2014/main" id="{11F0607F-1C7E-E9D1-5757-986F3CEFFB73}"/>
+          <p:cNvPr id="6" name="Slide Number Placeholder 5">
+            <a:extLst>
+              <a:ext uri="{FF2B5EF4-FFF2-40B4-BE49-F238E27FC236}">
+                <a16:creationId xmlns:a16="http://schemas.microsoft.com/office/drawing/2014/main" id="{D94E3226-1DB1-3A4D-CE37-4A2AD48EF1F1}"/>
               </a:ext>
             </a:extLst>
           </p:cNvPr>
@@ -8825,12 +9015,7 @@
             <p:ph type="sldNum" sz="quarter" idx="12"/>
           </p:nvPr>
         </p:nvSpPr>
-        <p:spPr>
-          <a:xfrm>
-            <a:off x="8610600" y="6356350"/>
-            <a:ext cx="2743200" cy="365125"/>
-          </a:xfrm>
-        </p:spPr>
+        <p:spPr/>
         <p:txBody>
           <a:bodyPr/>
           <a:lstStyle/>
@@ -8898,112 +9083,108 @@
         <p:spPr>
           <a:xfrm>
             <a:off x="731520" y="1371600"/>
-            <a:ext cx="10515600" cy="2377440"/>
+            <a:ext cx="10515600" cy="2500000"/>
           </a:xfrm>
         </p:spPr>
         <p:txBody>
           <a:bodyPr>
-            <a:normAutofit lnSpcReduction="10000"/>
+            <a:normAutofit/>
           </a:bodyPr>
           <a:lstStyle/>
           <a:p>
-            <a:pPr marL="0" indent="0">
+            <a:pPr>
+              <a:spcBef>
+                <a:spcPts val="200"/>
+              </a:spcBef>
               <a:spcAft>
-                <a:spcPts val="100"/>
+                <a:spcPts val="200"/>
               </a:spcAft>
-              <a:buNone/>
             </a:pPr>
             <a:r>
-              <a:rPr lang="en-US" sz="1400" dirty="0"/>
+              <a:rPr sz="1100">
+                <a:solidFill>
+                  <a:srgbClr val="1E1E1E"/>
+                </a:solidFill>
+                <a:latin typeface="Times New Roman"/>
+              </a:rPr>
               <a:t>1.  Build a Temporal Shadow Graph from ERP transaction data, with a unified account namespace that makes structural patterns (cycles, chains) visible — fixing a critical identity-splitting bug in the predecessor.</a:t>
             </a:r>
           </a:p>
           <a:p>
-            <a:pPr marL="0" indent="0">
+            <a:pPr>
+              <a:spcBef>
+                <a:spcPts val="200"/>
+              </a:spcBef>
               <a:spcAft>
-                <a:spcPts val="100"/>
+                <a:spcPts val="200"/>
               </a:spcAft>
-              <a:buNone/>
             </a:pPr>
             <a:r>
-              <a:rPr lang="en-US" sz="1400" dirty="0"/>
+              <a:rPr sz="1100">
+                <a:solidFill>
+                  <a:srgbClr val="1E1E1E"/>
+                </a:solidFill>
+                <a:latin typeface="Times New Roman"/>
+              </a:rPr>
               <a:t>2.  Design a leakage-free Temporal Topology Engine that extracts structural fraud features (cycle detection, fan-in/fan-out density, lapping indicators) using strictly past-only streaming computation — with automated leakage tests as a safety gate.</a:t>
             </a:r>
           </a:p>
           <a:p>
-            <a:pPr marL="0" indent="0">
+            <a:pPr>
+              <a:spcBef>
+                <a:spcPts val="200"/>
+              </a:spcBef>
               <a:spcAft>
-                <a:spcPts val="100"/>
+                <a:spcPts val="200"/>
               </a:spcAft>
-              <a:buNone/>
             </a:pPr>
             <a:r>
-              <a:rPr lang="en-US" sz="1400" dirty="0"/>
-              <a:t>3.  Run a rigorous within-dataset ablation (baseline vs. baseline + topology) across four datasets spanning a range of graph richness (IBM AML, </a:t>
-            </a:r>
-            <a:r>
-              <a:rPr lang="en-US" sz="1400" dirty="0" err="1"/>
-              <a:t>BankSim</a:t>
-            </a:r>
-            <a:r>
-              <a:rPr lang="en-US" sz="1400" dirty="0"/>
-              <a:t>, SAP Würzburg, </a:t>
-            </a:r>
-            <a:r>
-              <a:rPr lang="en-US" sz="1400" dirty="0" err="1"/>
-              <a:t>PaySim</a:t>
-            </a:r>
-            <a:r>
-              <a:rPr lang="en-US" sz="1400" dirty="0"/>
-              <a:t>) — and report the result honestly, either way.</a:t>
-            </a:r>
-          </a:p>
-          <a:p>
-            <a:pPr marL="0" indent="0">
+              <a:rPr sz="1100">
+                <a:solidFill>
+                  <a:srgbClr val="1E1E1E"/>
+                </a:solidFill>
+                <a:latin typeface="Times New Roman"/>
+              </a:rPr>
+              <a:t>3.  Run a rigorous within-dataset ablation (baseline vs. baseline + topology) across four datasets spanning a range of graph richness (IBM AML, BankSim, SAP Würzburg, PaySim) — and report the result honestly, either way.</a:t>
+            </a:r>
+          </a:p>
+          <a:p>
+            <a:pPr>
+              <a:spcBef>
+                <a:spcPts val="200"/>
+              </a:spcBef>
               <a:spcAft>
-                <a:spcPts val="100"/>
+                <a:spcPts val="200"/>
               </a:spcAft>
-              <a:buNone/>
             </a:pPr>
             <a:r>
-              <a:rPr lang="en-US" sz="1400" dirty="0"/>
+              <a:rPr sz="1100">
+                <a:solidFill>
+                  <a:srgbClr val="1E1E1E"/>
+                </a:solidFill>
+                <a:latin typeface="Times New Roman"/>
+              </a:rPr>
               <a:t>4.  Produce explainable audit alerts combining SHAP feature explanations with the concrete suspicious graph path, shown in Neo4j — giving auditors both the reason and the evidence.</a:t>
             </a:r>
           </a:p>
           <a:p>
-            <a:pPr marL="0" indent="0">
+            <a:pPr>
+              <a:spcBef>
+                <a:spcPts val="200"/>
+              </a:spcBef>
               <a:spcAft>
-                <a:spcPts val="100"/>
+                <a:spcPts val="200"/>
               </a:spcAft>
-              <a:buNone/>
             </a:pPr>
             <a:r>
-              <a:rPr lang="en-US" sz="1400" dirty="0"/>
-              <a:t>5.  Generate a synthetic ERP fraud dataset with </a:t>
-            </a:r>
-            <a:r>
-              <a:rPr lang="en-US" sz="1400" dirty="0" err="1"/>
-              <a:t>behaviour</a:t>
-            </a:r>
-            <a:r>
-              <a:rPr lang="en-US" sz="1400" dirty="0"/>
-              <a:t>-driven fraud injection for controlled experimentation and future augmentation studies.</a:t>
-            </a:r>
-          </a:p>
-          <a:p>
-            <a:pPr marL="0" indent="0">
-              <a:spcAft>
-                <a:spcPts val="600"/>
-              </a:spcAft>
-              <a:buNone/>
-              <a:defRPr sz="1300">
-                <a:solidFill>
-                  <a:srgbClr val="000000"/>
-                </a:solidFill>
-                <a:latin typeface="Times New Roman"/>
-              </a:defRPr>
-            </a:pPr>
-            <a:endParaRPr dirty="0"/>
+              <a:rPr sz="1100">
+                <a:solidFill>
+                  <a:srgbClr val="1E1E1E"/>
+                </a:solidFill>
+                <a:latin typeface="Times New Roman"/>
+              </a:rPr>
+              <a:t>5.  Formulate a privacy-preserving federated consensus mechanism (FedProx) enabling multi-bank collaborative defense without pooling proprietary transaction data.</a:t>
+            </a:r>
           </a:p>
         </p:txBody>
       </p:sp>
@@ -9081,17 +9262,19 @@
           <a:bodyPr/>
           <a:lstStyle/>
           <a:p>
-            <a:pPr>
-              <a:defRPr sz="1200">
-                <a:solidFill>
-                  <a:srgbClr val="323232"/>
-                </a:solidFill>
-                <a:latin typeface="Times New Roman"/>
-              </a:defRPr>
-            </a:pPr>
-            <a:r>
+            <a:r>
+              <a:rPr sz="1000">
+                <a:solidFill>
+                  <a:srgbClr val="505050"/>
+                </a:solidFill>
+                <a:latin typeface="Times New Roman"/>
+              </a:rPr>
               <a:t>09-09-2026</a:t>
             </a:r>
+            <a:endParaRPr lang="en-IN">
+              <a:latin typeface="Times New Roman" panose="02020603050405020304" pitchFamily="18" charset="0"/>
+              <a:cs typeface="Times New Roman" panose="02020603050405020304" pitchFamily="18" charset="0"/>
+            </a:endParaRPr>
           </a:p>
         </p:txBody>
       </p:sp>
@@ -9116,15 +9299,11 @@
           <a:bodyPr/>
           <a:lstStyle/>
           <a:p>
-            <a:pPr>
-              <a:defRPr sz="1200">
-                <a:solidFill>
-                  <a:srgbClr val="323232"/>
-                </a:solidFill>
-                <a:latin typeface="Times New Roman"/>
-              </a:defRPr>
-            </a:pPr>
-            <a:r>
+            <a:r>
+              <a:rPr lang="en-IN" dirty="0">
+                <a:latin typeface="Times New Roman" panose="02020603050405020304" pitchFamily="18" charset="0"/>
+                <a:cs typeface="Times New Roman" panose="02020603050405020304" pitchFamily="18" charset="0"/>
+              </a:rPr>
               <a:t>SCOPE</a:t>
             </a:r>
           </a:p>
@@ -9151,17 +9330,17 @@
           <a:bodyPr/>
           <a:lstStyle/>
           <a:p>
-            <a:pPr>
-              <a:defRPr sz="1200">
-                <a:solidFill>
-                  <a:srgbClr val="323232"/>
-                </a:solidFill>
-                <a:latin typeface="Times New Roman"/>
-              </a:defRPr>
-            </a:pPr>
-            <a:r>
+            <a:fld id="{65201FD4-9D8D-4491-815B-63C7BF4F0034}" type="slidenum">
+              <a:rPr lang="en-IN" smtClean="0">
+                <a:latin typeface="Times New Roman" panose="02020603050405020304" pitchFamily="18" charset="0"/>
+                <a:cs typeface="Times New Roman" panose="02020603050405020304" pitchFamily="18" charset="0"/>
+              </a:rPr>
               <a:t>7</a:t>
-            </a:r>
+            </a:fld>
+            <a:endParaRPr lang="en-IN" dirty="0">
+              <a:latin typeface="Times New Roman" panose="02020603050405020304" pitchFamily="18" charset="0"/>
+              <a:cs typeface="Times New Roman" panose="02020603050405020304" pitchFamily="18" charset="0"/>
+            </a:endParaRPr>
           </a:p>
         </p:txBody>
       </p:sp>
@@ -9193,16 +9372,13 @@
           </a:bodyPr>
           <a:lstStyle/>
           <a:p>
-            <a:pPr>
-              <a:defRPr sz="1300" b="1">
-                <a:solidFill>
-                  <a:srgbClr val="365F91"/>
-                </a:solidFill>
-                <a:latin typeface="Times New Roman"/>
-              </a:defRPr>
-            </a:pPr>
-            <a:r>
-              <a:rPr dirty="0"/>
+            <a:r>
+              <a:rPr sz="1100" b="1">
+                <a:solidFill>
+                  <a:srgbClr val="003366"/>
+                </a:solidFill>
+                <a:latin typeface="Times New Roman"/>
+              </a:rPr>
               <a:t>Identified: Sustainable Development Goals   |   TECHNOLOGY READINESS LEVEL (TRL)   |   Projected Outcomes</a:t>
             </a:r>
           </a:p>
@@ -9260,7 +9436,7 @@
         </p:blipFill>
         <p:spPr>
           <a:xfrm>
-            <a:off x="4765806" y="4252467"/>
+            <a:off x="5237545" y="4413148"/>
             <a:ext cx="2447027" cy="2232651"/>
           </a:xfrm>
           <a:prstGeom prst="rect">
@@ -9276,8 +9452,8 @@
         </p:nvSpPr>
         <p:spPr>
           <a:xfrm>
-            <a:off x="7559448" y="4682993"/>
-            <a:ext cx="4114800" cy="1371600"/>
+            <a:off x="7559448" y="4450000"/>
+            <a:ext cx="4114800" cy="1700000"/>
           </a:xfrm>
           <a:prstGeom prst="rect">
             <a:avLst/>
@@ -9291,51 +9467,87 @@
           <a:lstStyle/>
           <a:p>
             <a:pPr>
-              <a:defRPr sz="1100">
-                <a:solidFill>
-                  <a:srgbClr val="000000"/>
-                </a:solidFill>
-                <a:latin typeface="Times New Roman"/>
-              </a:defRPr>
+              <a:spcBef>
+                <a:spcPts val="200"/>
+              </a:spcBef>
+              <a:spcAft>
+                <a:spcPts val="200"/>
+              </a:spcAft>
             </a:pPr>
             <a:r>
-              <a:rPr dirty="0"/>
-              <a:t>• SDGs Mapped: SDG 8 (Decent Work &amp; Growth), SDG 9 (Innovation), SDG 16 (Peace &amp; Strong Institutions)</a:t>
+              <a:rPr sz="1050" b="1">
+                <a:solidFill>
+                  <a:srgbClr val="003366"/>
+                </a:solidFill>
+                <a:latin typeface="Times New Roman"/>
+              </a:rPr>
+              <a:t>• SDGs Mapped: </a:t>
+            </a:r>
+            <a:r>
+              <a:rPr sz="1000">
+                <a:solidFill>
+                  <a:srgbClr val="1E1E1E"/>
+                </a:solidFill>
+                <a:latin typeface="Times New Roman"/>
+              </a:rPr>
+              <a:t>SDG 8 (Decent Work &amp; Growth), SDG 9 (Industry &amp; Innovation), SDG 16 (Peace, Justice &amp; Strong Institutions)</a:t>
             </a:r>
           </a:p>
           <a:p>
             <a:pPr>
-              <a:defRPr sz="1100">
-                <a:solidFill>
-                  <a:srgbClr val="000000"/>
-                </a:solidFill>
-                <a:latin typeface="Times New Roman"/>
-              </a:defRPr>
+              <a:spcBef>
+                <a:spcPts val="200"/>
+              </a:spcBef>
+              <a:spcAft>
+                <a:spcPts val="200"/>
+              </a:spcAft>
             </a:pPr>
             <a:r>
-              <a:rPr dirty="0"/>
-              <a:t>• Current TRL: TRL 6 - 7 (System prototype demonstrated in operational environment)</a:t>
+              <a:rPr sz="1050" b="1">
+                <a:solidFill>
+                  <a:srgbClr val="003366"/>
+                </a:solidFill>
+                <a:latin typeface="Times New Roman"/>
+              </a:rPr>
+              <a:t>• Current TRL: </a:t>
+            </a:r>
+            <a:r>
+              <a:rPr sz="1000">
+                <a:solidFill>
+                  <a:srgbClr val="1E1E1E"/>
+                </a:solidFill>
+                <a:latin typeface="Times New Roman"/>
+              </a:rPr>
+              <a:t>TRL 6 - 7 (System prototype demonstrated in operational environment)</a:t>
             </a:r>
           </a:p>
           <a:p>
             <a:pPr>
-              <a:defRPr sz="1100">
-                <a:solidFill>
-                  <a:srgbClr val="000000"/>
-                </a:solidFill>
-                <a:latin typeface="Times New Roman"/>
-              </a:defRPr>
+              <a:spcBef>
+                <a:spcPts val="200"/>
+              </a:spcBef>
+              <a:spcAft>
+                <a:spcPts val="200"/>
+              </a:spcAft>
             </a:pPr>
             <a:r>
-              <a:rPr dirty="0"/>
-              <a:t>• Target Outcomes: • Scopus-Indexed Journal / Conference Publication</a:t>
-            </a:r>
-            <a:br>
-              <a:rPr dirty="0"/>
-            </a:br>
-            <a:r>
-              <a:rPr dirty="0"/>
-              <a:t>• Open-Source Forensic Auditing Package &amp; Live Tool</a:t>
+              <a:rPr sz="1050" b="1">
+                <a:solidFill>
+                  <a:srgbClr val="003366"/>
+                </a:solidFill>
+                <a:latin typeface="Times New Roman"/>
+              </a:rPr>
+              <a:t>• Target Outcomes: </a:t>
+            </a:r>
+            <a:r>
+              <a:rPr sz="1000">
+                <a:solidFill>
+                  <a:srgbClr val="1E1E1E"/>
+                </a:solidFill>
+                <a:latin typeface="Times New Roman"/>
+              </a:rPr>
+              <a:t>• Scopus-Indexed Journal / Conference Publication
+• Open-Source Forensic Auditing Package &amp; Live Tool</a:t>
             </a:r>
           </a:p>
         </p:txBody>
@@ -9450,17 +9662,19 @@
           <a:bodyPr/>
           <a:lstStyle/>
           <a:p>
-            <a:pPr>
-              <a:defRPr sz="1200">
-                <a:solidFill>
-                  <a:srgbClr val="323232"/>
-                </a:solidFill>
-                <a:latin typeface="Times New Roman"/>
-              </a:defRPr>
-            </a:pPr>
-            <a:r>
+            <a:r>
+              <a:rPr sz="1000">
+                <a:solidFill>
+                  <a:srgbClr val="505050"/>
+                </a:solidFill>
+                <a:latin typeface="Times New Roman"/>
+              </a:rPr>
               <a:t>09-09-2026</a:t>
             </a:r>
+            <a:endParaRPr lang="en-IN">
+              <a:latin typeface="Times New Roman" panose="02020603050405020304" pitchFamily="18" charset="0"/>
+              <a:cs typeface="Times New Roman" panose="02020603050405020304" pitchFamily="18" charset="0"/>
+            </a:endParaRPr>
           </a:p>
         </p:txBody>
       </p:sp>
@@ -9485,15 +9699,11 @@
           <a:bodyPr/>
           <a:lstStyle/>
           <a:p>
-            <a:pPr>
-              <a:defRPr sz="1200">
-                <a:solidFill>
-                  <a:srgbClr val="323232"/>
-                </a:solidFill>
-                <a:latin typeface="Times New Roman"/>
-              </a:defRPr>
-            </a:pPr>
-            <a:r>
+            <a:r>
+              <a:rPr lang="en-IN" dirty="0">
+                <a:latin typeface="Times New Roman" panose="02020603050405020304" pitchFamily="18" charset="0"/>
+                <a:cs typeface="Times New Roman" panose="02020603050405020304" pitchFamily="18" charset="0"/>
+              </a:rPr>
               <a:t>SCOPE</a:t>
             </a:r>
           </a:p>
@@ -9520,17 +9730,17 @@
           <a:bodyPr/>
           <a:lstStyle/>
           <a:p>
-            <a:pPr>
-              <a:defRPr sz="1200">
-                <a:solidFill>
-                  <a:srgbClr val="323232"/>
-                </a:solidFill>
-                <a:latin typeface="Times New Roman"/>
-              </a:defRPr>
-            </a:pPr>
-            <a:r>
+            <a:fld id="{65201FD4-9D8D-4491-815B-63C7BF4F0034}" type="slidenum">
+              <a:rPr lang="en-IN" smtClean="0">
+                <a:latin typeface="Times New Roman" panose="02020603050405020304" pitchFamily="18" charset="0"/>
+                <a:cs typeface="Times New Roman" panose="02020603050405020304" pitchFamily="18" charset="0"/>
+              </a:rPr>
               <a:t>8</a:t>
-            </a:r>
+            </a:fld>
+            <a:endParaRPr lang="en-IN" dirty="0">
+              <a:latin typeface="Times New Roman" panose="02020603050405020304" pitchFamily="18" charset="0"/>
+              <a:cs typeface="Times New Roman" panose="02020603050405020304" pitchFamily="18" charset="0"/>
+            </a:endParaRPr>
           </a:p>
         </p:txBody>
       </p:sp>
@@ -9553,7 +9763,7 @@
           </a:solidFill>
           <a:ln w="19050">
             <a:solidFill>
-              <a:srgbClr val="365F91"/>
+              <a:srgbClr val="B4C8E1"/>
             </a:solidFill>
           </a:ln>
         </p:spPr>
@@ -9572,42 +9782,78 @@
           </a:fontRef>
         </p:style>
         <p:txBody>
-          <a:bodyPr wrap="square" lIns="137160" tIns="137160" rIns="137160" bIns="137160" rtlCol="0" anchor="ctr"/>
+          <a:bodyPr rtlCol="0" anchor="ctr" wrap="square"/>
           <a:lstStyle/>
           <a:p>
             <a:pPr algn="ctr">
               <a:spcAft>
-                <a:spcPts val="1200"/>
+                <a:spcPts val="800"/>
               </a:spcAft>
-              <a:defRPr sz="1400" b="1">
-                <a:solidFill>
-                  <a:srgbClr val="1E3A6E"/>
-                </a:solidFill>
-                <a:latin typeface="Times New Roman"/>
-              </a:defRPr>
             </a:pPr>
             <a:r>
+              <a:rPr sz="1200" b="1">
+                <a:solidFill>
+                  <a:srgbClr val="003366"/>
+                </a:solidFill>
+                <a:latin typeface="Times New Roman"/>
+              </a:rPr>
               <a:t>Stage 1: Ingestion &amp; Bipartite Projection</a:t>
             </a:r>
           </a:p>
           <a:p>
             <a:pPr>
-              <a:defRPr sz="1200">
-                <a:solidFill>
-                  <a:srgbClr val="000000"/>
-                </a:solidFill>
-                <a:latin typeface="Times New Roman"/>
-              </a:defRPr>
+              <a:spcBef>
+                <a:spcPts val="400"/>
+              </a:spcBef>
+              <a:spcAft>
+                <a:spcPts val="400"/>
+              </a:spcAft>
             </a:pPr>
             <a:r>
+              <a:rPr sz="1050">
+                <a:solidFill>
+                  <a:srgbClr val="1E1E1E"/>
+                </a:solidFill>
+                <a:latin typeface="Times New Roman"/>
+              </a:rPr>
               <a:t>• Ingests raw ERP journals (SAP BKPF/BSEG, BankSim, IBM AML)</a:t>
             </a:r>
-            <a:br/>
-            <a:r>
+          </a:p>
+          <a:p>
+            <a:pPr>
+              <a:spcBef>
+                <a:spcPts val="400"/>
+              </a:spcBef>
+              <a:spcAft>
+                <a:spcPts val="400"/>
+              </a:spcAft>
+            </a:pPr>
+            <a:r>
+              <a:rPr sz="1050">
+                <a:solidFill>
+                  <a:srgbClr val="1E1E1E"/>
+                </a:solidFill>
+                <a:latin typeface="Times New Roman"/>
+              </a:rPr>
               <a:t>• Resolves disparate account identifiers into canonical bipartite graph</a:t>
             </a:r>
-            <a:br/>
-            <a:r>
+          </a:p>
+          <a:p>
+            <a:pPr>
+              <a:spcBef>
+                <a:spcPts val="400"/>
+              </a:spcBef>
+              <a:spcAft>
+                <a:spcPts val="400"/>
+              </a:spcAft>
+            </a:pPr>
+            <a:r>
+              <a:rPr sz="1050">
+                <a:solidFill>
+                  <a:srgbClr val="1E1E1E"/>
+                </a:solidFill>
+                <a:latin typeface="Times New Roman"/>
+              </a:rPr>
               <a:t>• Enforces chronological event queuing without lookahead</a:t>
             </a:r>
           </a:p>
@@ -9632,7 +9878,7 @@
           </a:solidFill>
           <a:ln w="19050">
             <a:solidFill>
-              <a:srgbClr val="365F91"/>
+              <a:srgbClr val="B4C8E1"/>
             </a:solidFill>
           </a:ln>
         </p:spPr>
@@ -9651,43 +9897,79 @@
           </a:fontRef>
         </p:style>
         <p:txBody>
-          <a:bodyPr wrap="square" lIns="137160" tIns="137160" rIns="137160" bIns="137160" rtlCol="0" anchor="ctr"/>
+          <a:bodyPr rtlCol="0" anchor="ctr" wrap="square"/>
           <a:lstStyle/>
           <a:p>
             <a:pPr algn="ctr">
               <a:spcAft>
-                <a:spcPts val="1200"/>
+                <a:spcPts val="800"/>
               </a:spcAft>
-              <a:defRPr sz="1400" b="1">
-                <a:solidFill>
-                  <a:srgbClr val="1E3A6E"/>
-                </a:solidFill>
-                <a:latin typeface="Times New Roman"/>
-              </a:defRPr>
             </a:pPr>
             <a:r>
+              <a:rPr sz="1200" b="1">
+                <a:solidFill>
+                  <a:srgbClr val="003366"/>
+                </a:solidFill>
+                <a:latin typeface="Times New Roman"/>
+              </a:rPr>
               <a:t>Stage 2: Streaming Zero-Lookahead Topology Engine</a:t>
             </a:r>
           </a:p>
           <a:p>
             <a:pPr>
-              <a:defRPr sz="1200">
-                <a:solidFill>
-                  <a:srgbClr val="000000"/>
-                </a:solidFill>
-                <a:latin typeface="Times New Roman"/>
-              </a:defRPr>
+              <a:spcBef>
+                <a:spcPts val="400"/>
+              </a:spcBef>
+              <a:spcAft>
+                <a:spcPts val="400"/>
+              </a:spcAft>
             </a:pPr>
             <a:r>
-              <a:t>• Streaming sliding-window graph (1h, 24h, 7d windows)</a:t>
-            </a:r>
-            <a:br/>
-            <a:r>
+              <a:rPr sz="1050">
+                <a:solidFill>
+                  <a:srgbClr val="1E1E1E"/>
+                </a:solidFill>
+                <a:latin typeface="Times New Roman"/>
+              </a:rPr>
+              <a:t>• Streaming sliding-window graph (1h, 24h, 7d trailing windows)</a:t>
+            </a:r>
+          </a:p>
+          <a:p>
+            <a:pPr>
+              <a:spcBef>
+                <a:spcPts val="400"/>
+              </a:spcBef>
+              <a:spcAft>
+                <a:spcPts val="400"/>
+              </a:spcAft>
+            </a:pPr>
+            <a:r>
+              <a:rPr sz="1050">
+                <a:solidFill>
+                  <a:srgbClr val="1E1E1E"/>
+                </a:solidFill>
+                <a:latin typeface="Times New Roman"/>
+              </a:rPr>
               <a:t>• Dynamically computes in/out degree, fan-in ratio, and cycles</a:t>
             </a:r>
-            <a:br/>
-            <a:r>
-              <a:t>• Strict temporal invariance: k-th event invariant to (k+1..N)</a:t>
+          </a:p>
+          <a:p>
+            <a:pPr>
+              <a:spcBef>
+                <a:spcPts val="400"/>
+              </a:spcBef>
+              <a:spcAft>
+                <a:spcPts val="400"/>
+              </a:spcAft>
+            </a:pPr>
+            <a:r>
+              <a:rPr sz="1050">
+                <a:solidFill>
+                  <a:srgbClr val="1E1E1E"/>
+                </a:solidFill>
+                <a:latin typeface="Times New Roman"/>
+              </a:rPr>
+              <a:t>• Strict temporal invariance: k-th event invariant to future (k+1..N)</a:t>
             </a:r>
           </a:p>
         </p:txBody>
@@ -9711,7 +9993,7 @@
           </a:solidFill>
           <a:ln w="19050">
             <a:solidFill>
-              <a:srgbClr val="365F91"/>
+              <a:srgbClr val="B4C8E1"/>
             </a:solidFill>
           </a:ln>
         </p:spPr>
@@ -9730,43 +10012,79 @@
           </a:fontRef>
         </p:style>
         <p:txBody>
-          <a:bodyPr wrap="square" lIns="137160" tIns="137160" rIns="137160" bIns="137160" rtlCol="0" anchor="ctr"/>
+          <a:bodyPr rtlCol="0" anchor="ctr" wrap="square"/>
           <a:lstStyle/>
           <a:p>
             <a:pPr algn="ctr">
               <a:spcAft>
-                <a:spcPts val="1200"/>
+                <a:spcPts val="800"/>
               </a:spcAft>
-              <a:defRPr sz="1400" b="1">
-                <a:solidFill>
-                  <a:srgbClr val="1E3A6E"/>
-                </a:solidFill>
-                <a:latin typeface="Times New Roman"/>
-              </a:defRPr>
             </a:pPr>
             <a:r>
+              <a:rPr sz="1200" b="1">
+                <a:solidFill>
+                  <a:srgbClr val="003366"/>
+                </a:solidFill>
+                <a:latin typeface="Times New Roman"/>
+              </a:rPr>
               <a:t>Stage 3: Hybrid Modeling &amp; Representation</a:t>
             </a:r>
           </a:p>
           <a:p>
             <a:pPr>
-              <a:defRPr sz="1200">
-                <a:solidFill>
-                  <a:srgbClr val="000000"/>
-                </a:solidFill>
-                <a:latin typeface="Times New Roman"/>
-              </a:defRPr>
+              <a:spcBef>
+                <a:spcPts val="400"/>
+              </a:spcBef>
+              <a:spcAft>
+                <a:spcPts val="400"/>
+              </a:spcAft>
             </a:pPr>
             <a:r>
-              <a:t>• Chronological train/validation/test temporal splits (multi-seed)</a:t>
-            </a:r>
-            <a:br/>
-            <a:r>
-              <a:t>• Cost-sensitive XGBoost with focal / positive class weighting</a:t>
-            </a:r>
-            <a:br/>
-            <a:r>
-              <a:t>• Continuous-time Temporal Graph Network (TGN) memory</a:t>
+              <a:rPr sz="1050">
+                <a:solidFill>
+                  <a:srgbClr val="1E1E1E"/>
+                </a:solidFill>
+                <a:latin typeface="Times New Roman"/>
+              </a:rPr>
+              <a:t>• Chronological train/val/test temporal splits (multi-seed)</a:t>
+            </a:r>
+          </a:p>
+          <a:p>
+            <a:pPr>
+              <a:spcBef>
+                <a:spcPts val="400"/>
+              </a:spcBef>
+              <a:spcAft>
+                <a:spcPts val="400"/>
+              </a:spcAft>
+            </a:pPr>
+            <a:r>
+              <a:rPr sz="1050">
+                <a:solidFill>
+                  <a:srgbClr val="1E1E1E"/>
+                </a:solidFill>
+                <a:latin typeface="Times New Roman"/>
+              </a:rPr>
+              <a:t>• Cost-sensitive XGBoost with alpha-free focal loss &amp; Bayesian HPO</a:t>
+            </a:r>
+          </a:p>
+          <a:p>
+            <a:pPr>
+              <a:spcBef>
+                <a:spcPts val="400"/>
+              </a:spcBef>
+              <a:spcAft>
+                <a:spcPts val="400"/>
+              </a:spcAft>
+            </a:pPr>
+            <a:r>
+              <a:rPr sz="1050">
+                <a:solidFill>
+                  <a:srgbClr val="1E1E1E"/>
+                </a:solidFill>
+                <a:latin typeface="Times New Roman"/>
+              </a:rPr>
+              <a:t>• Continuous-time Temporal Graph Network (TGN) dynamic GRU memory</a:t>
             </a:r>
           </a:p>
         </p:txBody>
@@ -9790,7 +10108,7 @@
           </a:solidFill>
           <a:ln w="19050">
             <a:solidFill>
-              <a:srgbClr val="365F91"/>
+              <a:srgbClr val="B4C8E1"/>
             </a:solidFill>
           </a:ln>
         </p:spPr>
@@ -9809,43 +10127,79 @@
           </a:fontRef>
         </p:style>
         <p:txBody>
-          <a:bodyPr wrap="square" lIns="137160" tIns="137160" rIns="137160" bIns="137160" rtlCol="0" anchor="ctr"/>
+          <a:bodyPr rtlCol="0" anchor="ctr" wrap="square"/>
           <a:lstStyle/>
           <a:p>
             <a:pPr algn="ctr">
               <a:spcAft>
-                <a:spcPts val="1200"/>
+                <a:spcPts val="800"/>
               </a:spcAft>
-              <a:defRPr sz="1400" b="1">
-                <a:solidFill>
-                  <a:srgbClr val="1E3A6E"/>
-                </a:solidFill>
-                <a:latin typeface="Times New Roman"/>
-              </a:defRPr>
             </a:pPr>
             <a:r>
+              <a:rPr sz="1200" b="1">
+                <a:solidFill>
+                  <a:srgbClr val="003366"/>
+                </a:solidFill>
+                <a:latin typeface="Times New Roman"/>
+              </a:rPr>
               <a:t>Stage 4: Dual-Layer Explainability &amp; Audit Dispatch</a:t>
             </a:r>
           </a:p>
           <a:p>
             <a:pPr>
-              <a:defRPr sz="1200">
-                <a:solidFill>
-                  <a:srgbClr val="000000"/>
-                </a:solidFill>
-                <a:latin typeface="Times New Roman"/>
-              </a:defRPr>
+              <a:spcBef>
+                <a:spcPts val="400"/>
+              </a:spcBef>
+              <a:spcAft>
+                <a:spcPts val="400"/>
+              </a:spcAft>
             </a:pPr>
             <a:r>
+              <a:rPr sz="1050">
+                <a:solidFill>
+                  <a:srgbClr val="1E1E1E"/>
+                </a:solidFill>
+                <a:latin typeface="Times New Roman"/>
+              </a:rPr>
               <a:t>• Exact TreeSHAP local feature attribution breakdown</a:t>
             </a:r>
-            <a:br/>
-            <a:r>
+          </a:p>
+          <a:p>
+            <a:pPr>
+              <a:spcBef>
+                <a:spcPts val="400"/>
+              </a:spcBef>
+              <a:spcAft>
+                <a:spcPts val="400"/>
+              </a:spcAft>
+            </a:pPr>
+            <a:r>
+              <a:rPr sz="1050">
+                <a:solidFill>
+                  <a:srgbClr val="1E1E1E"/>
+                </a:solidFill>
+                <a:latin typeface="Times New Roman"/>
+              </a:rPr>
               <a:t>• Automated Cypher queries extracting 2-hop to 3-hop money paths</a:t>
             </a:r>
-            <a:br/>
-            <a:r>
-              <a:t>• Interactive Neo4j visual graph replay for forensic auditors</a:t>
+          </a:p>
+          <a:p>
+            <a:pPr>
+              <a:spcBef>
+                <a:spcPts val="400"/>
+              </a:spcBef>
+              <a:spcAft>
+                <a:spcPts val="400"/>
+              </a:spcAft>
+            </a:pPr>
+            <a:r>
+              <a:rPr sz="1050">
+                <a:solidFill>
+                  <a:srgbClr val="1E1E1E"/>
+                </a:solidFill>
+                <a:latin typeface="Times New Roman"/>
+              </a:rPr>
+              <a:t>• Interactive Neo4j visual graph replay for statutory SOX auditors</a:t>
             </a:r>
           </a:p>
         </p:txBody>
@@ -9902,112 +10256,211 @@
             <p:ph idx="1"/>
           </p:nvPr>
         </p:nvSpPr>
-        <p:spPr/>
+        <p:spPr>
+          <a:xfrm>
+            <a:off x="0" y="1450000"/>
+            <a:ext cx="0" cy="4750000"/>
+          </a:xfrm>
+        </p:spPr>
         <p:txBody>
           <a:bodyPr>
             <a:normAutofit/>
           </a:bodyPr>
           <a:lstStyle/>
           <a:p>
-            <a:pPr lvl="0"/>
-            <a:r>
-              <a:rPr lang="en-US" sz="1600" b="1" dirty="0">
-                <a:latin typeface="Times New Roman" panose="02020603050405020304" pitchFamily="18" charset="0"/>
-                <a:cs typeface="Times New Roman" panose="02020603050405020304" pitchFamily="18" charset="0"/>
-              </a:rPr>
-              <a:t>Real-Time Transaction Ingestion:</a:t>
-            </a:r>
-            <a:r>
-              <a:rPr lang="en-US" sz="1600" dirty="0">
-                <a:latin typeface="Times New Roman" panose="02020603050405020304" pitchFamily="18" charset="0"/>
-                <a:cs typeface="Times New Roman" panose="02020603050405020304" pitchFamily="18" charset="0"/>
-              </a:rPr>
-              <a:t> Continuously accept ERP financial records and convert them into a live account-to-account network.</a:t>
-            </a:r>
-          </a:p>
-          <a:p>
-            <a:pPr lvl="0"/>
-            <a:r>
-              <a:rPr lang="en-US" sz="1600" b="1" dirty="0">
-                <a:latin typeface="Times New Roman" panose="02020603050405020304" pitchFamily="18" charset="0"/>
-                <a:cs typeface="Times New Roman" panose="02020603050405020304" pitchFamily="18" charset="0"/>
-              </a:rPr>
-              <a:t>Past-Only Graph Feature Extraction:</a:t>
-            </a:r>
-            <a:r>
-              <a:rPr lang="en-US" sz="1600" dirty="0">
-                <a:latin typeface="Times New Roman" panose="02020603050405020304" pitchFamily="18" charset="0"/>
-                <a:cs typeface="Times New Roman" panose="02020603050405020304" pitchFamily="18" charset="0"/>
-              </a:rPr>
-              <a:t> Calculate network patterns (money-mule funnels, transaction bursts, circular flows) using strictly past data to prevent cheating/leakage.</a:t>
-            </a:r>
-          </a:p>
-          <a:p>
-            <a:pPr lvl="0"/>
-            <a:r>
-              <a:rPr lang="en-US" sz="1600" b="1" dirty="0">
-                <a:latin typeface="Times New Roman" panose="02020603050405020304" pitchFamily="18" charset="0"/>
-                <a:cs typeface="Times New Roman" panose="02020603050405020304" pitchFamily="18" charset="0"/>
-              </a:rPr>
-              <a:t>Automated Anti-Leakage Testing:</a:t>
-            </a:r>
-            <a:r>
-              <a:rPr lang="en-US" sz="1600" dirty="0">
-                <a:latin typeface="Times New Roman" panose="02020603050405020304" pitchFamily="18" charset="0"/>
-                <a:cs typeface="Times New Roman" panose="02020603050405020304" pitchFamily="18" charset="0"/>
-              </a:rPr>
-              <a:t> Automatically verify that future transactions never affect past transaction risk scores.</a:t>
-            </a:r>
-          </a:p>
-          <a:p>
-            <a:pPr lvl="0"/>
-            <a:r>
-              <a:rPr lang="en-US" sz="1600" b="1" dirty="0">
-                <a:latin typeface="Times New Roman" panose="02020603050405020304" pitchFamily="18" charset="0"/>
-                <a:cs typeface="Times New Roman" panose="02020603050405020304" pitchFamily="18" charset="0"/>
-              </a:rPr>
-              <a:t>Fraud Risk Scoring:</a:t>
-            </a:r>
-            <a:r>
-              <a:rPr lang="en-US" sz="1600" dirty="0">
-                <a:latin typeface="Times New Roman" panose="02020603050405020304" pitchFamily="18" charset="0"/>
-                <a:cs typeface="Times New Roman" panose="02020603050405020304" pitchFamily="18" charset="0"/>
-              </a:rPr>
-              <a:t> Predict calibrated risk scores (0% to 100%) for each transaction, optimized for highly imbalanced fraud data.</a:t>
-            </a:r>
-          </a:p>
-          <a:p>
-            <a:pPr lvl="0"/>
-            <a:r>
-              <a:rPr lang="en-US" sz="1600" b="1" dirty="0">
-                <a:latin typeface="Times New Roman" panose="02020603050405020304" pitchFamily="18" charset="0"/>
-                <a:cs typeface="Times New Roman" panose="02020603050405020304" pitchFamily="18" charset="0"/>
-              </a:rPr>
-              <a:t>Forensic Feature Explanations:</a:t>
-            </a:r>
-            <a:r>
-              <a:rPr lang="en-US" sz="1600" dirty="0">
-                <a:latin typeface="Times New Roman" panose="02020603050405020304" pitchFamily="18" charset="0"/>
-                <a:cs typeface="Times New Roman" panose="02020603050405020304" pitchFamily="18" charset="0"/>
-              </a:rPr>
-              <a:t> Clearly show which specific indicators (amount, speed, network shape) triggered each fraud alert.</a:t>
-            </a:r>
-          </a:p>
-          <a:p>
-            <a:pPr lvl="0"/>
-            <a:r>
-              <a:rPr lang="en-US" sz="1600" b="1" dirty="0">
-                <a:latin typeface="Times New Roman" panose="02020603050405020304" pitchFamily="18" charset="0"/>
-                <a:cs typeface="Times New Roman" panose="02020603050405020304" pitchFamily="18" charset="0"/>
-              </a:rPr>
-              <a:t>Visual Money-Path Reconstruction:</a:t>
-            </a:r>
-            <a:r>
-              <a:rPr lang="en-US" sz="1600" dirty="0">
-                <a:latin typeface="Times New Roman" panose="02020603050405020304" pitchFamily="18" charset="0"/>
-                <a:cs typeface="Times New Roman" panose="02020603050405020304" pitchFamily="18" charset="0"/>
-              </a:rPr>
-              <a:t> Trace and display the suspicious chain of transfers in an interactive graph (Neo4j) for human auditor</a:t>
+            <a:pPr>
+              <a:spcBef>
+                <a:spcPts val="300"/>
+              </a:spcBef>
+              <a:spcAft>
+                <a:spcPts val="300"/>
+              </a:spcAft>
+            </a:pPr>
+            <a:r>
+              <a:rPr sz="1200" b="1">
+                <a:solidFill>
+                  <a:srgbClr val="003366"/>
+                </a:solidFill>
+                <a:latin typeface="Times New Roman"/>
+              </a:rPr>
+              <a:t>Real-Time Transaction Ingestion: </a:t>
+            </a:r>
+            <a:r>
+              <a:rPr sz="1150">
+                <a:solidFill>
+                  <a:srgbClr val="1E1E1E"/>
+                </a:solidFill>
+                <a:latin typeface="Times New Roman"/>
+              </a:rPr>
+              <a:t>Continuously accept ERP financial records and convert them into a live account-to-account network with unified entity namespaces.</a:t>
+            </a:r>
+          </a:p>
+          <a:p>
+            <a:pPr>
+              <a:spcBef>
+                <a:spcPts val="300"/>
+              </a:spcBef>
+              <a:spcAft>
+                <a:spcPts val="300"/>
+              </a:spcAft>
+            </a:pPr>
+            <a:r>
+              <a:rPr sz="1200" b="1">
+                <a:solidFill>
+                  <a:srgbClr val="003366"/>
+                </a:solidFill>
+                <a:latin typeface="Times New Roman"/>
+              </a:rPr>
+              <a:t>Past-Only Graph Feature Extraction: </a:t>
+            </a:r>
+            <a:r>
+              <a:rPr sz="1150">
+                <a:solidFill>
+                  <a:srgbClr val="1E1E1E"/>
+                </a:solidFill>
+                <a:latin typeface="Times New Roman"/>
+              </a:rPr>
+              <a:t>Calculate network patterns (money-mule funnels, transaction bursts, circular flows) using strictly past data to prevent cheating/leakage.</a:t>
+            </a:r>
+          </a:p>
+          <a:p>
+            <a:pPr>
+              <a:spcBef>
+                <a:spcPts val="300"/>
+              </a:spcBef>
+              <a:spcAft>
+                <a:spcPts val="300"/>
+              </a:spcAft>
+            </a:pPr>
+            <a:r>
+              <a:rPr sz="1200" b="1">
+                <a:solidFill>
+                  <a:srgbClr val="003366"/>
+                </a:solidFill>
+                <a:latin typeface="Times New Roman"/>
+              </a:rPr>
+              <a:t>Automated Anti-Leakage Testing: </a:t>
+            </a:r>
+            <a:r>
+              <a:rPr sz="1150">
+                <a:solidFill>
+                  <a:srgbClr val="1E1E1E"/>
+                </a:solidFill>
+                <a:latin typeface="Times New Roman"/>
+              </a:rPr>
+              <a:t>Automatically verify through invariance regression tests that future transactions never affect past transaction risk scores.</a:t>
+            </a:r>
+          </a:p>
+          <a:p>
+            <a:pPr>
+              <a:spcBef>
+                <a:spcPts val="300"/>
+              </a:spcBef>
+              <a:spcAft>
+                <a:spcPts val="300"/>
+              </a:spcAft>
+            </a:pPr>
+            <a:r>
+              <a:rPr sz="1200" b="1">
+                <a:solidFill>
+                  <a:srgbClr val="003366"/>
+                </a:solidFill>
+                <a:latin typeface="Times New Roman"/>
+              </a:rPr>
+              <a:t>Fraud Risk Scoring: </a:t>
+            </a:r>
+            <a:r>
+              <a:rPr sz="1150">
+                <a:solidFill>
+                  <a:srgbClr val="1E1E1E"/>
+                </a:solidFill>
+                <a:latin typeface="Times New Roman"/>
+              </a:rPr>
+              <a:t>Predict calibrated risk scores (0% to 100%) for each transaction, optimized for highly imbalanced fraud data via alpha-free focal loss.</a:t>
+            </a:r>
+          </a:p>
+          <a:p>
+            <a:pPr>
+              <a:spcBef>
+                <a:spcPts val="300"/>
+              </a:spcBef>
+              <a:spcAft>
+                <a:spcPts val="300"/>
+              </a:spcAft>
+            </a:pPr>
+            <a:r>
+              <a:rPr sz="1200" b="1">
+                <a:solidFill>
+                  <a:srgbClr val="003366"/>
+                </a:solidFill>
+                <a:latin typeface="Times New Roman"/>
+              </a:rPr>
+              <a:t>Forensic Feature Explanations: </a:t>
+            </a:r>
+            <a:r>
+              <a:rPr sz="1150">
+                <a:solidFill>
+                  <a:srgbClr val="1E1E1E"/>
+                </a:solidFill>
+                <a:latin typeface="Times New Roman"/>
+              </a:rPr>
+              <a:t>Clearly show which specific indicators (amount, speed, network shape) triggered each fraud alert via exact TreeSHAP attributions.</a:t>
+            </a:r>
+          </a:p>
+          <a:p>
+            <a:pPr>
+              <a:spcBef>
+                <a:spcPts val="300"/>
+              </a:spcBef>
+              <a:spcAft>
+                <a:spcPts val="300"/>
+              </a:spcAft>
+            </a:pPr>
+            <a:r>
+              <a:rPr sz="1200" b="1">
+                <a:solidFill>
+                  <a:srgbClr val="003366"/>
+                </a:solidFill>
+                <a:latin typeface="Times New Roman"/>
+              </a:rPr>
+              <a:t>Visual Money-Path Reconstruction: </a:t>
+            </a:r>
+            <a:r>
+              <a:rPr sz="1150">
+                <a:solidFill>
+                  <a:srgbClr val="1E1E1E"/>
+                </a:solidFill>
+                <a:latin typeface="Times New Roman"/>
+              </a:rPr>
+              <a:t>Trace and display the suspicious chain of transfers in an interactive graph (Neo4j) for human auditors.</a:t>
+            </a:r>
+          </a:p>
+          <a:p>
+            <a:pPr>
+              <a:spcBef>
+                <a:spcPts val="300"/>
+              </a:spcBef>
+              <a:spcAft>
+                <a:spcPts val="300"/>
+              </a:spcAft>
+            </a:pPr>
+            <a:r>
+              <a:rPr sz="1200" b="1">
+                <a:solidFill>
+                  <a:srgbClr val="003366"/>
+                </a:solidFill>
+                <a:latin typeface="Times New Roman"/>
+              </a:rPr>
+              <a:t>Privacy-Preserving Federated Consensus: </a:t>
+            </a:r>
+            <a:r>
+              <a:rPr sz="1150">
+                <a:solidFill>
+                  <a:srgbClr val="1E1E1E"/>
+                </a:solidFill>
+                <a:latin typeface="Times New Roman"/>
+              </a:rPr>
+              <a:t>Enable multi-bank collaborative risk scoring (FedProx) without pooling raw proprietary transaction data.</a:t>
             </a:r>
           </a:p>
         </p:txBody>
@@ -10086,17 +10539,19 @@
           <a:bodyPr/>
           <a:lstStyle/>
           <a:p>
-            <a:pPr>
-              <a:defRPr sz="1200">
-                <a:solidFill>
-                  <a:srgbClr val="323232"/>
-                </a:solidFill>
-                <a:latin typeface="Times New Roman"/>
-              </a:defRPr>
-            </a:pPr>
-            <a:r>
+            <a:r>
+              <a:rPr sz="1000">
+                <a:solidFill>
+                  <a:srgbClr val="505050"/>
+                </a:solidFill>
+                <a:latin typeface="Times New Roman"/>
+              </a:rPr>
               <a:t>09-09-2026</a:t>
             </a:r>
+            <a:endParaRPr lang="en-IN">
+              <a:latin typeface="Times New Roman" panose="02020603050405020304" pitchFamily="18" charset="0"/>
+              <a:cs typeface="Times New Roman" panose="02020603050405020304" pitchFamily="18" charset="0"/>
+            </a:endParaRPr>
           </a:p>
         </p:txBody>
       </p:sp>
@@ -10121,15 +10576,11 @@
           <a:bodyPr/>
           <a:lstStyle/>
           <a:p>
-            <a:pPr>
-              <a:defRPr sz="1200">
-                <a:solidFill>
-                  <a:srgbClr val="323232"/>
-                </a:solidFill>
-                <a:latin typeface="Times New Roman"/>
-              </a:defRPr>
-            </a:pPr>
-            <a:r>
+            <a:r>
+              <a:rPr lang="en-IN" dirty="0">
+                <a:latin typeface="Times New Roman" panose="02020603050405020304" pitchFamily="18" charset="0"/>
+                <a:cs typeface="Times New Roman" panose="02020603050405020304" pitchFamily="18" charset="0"/>
+              </a:rPr>
               <a:t>SCOPE</a:t>
             </a:r>
           </a:p>
@@ -10156,17 +10607,17 @@
           <a:bodyPr/>
           <a:lstStyle/>
           <a:p>
-            <a:pPr>
-              <a:defRPr sz="1200">
-                <a:solidFill>
-                  <a:srgbClr val="323232"/>
-                </a:solidFill>
-                <a:latin typeface="Times New Roman"/>
-              </a:defRPr>
-            </a:pPr>
-            <a:r>
+            <a:fld id="{65201FD4-9D8D-4491-815B-63C7BF4F0034}" type="slidenum">
+              <a:rPr lang="en-IN" smtClean="0">
+                <a:latin typeface="Times New Roman" panose="02020603050405020304" pitchFamily="18" charset="0"/>
+                <a:cs typeface="Times New Roman" panose="02020603050405020304" pitchFamily="18" charset="0"/>
+              </a:rPr>
               <a:t>9</a:t>
-            </a:r>
+            </a:fld>
+            <a:endParaRPr lang="en-IN" dirty="0">
+              <a:latin typeface="Times New Roman" panose="02020603050405020304" pitchFamily="18" charset="0"/>
+              <a:cs typeface="Times New Roman" panose="02020603050405020304" pitchFamily="18" charset="0"/>
+            </a:endParaRPr>
           </a:p>
         </p:txBody>
       </p:sp>
